--- a/presentation/StoryBridge_智理杯_5分钟展示.pptx
+++ b/presentation/StoryBridge_智理杯_5分钟展示.pptx
@@ -20,6 +20,7 @@
     <p:sldId id="268" r:id="rId20"/>
     <p:sldId id="269" r:id="rId21"/>
     <p:sldId id="270" r:id="rId22"/>
+    <p:sldId id="271" r:id="rId23"/>
   </p:sldIdLst>
   <p:sldSz cx="12191999" cy="6858000" type="screen4x3"/>
   <p:notesSz cx="6858000" cy="9144000"/>
@@ -592,13 +593,13 @@
           <a:lstStyle/>
           <a:p>
             <a:r>
-              <a:t>建议用时：30 秒</a:t>
+              <a:t>建议用时：25 秒</a:t>
             </a:r>
           </a:p>
           <a:p/>
           <a:p>
             <a:r>
-              <a:t>这十八秒展示的是实际工作台。看三个动作：选择方案、查看影响、对照改稿。方法已经落成可以操作的产品。【播放十八秒。】编剧能沿着方案和关联场景，找到要核对的具体文字。</a:t>
+              <a:t>回到项目价值。同一个模型，Baseline 拿完整材料一次写完就交，改没改全、哪些场景受影响，没有单独的工作步骤和记录。StoryBridge 把故事状态、依赖图、逐场改写、检查修复接成流程。刚才沿着借笔和查分看到的，就是这条处理链怎样运作，以及最终输出在哪一处做得更好。</a:t>
             </a:r>
           </a:p>
         </p:txBody>
@@ -668,13 +669,13 @@
           <a:lstStyle/>
           <a:p>
             <a:r>
-              <a:t>建议用时：28 秒</a:t>
+              <a:t>建议用时：30 秒</a:t>
             </a:r>
           </a:p>
           <a:p/>
           <a:p>
             <a:r>
-              <a:t>最终交给编剧的有三部分。第一，按场景组织的目标语言稿和改前改后对照。第二，改编方案与影响范围，能解释为什么这么改。第三，检查结果、版本和修改记录，方便继续审稿和修稿。从选方案到交接成果，StoryBridge 提供的是完整工作台。</a:t>
+              <a:t>这十八秒展示的是实际工作台。看三个动作：选择方案、查看影响、对照改稿。方法已经落成可以操作的产品。【播放十八秒。】编剧能沿着方案和关联场景，找到要核对的具体文字。</a:t>
             </a:r>
           </a:p>
         </p:txBody>
@@ -744,13 +745,13 @@
           <a:lstStyle/>
           <a:p>
             <a:r>
-              <a:t>建议用时：16 秒</a:t>
+              <a:t>建议用时：28 秒</a:t>
             </a:r>
           </a:p>
           <a:p/>
           <a:p>
             <a:r>
-              <a:t>StoryBridge 把文化改编、影响追踪和检查修复接成一个产品。核心改法有对象，连带场景有路径，后续修稿有依据。让改编有依据，让剧情接得上。谢谢大家。</a:t>
+              <a:t>最终交给编剧的有三部分。第一，按场景组织的目标语言稿和改前改后对照。第二，改编方案与影响范围，能解释为什么这么改。第三，检查结果、版本和修改记录，方便继续审稿和修稿。从选方案到交接成果，StoryBridge 提供的是完整工作台。</a:t>
             </a:r>
           </a:p>
         </p:txBody>
@@ -820,13 +821,13 @@
           <a:lstStyle/>
           <a:p>
             <a:r>
-              <a:t>建议用时：0 秒</a:t>
+              <a:t>建议用时：16 秒</a:t>
             </a:r>
           </a:p>
           <a:p/>
           <a:p>
             <a:r>
-              <a:t>这两段是冻结输出原句，用于支持主讲第七页“改错”一栏。改编要求为沈曼换后 330、周雨换后 487。主讲第一栏“核心系统未改掉”来自用户补充的后续测试反馈，未定位原始记录；第三栏是一次生成流程缺少依赖追踪带来的风险。三栏并非同一次输出的三项实测缺陷。</a:t>
+              <a:t>StoryBridge 把文化改编、影响追踪和检查修复接成一个产品。核心改法有对象，连带场景有路径，后续修稿有依据。让改编有依据，让剧情接得上。谢谢大家。</a:t>
             </a:r>
           </a:p>
         </p:txBody>
@@ -902,7 +903,7 @@
           <a:p/>
           <a:p>
             <a:r>
-              <a:t>历史模型为 deepseek-v4-flash，调用预算不同。第 5 页四条边均来自 base_state.json：CM01 motivates E09、E09 causes E11、E09 appears_in S05、E11 appears_in S06。图实现为 NetworkX MultiDiGraph，保留边类型、原文依据和置信度；传播按关系确定方向，累计路径置信度，返回场景、影响类别和原因路径。所画路径是实际图中的一条路径；传播器给第六场返回的最佳原因路径为 CM01→E10→S06，并非声称所有路径都画在页上。CM01 返回 S01—S06，CM10 没有下游场景，后续检查修复继续处理包括 S09—S11 的场景，不能把庭审的修复声称为图直接命中。本例两轮回修。当前修复器支持先生成全篇事实基准再逐场修复，此项为当前代码能力，不声称历史试验已经使用了该新增能力。内部审阅尚有待确认项，本次仅编辑展示材料，原始结果未修改。</a:t>
+              <a:t>这两段是早期冻结输出原句，用于支持主讲第八页“改错”一栏。改编要求为沈曼换后 330、周雨换后 487。主讲第一栏“核心系统未改掉”来自用户补充的后续测试反馈，未定位原始记录；第三栏是一次生成流程缺少依赖追踪带来的风险。三栏并非同一次输出的三项实测缺陷，也不要与第 4—7 页的近期真实项目混为同一轮运行。</a:t>
             </a:r>
           </a:p>
         </p:txBody>
@@ -978,7 +979,83 @@
           <a:p/>
           <a:p>
             <a:r>
-              <a:t>截图来自原有产品录像。指出法庭文字里的 You saw 330，与前面查分场景一致。讲完回到第十二页结束。</a:t>
+              <a:t>早期对照模型为 deepseek-v4-flash，调用预算不同。第 4—7 页使用近期完成项目的真实保存结果，并明确标注为内部证据排版、非访客 UI。第 6 页从 method_evidence.json 逐条读取原因路径：CM01 返回 S01、S02、S04—S08 共七个场景，每项包含影响类型和原文证据。第 7 页读取同项目的 verification_reports 与 revisions：十二个场景和七项承诺均已检查，阻塞错误为零，仍有一项旧因果依赖边需要人工确认；右侧仅展示最后五轮修复记录。第 8 页的早期 Baseline 问题来自另一组冻结材料，不能声称与近期项目是同一轮输出。</a:t>
+            </a:r>
+          </a:p>
+        </p:txBody>
+      </p:sp>
+      <p:sp>
+        <p:nvSpPr>
+          <p:cNvPr id="4" name="Slide Number Placeholder 3"/>
+          <p:cNvSpPr>
+            <a:spLocks noGrp="1"/>
+          </p:cNvSpPr>
+          <p:nvPr>
+            <p:ph type="sldNum" idx="5" sz="quarter"/>
+          </p:nvPr>
+        </p:nvSpPr>
+        <p:spPr/>
+      </p:sp>
+    </p:spTree>
+  </p:cSld>
+  <p:clrMapOvr>
+    <a:masterClrMapping/>
+  </p:clrMapOvr>
+</p:notes>
+</file>
+
+<file path=ppt/notesSlides/notesSlide16.xml><?xml version="1.0" encoding="utf-8"?>
+<p:notes xmlns:a="http://schemas.openxmlformats.org/drawingml/2006/main" xmlns:p="http://schemas.openxmlformats.org/presentationml/2006/main" xmlns:r="http://schemas.openxmlformats.org/officeDocument/2006/relationships">
+  <p:cSld>
+    <p:spTree>
+      <p:nvGrpSpPr>
+        <p:cNvPr id="1" name=""/>
+        <p:cNvGrpSpPr/>
+        <p:nvPr/>
+      </p:nvGrpSpPr>
+      <p:grpSpPr>
+        <a:xfrm>
+          <a:off x="0" y="0"/>
+          <a:ext cx="0" cy="0"/>
+          <a:chOff x="0" y="0"/>
+          <a:chExt cx="0" cy="0"/>
+        </a:xfrm>
+      </p:grpSpPr>
+      <p:sp>
+        <p:nvSpPr>
+          <p:cNvPr id="2" name="Slide Image Placeholder 1"/>
+          <p:cNvSpPr>
+            <a:spLocks noGrp="1"/>
+          </p:cNvSpPr>
+          <p:nvPr>
+            <p:ph type="sldImg" idx="2"/>
+          </p:nvPr>
+        </p:nvSpPr>
+        <p:spPr/>
+      </p:sp>
+      <p:sp>
+        <p:nvSpPr>
+          <p:cNvPr id="3" name="Notes Placeholder 2"/>
+          <p:cNvSpPr>
+            <a:spLocks noGrp="1"/>
+          </p:cNvSpPr>
+          <p:nvPr>
+            <p:ph type="body" idx="3" sz="quarter"/>
+          </p:nvPr>
+        </p:nvSpPr>
+        <p:spPr/>
+        <p:txBody>
+          <a:bodyPr/>
+          <a:lstStyle/>
+          <a:p>
+            <a:r>
+              <a:t>建议用时：0 秒</a:t>
+            </a:r>
+          </a:p>
+          <a:p/>
+          <a:p>
+            <a:r>
+              <a:t>截图来自原有产品录像。指出法庭文字里的 You saw 330，与前面查分场景一致。讲完回到第十三页结束。</a:t>
             </a:r>
           </a:p>
         </p:txBody>
@@ -1200,13 +1277,13 @@
           <a:lstStyle/>
           <a:p>
             <a:r>
-              <a:t>建议用时：24 秒</a:t>
+              <a:t>建议用时：18 秒</a:t>
             </a:r>
           </a:p>
           <a:p/>
           <a:p>
             <a:r>
-              <a:t>系统先把这个故事拆成有编号的档案。高考是 CM01，沈曼借到周雨的笔是事件 E09，周雨查到四百八十七是 E11，各自对应具体场景。再为高考提供三类改法。这次选择重构为虚构的学术能力认证体系。接下来，从高考这个节点追踪影响。</a:t>
+              <a:t>模型没有直接把一篇全文丢给改写器。系统先保存结构化 Story State。图中是真实结果的节选：人物、核心规则、关键场景链、文化机制和叙事承诺都有稳定 ID；完整状态还保存一百二十三条依赖关系。后续每一步都引用这些对象。</a:t>
             </a:r>
           </a:p>
         </p:txBody>
@@ -1276,13 +1353,13 @@
           <a:lstStyle/>
           <a:p>
             <a:r>
-              <a:t>建议用时：24 秒</a:t>
+              <a:t>建议用时：19 秒</a:t>
             </a:r>
           </a:p>
           <a:p/>
           <a:p>
             <a:r>
-              <a:t>这是真实依赖图的节选。高考设定推动借笔事件，借笔发生在第五场，又导致周雨分数变化，结果出现在第六场。每条边记录关系类型和原文依据。系统沿边追踪，本次从高考节点返回第一到第六场，并给出每场的原因路径。这就把改动范围变成了可检查的数据。</a:t>
+              <a:t>这里把高考识别为高摩擦、高重要度的 CM01，并保留原文词、关联场景和叙事功能。右边是真实生成的 A、B、C 三种方案；本次选择 B，把高考替换为 SAT、ACT 与美国大学申请体系，同时记录为什么选、需要保留哪些剧情功能。</a:t>
             </a:r>
           </a:p>
         </p:txBody>
@@ -1352,13 +1429,13 @@
           <a:lstStyle/>
           <a:p>
             <a:r>
-              <a:t>建议用时：27 秒</a:t>
+              <a:t>建议用时：20 秒</a:t>
             </a:r>
           </a:p>
           <a:p/>
           <a:p>
             <a:r>
-              <a:t>找到场景后，改写器拿到借笔原文、新教育背景、相邻场摘要、人物资料，以及必须保留的换错人反转。改完，代码检查是否还残留高考旧称谓，模型结合全篇核对人物、分数和因果。发现的问题绑定场景编号，继续修复和复核。下面从改编完整性、结果正确性和依赖追踪三个方面，看这套流程的价值。</a:t>
+              <a:t>选择方案后，代码从 CM01 沿依赖边传播。本次真实返回七个场景：第一、第二、第四到第八场。左边保存每条路径，右边列出场景、影响类型和原文依据。它不仅说需要改，还能回答为什么这个场景被列入。</a:t>
             </a:r>
           </a:p>
         </p:txBody>
@@ -1428,13 +1505,13 @@
           <a:lstStyle/>
           <a:p>
             <a:r>
-              <a:t>建议用时：24 秒</a:t>
+              <a:t>建议用时：18 秒</a:t>
             </a:r>
           </a:p>
           <a:p/>
           <a:p>
             <a:r>
-              <a:t>把测试观察和流程对照放在一起，Baseline 暴露出三类短板。改不全：后续测试反馈中，要求换掉的核心系统仍然保留。改错：本次成稿把沈曼的结果写成别人的分数。再看流程，它没有独立的依赖追踪和影响清单，连带漏改需要编剧自行排查。全文写出来，不等于改编做完。</a:t>
+              <a:t>改写后再检查全篇。这份最新报告检查十二个场景和七项叙事承诺，没有阻塞错误，保留一项需要人工确认的旧依赖边。右边是最后五轮真实修复记录：每轮改了哪些场景、为什么改，都进入版本历史，而不是被下一次生成覆盖。</a:t>
             </a:r>
           </a:p>
         </p:txBody>
@@ -1504,13 +1581,13 @@
           <a:lstStyle/>
           <a:p>
             <a:r>
-              <a:t>建议用时：32 秒</a:t>
+              <a:t>建议用时：24 秒</a:t>
             </a:r>
           </a:p>
           <a:p/>
           <a:p>
             <a:r>
-              <a:t>StoryBridge 的价值，是把刚才三类风险变成编剧能检查的东西。核心改什么，有文化节点和选定方案，这次就是学术认证和数据换分模块。牵动哪里，有依赖图、场景清单和原文依据。出了问题，有检查报告和按场修复记录，这次包括庭审场景。这些都是实际产物。Baseline 交出成稿以后，方案有没有落实、后文有没有漏改，还得编剧自己追；我们的工作台把这些依据一起交出来。</a:t>
+              <a:t>回看早期测试和流程对照，Baseline 暴露出三类短板。改不全：后续测试反馈中，要求换掉的核心系统仍然保留。改错：早期冻结成稿把沈曼的结果写成别人的分数。再看流程，它没有独立的依赖追踪和影响清单，连带漏改需要编剧自行排查。全文写出来，不等于改编做完。</a:t>
             </a:r>
           </a:p>
         </p:txBody>
@@ -1580,13 +1657,13 @@
           <a:lstStyle/>
           <a:p>
             <a:r>
-              <a:t>建议用时：25 秒</a:t>
+              <a:t>建议用时：32 秒</a:t>
             </a:r>
           </a:p>
           <a:p/>
           <a:p>
             <a:r>
-              <a:t>回到项目价值。同一个模型，Baseline 拿完整材料一次写完就交，改没改全、哪些场景受影响，没有单独的工作步骤和记录。StoryBridge 把故事状态、依赖图、逐场改写、检查修复接成流程。刚才沿着借笔和查分看到的，就是这条处理链怎样运作，以及最终输出在哪一处做得更好。</a:t>
+              <a:t>StoryBridge 的价值，是把刚才三类风险变成编剧能检查的东西。核心改什么，有文化节点和选定方案，这次把高考换成 SAT、ACT 与大学申请体系。牵动哪里，有依赖图、七个场景和逐条原文依据。出了问题，有检查报告和按场修复记录；最新结果检查十二个场景和七项承诺，错误为零，并保留一项待人工确认。Baseline 交出成稿以后，这些仍要编剧自己追；我们的工作台把依据一起交出来。</a:t>
             </a:r>
           </a:p>
         </p:txBody>
@@ -4768,7 +4845,7 @@
               </a:defRPr>
             </a:pPr>
             <a:r>
-              <a:t>01 / 12</a:t>
+              <a:t>01 / 13</a:t>
             </a:r>
           </a:p>
         </p:txBody>
@@ -5082,7 +5159,7 @@
               </a:defRPr>
             </a:pPr>
             <a:r>
-              <a:t>StoryBridge   ·   18 秒真实产品演示</a:t>
+              <a:t>StoryBridge   ·   方法差异 · 本次对照采用同一模型</a:t>
             </a:r>
           </a:p>
         </p:txBody>
@@ -5128,7 +5205,7 @@
               </a:defRPr>
             </a:pPr>
             <a:r>
-              <a:t>把方法做进工作台：选、查、改都能操作</a:t>
+              <a:t>Baseline 写完就交；我们把审稿接进流程</a:t>
             </a:r>
           </a:p>
         </p:txBody>
@@ -5174,7 +5251,7 @@
               </a:defRPr>
             </a:pPr>
             <a:r>
-              <a:t>操作演示 · 已省略生成等待</a:t>
+              <a:t>StoryBridge · 短剧出海改编助手</a:t>
             </a:r>
           </a:p>
         </p:txBody>
@@ -5220,7 +5297,709 @@
               </a:defRPr>
             </a:pPr>
             <a:r>
-              <a:t>10 / 12</a:t>
+              <a:t>10 / 13</a:t>
+            </a:r>
+          </a:p>
+        </p:txBody>
+      </p:sp>
+      <p:sp>
+        <p:nvSpPr>
+          <p:cNvPr id="7" name="TextBox 6"/>
+          <p:cNvSpPr txBox="1"/>
+          <p:nvPr/>
+        </p:nvSpPr>
+        <p:spPr>
+          <a:xfrm>
+            <a:off x="740664" y="1773936"/>
+            <a:ext cx="10698480" cy="502920"/>
+          </a:xfrm>
+          <a:prstGeom prst="rect">
+            <a:avLst/>
+          </a:prstGeom>
+          <a:noFill/>
+        </p:spPr>
+        <p:txBody>
+          <a:bodyPr wrap="square" lIns="0" rIns="0" tIns="0" bIns="0" anchor="t">
+            <a:spAutoFit/>
+          </a:bodyPr>
+          <a:lstStyle/>
+          <a:p>
+            <a:pPr algn="l">
+              <a:lnSpc>
+                <a:spcPct val="116000"/>
+              </a:lnSpc>
+              <a:spcBef>
+                <a:spcPts val="0"/>
+              </a:spcBef>
+              <a:spcAft>
+                <a:spcPts val="0"/>
+              </a:spcAft>
+              <a:defRPr sz="2300" b="0">
+                <a:solidFill>
+                  <a:srgbClr val="182B37"/>
+                </a:solidFill>
+                <a:latin typeface="Microsoft YaHei"/>
+                <a:ea typeface="Microsoft YaHei"/>
+              </a:defRPr>
+            </a:pPr>
+            <a:r>
+              <a:t>Baseline = 同一模型拿完整材料，一次生成全文。</a:t>
+            </a:r>
+          </a:p>
+        </p:txBody>
+      </p:sp>
+      <p:sp>
+        <p:nvSpPr>
+          <p:cNvPr id="8" name="Rounded Rectangle 7"/>
+          <p:cNvSpPr/>
+          <p:nvPr/>
+        </p:nvSpPr>
+        <p:spPr>
+          <a:xfrm>
+            <a:off x="722376" y="2523744"/>
+            <a:ext cx="10744200" cy="1005840"/>
+          </a:xfrm>
+          <a:prstGeom prst="roundRect">
+            <a:avLst>
+              <a:gd name="adj" fmla="val 5000"/>
+            </a:avLst>
+          </a:prstGeom>
+          <a:solidFill>
+            <a:srgbClr val="F6E7E3"/>
+          </a:solidFill>
+          <a:ln>
+            <a:noFill/>
+          </a:ln>
+        </p:spPr>
+        <p:style>
+          <a:lnRef idx="1">
+            <a:schemeClr val="accent1"/>
+          </a:lnRef>
+          <a:fillRef idx="3">
+            <a:schemeClr val="accent1"/>
+          </a:fillRef>
+          <a:effectRef idx="2">
+            <a:schemeClr val="accent1"/>
+          </a:effectRef>
+          <a:fontRef idx="minor">
+            <a:schemeClr val="lt1"/>
+          </a:fontRef>
+        </p:style>
+        <p:txBody>
+          <a:bodyPr rtlCol="0" anchor="ctr"/>
+          <a:lstStyle/>
+          <a:p>
+            <a:pPr algn="ctr"/>
+          </a:p>
+        </p:txBody>
+      </p:sp>
+      <p:sp>
+        <p:nvSpPr>
+          <p:cNvPr id="9" name="TextBox 8"/>
+          <p:cNvSpPr txBox="1"/>
+          <p:nvPr/>
+        </p:nvSpPr>
+        <p:spPr>
+          <a:xfrm>
+            <a:off x="941832" y="2816352"/>
+            <a:ext cx="1901952" cy="393192"/>
+          </a:xfrm>
+          <a:prstGeom prst="rect">
+            <a:avLst/>
+          </a:prstGeom>
+          <a:noFill/>
+        </p:spPr>
+        <p:txBody>
+          <a:bodyPr wrap="square" lIns="0" rIns="0" tIns="0" bIns="0" anchor="t">
+            <a:spAutoFit/>
+          </a:bodyPr>
+          <a:lstStyle/>
+          <a:p>
+            <a:pPr algn="l">
+              <a:lnSpc>
+                <a:spcPct val="116000"/>
+              </a:lnSpc>
+              <a:spcBef>
+                <a:spcPts val="0"/>
+              </a:spcBef>
+              <a:spcAft>
+                <a:spcPts val="0"/>
+              </a:spcAft>
+              <a:defRPr sz="2400" b="1">
+                <a:solidFill>
+                  <a:srgbClr val="C64B3C"/>
+                </a:solidFill>
+                <a:latin typeface="Microsoft YaHei"/>
+                <a:ea typeface="Microsoft YaHei"/>
+              </a:defRPr>
+            </a:pPr>
+            <a:r>
+              <a:t>Baseline</a:t>
+            </a:r>
+          </a:p>
+        </p:txBody>
+      </p:sp>
+      <p:sp>
+        <p:nvSpPr>
+          <p:cNvPr id="10" name="TextBox 9"/>
+          <p:cNvSpPr txBox="1"/>
+          <p:nvPr/>
+        </p:nvSpPr>
+        <p:spPr>
+          <a:xfrm>
+            <a:off x="3044952" y="2816352"/>
+            <a:ext cx="8101583" cy="420624"/>
+          </a:xfrm>
+          <a:prstGeom prst="rect">
+            <a:avLst/>
+          </a:prstGeom>
+          <a:noFill/>
+        </p:spPr>
+        <p:txBody>
+          <a:bodyPr wrap="square" lIns="0" rIns="0" tIns="0" bIns="0" anchor="t">
+            <a:spAutoFit/>
+          </a:bodyPr>
+          <a:lstStyle/>
+          <a:p>
+            <a:pPr algn="l">
+              <a:lnSpc>
+                <a:spcPct val="116000"/>
+              </a:lnSpc>
+              <a:spcBef>
+                <a:spcPts val="0"/>
+              </a:spcBef>
+              <a:spcAft>
+                <a:spcPts val="0"/>
+              </a:spcAft>
+              <a:defRPr sz="2600" b="1">
+                <a:solidFill>
+                  <a:srgbClr val="182B37"/>
+                </a:solidFill>
+                <a:latin typeface="Microsoft YaHei"/>
+                <a:ea typeface="Microsoft YaHei"/>
+              </a:defRPr>
+            </a:pPr>
+            <a:r>
+              <a:t>完整输入  →  一次写全文  →  直接交付</a:t>
+            </a:r>
+          </a:p>
+        </p:txBody>
+      </p:sp>
+      <p:sp>
+        <p:nvSpPr>
+          <p:cNvPr id="11" name="TextBox 10"/>
+          <p:cNvSpPr txBox="1"/>
+          <p:nvPr/>
+        </p:nvSpPr>
+        <p:spPr>
+          <a:xfrm>
+            <a:off x="3063240" y="3675887"/>
+            <a:ext cx="8119872" cy="420624"/>
+          </a:xfrm>
+          <a:prstGeom prst="rect">
+            <a:avLst/>
+          </a:prstGeom>
+          <a:noFill/>
+        </p:spPr>
+        <p:txBody>
+          <a:bodyPr wrap="square" lIns="0" rIns="0" tIns="0" bIns="0" anchor="t">
+            <a:spAutoFit/>
+          </a:bodyPr>
+          <a:lstStyle/>
+          <a:p>
+            <a:pPr algn="l">
+              <a:lnSpc>
+                <a:spcPct val="116000"/>
+              </a:lnSpc>
+              <a:spcBef>
+                <a:spcPts val="0"/>
+              </a:spcBef>
+              <a:spcAft>
+                <a:spcPts val="0"/>
+              </a:spcAft>
+              <a:defRPr sz="2300" b="1">
+                <a:solidFill>
+                  <a:srgbClr val="C64B3C"/>
+                </a:solidFill>
+                <a:latin typeface="Microsoft YaHei"/>
+                <a:ea typeface="Microsoft YaHei"/>
+              </a:defRPr>
+            </a:pPr>
+            <a:r>
+              <a:t>没有后续检查，写错的内容也会一起交出去。</a:t>
+            </a:r>
+          </a:p>
+        </p:txBody>
+      </p:sp>
+      <p:sp>
+        <p:nvSpPr>
+          <p:cNvPr id="12" name="Rounded Rectangle 11"/>
+          <p:cNvSpPr/>
+          <p:nvPr/>
+        </p:nvSpPr>
+        <p:spPr>
+          <a:xfrm>
+            <a:off x="722376" y="4526280"/>
+            <a:ext cx="10744200" cy="877824"/>
+          </a:xfrm>
+          <a:prstGeom prst="roundRect">
+            <a:avLst>
+              <a:gd name="adj" fmla="val 5000"/>
+            </a:avLst>
+          </a:prstGeom>
+          <a:solidFill>
+            <a:srgbClr val="E7F0EC"/>
+          </a:solidFill>
+          <a:ln>
+            <a:noFill/>
+          </a:ln>
+        </p:spPr>
+        <p:style>
+          <a:lnRef idx="1">
+            <a:schemeClr val="accent1"/>
+          </a:lnRef>
+          <a:fillRef idx="3">
+            <a:schemeClr val="accent1"/>
+          </a:fillRef>
+          <a:effectRef idx="2">
+            <a:schemeClr val="accent1"/>
+          </a:effectRef>
+          <a:fontRef idx="minor">
+            <a:schemeClr val="lt1"/>
+          </a:fontRef>
+        </p:style>
+        <p:txBody>
+          <a:bodyPr rtlCol="0" anchor="ctr"/>
+          <a:lstStyle/>
+          <a:p>
+            <a:pPr algn="ctr"/>
+          </a:p>
+        </p:txBody>
+      </p:sp>
+      <p:sp>
+        <p:nvSpPr>
+          <p:cNvPr id="13" name="TextBox 12"/>
+          <p:cNvSpPr txBox="1"/>
+          <p:nvPr/>
+        </p:nvSpPr>
+        <p:spPr>
+          <a:xfrm>
+            <a:off x="941832" y="4782312"/>
+            <a:ext cx="2075688" cy="384048"/>
+          </a:xfrm>
+          <a:prstGeom prst="rect">
+            <a:avLst/>
+          </a:prstGeom>
+          <a:noFill/>
+        </p:spPr>
+        <p:txBody>
+          <a:bodyPr wrap="square" lIns="0" rIns="0" tIns="0" bIns="0" anchor="t">
+            <a:spAutoFit/>
+          </a:bodyPr>
+          <a:lstStyle/>
+          <a:p>
+            <a:pPr algn="l">
+              <a:lnSpc>
+                <a:spcPct val="116000"/>
+              </a:lnSpc>
+              <a:spcBef>
+                <a:spcPts val="0"/>
+              </a:spcBef>
+              <a:spcAft>
+                <a:spcPts val="0"/>
+              </a:spcAft>
+              <a:defRPr sz="2200" b="1">
+                <a:solidFill>
+                  <a:srgbClr val="267868"/>
+                </a:solidFill>
+                <a:latin typeface="Microsoft YaHei"/>
+                <a:ea typeface="Microsoft YaHei"/>
+              </a:defRPr>
+            </a:pPr>
+            <a:r>
+              <a:t>StoryBridge</a:t>
+            </a:r>
+          </a:p>
+        </p:txBody>
+      </p:sp>
+      <p:sp>
+        <p:nvSpPr>
+          <p:cNvPr id="14" name="TextBox 13"/>
+          <p:cNvSpPr txBox="1"/>
+          <p:nvPr/>
+        </p:nvSpPr>
+        <p:spPr>
+          <a:xfrm>
+            <a:off x="3044952" y="4782312"/>
+            <a:ext cx="8101583" cy="393192"/>
+          </a:xfrm>
+          <a:prstGeom prst="rect">
+            <a:avLst/>
+          </a:prstGeom>
+          <a:noFill/>
+        </p:spPr>
+        <p:txBody>
+          <a:bodyPr wrap="square" lIns="0" rIns="0" tIns="0" bIns="0" anchor="t">
+            <a:spAutoFit/>
+          </a:bodyPr>
+          <a:lstStyle/>
+          <a:p>
+            <a:pPr algn="l">
+              <a:lnSpc>
+                <a:spcPct val="116000"/>
+              </a:lnSpc>
+              <a:spcBef>
+                <a:spcPts val="0"/>
+              </a:spcBef>
+              <a:spcAft>
+                <a:spcPts val="0"/>
+              </a:spcAft>
+              <a:defRPr sz="2300" b="1">
+                <a:solidFill>
+                  <a:srgbClr val="267868"/>
+                </a:solidFill>
+                <a:latin typeface="Microsoft YaHei"/>
+                <a:ea typeface="Microsoft YaHei"/>
+              </a:defRPr>
+            </a:pPr>
+            <a:r>
+              <a:t>故事状态 → 依赖图 → 逐场改写 → 检查修复</a:t>
+            </a:r>
+          </a:p>
+        </p:txBody>
+      </p:sp>
+      <p:sp>
+        <p:nvSpPr>
+          <p:cNvPr id="15" name="Rounded Rectangle 14"/>
+          <p:cNvSpPr/>
+          <p:nvPr/>
+        </p:nvSpPr>
+        <p:spPr>
+          <a:xfrm>
+            <a:off x="658368" y="5687568"/>
+            <a:ext cx="10881360" cy="576072"/>
+          </a:xfrm>
+          <a:prstGeom prst="roundRect">
+            <a:avLst>
+              <a:gd name="adj" fmla="val 5000"/>
+            </a:avLst>
+          </a:prstGeom>
+          <a:solidFill>
+            <a:srgbClr val="E7F0EC"/>
+          </a:solidFill>
+          <a:ln>
+            <a:noFill/>
+          </a:ln>
+        </p:spPr>
+        <p:style>
+          <a:lnRef idx="1">
+            <a:schemeClr val="accent1"/>
+          </a:lnRef>
+          <a:fillRef idx="3">
+            <a:schemeClr val="accent1"/>
+          </a:fillRef>
+          <a:effectRef idx="2">
+            <a:schemeClr val="accent1"/>
+          </a:effectRef>
+          <a:fontRef idx="minor">
+            <a:schemeClr val="lt1"/>
+          </a:fontRef>
+        </p:style>
+        <p:txBody>
+          <a:bodyPr rtlCol="0" anchor="ctr"/>
+          <a:lstStyle/>
+          <a:p>
+            <a:pPr algn="ctr"/>
+          </a:p>
+        </p:txBody>
+      </p:sp>
+      <p:sp>
+        <p:nvSpPr>
+          <p:cNvPr id="16" name="TextBox 15"/>
+          <p:cNvSpPr txBox="1"/>
+          <p:nvPr/>
+        </p:nvSpPr>
+        <p:spPr>
+          <a:xfrm>
+            <a:off x="859536" y="5824728"/>
+            <a:ext cx="10479024" cy="347472"/>
+          </a:xfrm>
+          <a:prstGeom prst="rect">
+            <a:avLst/>
+          </a:prstGeom>
+          <a:noFill/>
+        </p:spPr>
+        <p:txBody>
+          <a:bodyPr wrap="square" lIns="0" rIns="0" tIns="0" bIns="0" anchor="t">
+            <a:spAutoFit/>
+          </a:bodyPr>
+          <a:lstStyle/>
+          <a:p>
+            <a:pPr algn="ctr">
+              <a:lnSpc>
+                <a:spcPct val="116000"/>
+              </a:lnSpc>
+              <a:spcBef>
+                <a:spcPts val="0"/>
+              </a:spcBef>
+              <a:spcAft>
+                <a:spcPts val="0"/>
+              </a:spcAft>
+              <a:defRPr sz="2000" b="1">
+                <a:solidFill>
+                  <a:srgbClr val="267868"/>
+                </a:solidFill>
+                <a:latin typeface="Microsoft YaHei"/>
+                <a:ea typeface="Microsoft YaHei"/>
+              </a:defRPr>
+            </a:pPr>
+            <a:r>
+              <a:t>“生成结束”不能当成“改编完成”。</a:t>
+            </a:r>
+          </a:p>
+        </p:txBody>
+      </p:sp>
+    </p:spTree>
+  </p:cSld>
+  <p:clrMapOvr>
+    <a:masterClrMapping/>
+  </p:clrMapOvr>
+</p:sld>
+</file>
+
+<file path=ppt/slides/slide11.xml><?xml version="1.0" encoding="utf-8"?>
+<p:sld xmlns:a="http://schemas.openxmlformats.org/drawingml/2006/main" xmlns:p="http://schemas.openxmlformats.org/presentationml/2006/main" xmlns:r="http://schemas.openxmlformats.org/officeDocument/2006/relationships">
+  <p:cSld>
+    <p:spTree>
+      <p:nvGrpSpPr>
+        <p:cNvPr id="1" name=""/>
+        <p:cNvGrpSpPr/>
+        <p:nvPr/>
+      </p:nvGrpSpPr>
+      <p:grpSpPr/>
+      <p:sp>
+        <p:nvSpPr>
+          <p:cNvPr id="2" name="Rectangle 1"/>
+          <p:cNvSpPr/>
+          <p:nvPr/>
+        </p:nvSpPr>
+        <p:spPr>
+          <a:xfrm>
+            <a:off x="0" y="0"/>
+            <a:ext cx="12191999" cy="6858000"/>
+          </a:xfrm>
+          <a:prstGeom prst="rect">
+            <a:avLst/>
+          </a:prstGeom>
+          <a:solidFill>
+            <a:srgbClr val="FAF9F5"/>
+          </a:solidFill>
+          <a:ln>
+            <a:noFill/>
+          </a:ln>
+        </p:spPr>
+        <p:style>
+          <a:lnRef idx="1">
+            <a:schemeClr val="accent1"/>
+          </a:lnRef>
+          <a:fillRef idx="3">
+            <a:schemeClr val="accent1"/>
+          </a:fillRef>
+          <a:effectRef idx="2">
+            <a:schemeClr val="accent1"/>
+          </a:effectRef>
+          <a:fontRef idx="minor">
+            <a:schemeClr val="lt1"/>
+          </a:fontRef>
+        </p:style>
+        <p:txBody>
+          <a:bodyPr rtlCol="0" anchor="ctr"/>
+          <a:lstStyle/>
+          <a:p>
+            <a:pPr algn="ctr"/>
+          </a:p>
+        </p:txBody>
+      </p:sp>
+      <p:sp>
+        <p:nvSpPr>
+          <p:cNvPr id="3" name="TextBox 2"/>
+          <p:cNvSpPr txBox="1"/>
+          <p:nvPr/>
+        </p:nvSpPr>
+        <p:spPr>
+          <a:xfrm>
+            <a:off x="566928" y="310896"/>
+            <a:ext cx="10972800" cy="246888"/>
+          </a:xfrm>
+          <a:prstGeom prst="rect">
+            <a:avLst/>
+          </a:prstGeom>
+          <a:noFill/>
+        </p:spPr>
+        <p:txBody>
+          <a:bodyPr wrap="square" lIns="0" rIns="0" tIns="0" bIns="0" anchor="t">
+            <a:spAutoFit/>
+          </a:bodyPr>
+          <a:lstStyle/>
+          <a:p>
+            <a:pPr algn="l">
+              <a:lnSpc>
+                <a:spcPct val="116000"/>
+              </a:lnSpc>
+              <a:spcBef>
+                <a:spcPts val="0"/>
+              </a:spcBef>
+              <a:spcAft>
+                <a:spcPts val="0"/>
+              </a:spcAft>
+              <a:defRPr sz="1100" b="1">
+                <a:solidFill>
+                  <a:srgbClr val="68757B"/>
+                </a:solidFill>
+                <a:latin typeface="Microsoft YaHei"/>
+                <a:ea typeface="Microsoft YaHei"/>
+              </a:defRPr>
+            </a:pPr>
+            <a:r>
+              <a:t>StoryBridge   ·   18 秒真实产品演示</a:t>
+            </a:r>
+          </a:p>
+        </p:txBody>
+      </p:sp>
+      <p:sp>
+        <p:nvSpPr>
+          <p:cNvPr id="4" name="TextBox 3"/>
+          <p:cNvSpPr txBox="1"/>
+          <p:nvPr/>
+        </p:nvSpPr>
+        <p:spPr>
+          <a:xfrm>
+            <a:off x="566928" y="832104"/>
+            <a:ext cx="10972800" cy="877824"/>
+          </a:xfrm>
+          <a:prstGeom prst="rect">
+            <a:avLst/>
+          </a:prstGeom>
+          <a:noFill/>
+        </p:spPr>
+        <p:txBody>
+          <a:bodyPr wrap="square" lIns="0" rIns="0" tIns="0" bIns="0" anchor="t">
+            <a:spAutoFit/>
+          </a:bodyPr>
+          <a:lstStyle/>
+          <a:p>
+            <a:pPr algn="l">
+              <a:lnSpc>
+                <a:spcPct val="116000"/>
+              </a:lnSpc>
+              <a:spcBef>
+                <a:spcPts val="0"/>
+              </a:spcBef>
+              <a:spcAft>
+                <a:spcPts val="0"/>
+              </a:spcAft>
+              <a:defRPr sz="3100" b="1">
+                <a:solidFill>
+                  <a:srgbClr val="182B37"/>
+                </a:solidFill>
+                <a:latin typeface="Microsoft YaHei"/>
+                <a:ea typeface="Microsoft YaHei"/>
+              </a:defRPr>
+            </a:pPr>
+            <a:r>
+              <a:t>把方法做进工作台：选、查、改都能操作</a:t>
+            </a:r>
+          </a:p>
+        </p:txBody>
+      </p:sp>
+      <p:sp>
+        <p:nvSpPr>
+          <p:cNvPr id="5" name="TextBox 4"/>
+          <p:cNvSpPr txBox="1"/>
+          <p:nvPr/>
+        </p:nvSpPr>
+        <p:spPr>
+          <a:xfrm>
+            <a:off x="566928" y="6419088"/>
+            <a:ext cx="10241280" cy="292608"/>
+          </a:xfrm>
+          <a:prstGeom prst="rect">
+            <a:avLst/>
+          </a:prstGeom>
+          <a:noFill/>
+        </p:spPr>
+        <p:txBody>
+          <a:bodyPr wrap="square" lIns="0" rIns="0" tIns="0" bIns="0" anchor="t">
+            <a:spAutoFit/>
+          </a:bodyPr>
+          <a:lstStyle/>
+          <a:p>
+            <a:pPr algn="l">
+              <a:lnSpc>
+                <a:spcPct val="116000"/>
+              </a:lnSpc>
+              <a:spcBef>
+                <a:spcPts val="0"/>
+              </a:spcBef>
+              <a:spcAft>
+                <a:spcPts val="0"/>
+              </a:spcAft>
+              <a:defRPr sz="1000" b="0">
+                <a:solidFill>
+                  <a:srgbClr val="68757B"/>
+                </a:solidFill>
+                <a:latin typeface="Microsoft YaHei"/>
+                <a:ea typeface="Microsoft YaHei"/>
+              </a:defRPr>
+            </a:pPr>
+            <a:r>
+              <a:t>操作演示 · 已省略生成等待</a:t>
+            </a:r>
+          </a:p>
+        </p:txBody>
+      </p:sp>
+      <p:sp>
+        <p:nvSpPr>
+          <p:cNvPr id="6" name="TextBox 5"/>
+          <p:cNvSpPr txBox="1"/>
+          <p:nvPr/>
+        </p:nvSpPr>
+        <p:spPr>
+          <a:xfrm>
+            <a:off x="11045952" y="6419088"/>
+            <a:ext cx="704088" cy="256032"/>
+          </a:xfrm>
+          <a:prstGeom prst="rect">
+            <a:avLst/>
+          </a:prstGeom>
+          <a:noFill/>
+        </p:spPr>
+        <p:txBody>
+          <a:bodyPr wrap="square" lIns="0" rIns="0" tIns="0" bIns="0" anchor="t">
+            <a:spAutoFit/>
+          </a:bodyPr>
+          <a:lstStyle/>
+          <a:p>
+            <a:pPr algn="l">
+              <a:lnSpc>
+                <a:spcPct val="116000"/>
+              </a:lnSpc>
+              <a:spcBef>
+                <a:spcPts val="0"/>
+              </a:spcBef>
+              <a:spcAft>
+                <a:spcPts val="0"/>
+              </a:spcAft>
+              <a:defRPr sz="1000" b="0">
+                <a:solidFill>
+                  <a:srgbClr val="68757B"/>
+                </a:solidFill>
+                <a:latin typeface="Microsoft YaHei"/>
+                <a:ea typeface="Microsoft YaHei"/>
+              </a:defRPr>
+            </a:pPr>
+            <a:r>
+              <a:t>11 / 13</a:t>
             </a:r>
           </a:p>
         </p:txBody>
@@ -5702,7 +6481,7 @@
 </p:sld>
 </file>
 
-<file path=ppt/slides/slide11.xml><?xml version="1.0" encoding="utf-8"?>
+<file path=ppt/slides/slide12.xml><?xml version="1.0" encoding="utf-8"?>
 <p:sld xmlns:a="http://schemas.openxmlformats.org/drawingml/2006/main" xmlns:p="http://schemas.openxmlformats.org/presentationml/2006/main" xmlns:r="http://schemas.openxmlformats.org/officeDocument/2006/relationships">
   <p:cSld>
     <p:spTree>
@@ -5934,7 +6713,7 @@
               </a:defRPr>
             </a:pPr>
             <a:r>
-              <a:t>11 / 12</a:t>
+              <a:t>12 / 13</a:t>
             </a:r>
           </a:p>
         </p:txBody>
@@ -6731,7 +7510,7 @@
 </p:sld>
 </file>
 
-<file path=ppt/slides/slide12.xml><?xml version="1.0" encoding="utf-8"?>
+<file path=ppt/slides/slide13.xml><?xml version="1.0" encoding="utf-8"?>
 <p:sld xmlns:a="http://schemas.openxmlformats.org/drawingml/2006/main" xmlns:p="http://schemas.openxmlformats.org/presentationml/2006/main" xmlns:r="http://schemas.openxmlformats.org/officeDocument/2006/relationships">
   <p:cSld>
     <p:spTree>
@@ -6917,7 +7696,7 @@
               </a:defRPr>
             </a:pPr>
             <a:r>
-              <a:t>12 / 12</a:t>
+              <a:t>13 / 13</a:t>
             </a:r>
           </a:p>
         </p:txBody>
@@ -7125,620 +7904,6 @@
             </a:pPr>
             <a:r>
               <a:t>谢谢大家</a:t>
-            </a:r>
-          </a:p>
-        </p:txBody>
-      </p:sp>
-    </p:spTree>
-  </p:cSld>
-  <p:clrMapOvr>
-    <a:masterClrMapping/>
-  </p:clrMapOvr>
-</p:sld>
-</file>
-
-<file path=ppt/slides/slide13.xml><?xml version="1.0" encoding="utf-8"?>
-<p:sld xmlns:a="http://schemas.openxmlformats.org/drawingml/2006/main" xmlns:p="http://schemas.openxmlformats.org/presentationml/2006/main" xmlns:r="http://schemas.openxmlformats.org/officeDocument/2006/relationships" show="0">
-  <p:cSld>
-    <p:spTree>
-      <p:nvGrpSpPr>
-        <p:cNvPr id="1" name=""/>
-        <p:cNvGrpSpPr/>
-        <p:nvPr/>
-      </p:nvGrpSpPr>
-      <p:grpSpPr/>
-      <p:sp>
-        <p:nvSpPr>
-          <p:cNvPr id="2" name="Rectangle 1"/>
-          <p:cNvSpPr/>
-          <p:nvPr/>
-        </p:nvSpPr>
-        <p:spPr>
-          <a:xfrm>
-            <a:off x="0" y="0"/>
-            <a:ext cx="12191999" cy="6858000"/>
-          </a:xfrm>
-          <a:prstGeom prst="rect">
-            <a:avLst/>
-          </a:prstGeom>
-          <a:solidFill>
-            <a:srgbClr val="FAF9F5"/>
-          </a:solidFill>
-          <a:ln>
-            <a:noFill/>
-          </a:ln>
-        </p:spPr>
-        <p:style>
-          <a:lnRef idx="1">
-            <a:schemeClr val="accent1"/>
-          </a:lnRef>
-          <a:fillRef idx="3">
-            <a:schemeClr val="accent1"/>
-          </a:fillRef>
-          <a:effectRef idx="2">
-            <a:schemeClr val="accent1"/>
-          </a:effectRef>
-          <a:fontRef idx="minor">
-            <a:schemeClr val="lt1"/>
-          </a:fontRef>
-        </p:style>
-        <p:txBody>
-          <a:bodyPr rtlCol="0" anchor="ctr"/>
-          <a:lstStyle/>
-          <a:p>
-            <a:pPr algn="ctr"/>
-          </a:p>
-        </p:txBody>
-      </p:sp>
-      <p:sp>
-        <p:nvSpPr>
-          <p:cNvPr id="3" name="TextBox 2"/>
-          <p:cNvSpPr txBox="1"/>
-          <p:nvPr/>
-        </p:nvSpPr>
-        <p:spPr>
-          <a:xfrm>
-            <a:off x="566928" y="310896"/>
-            <a:ext cx="10972800" cy="246888"/>
-          </a:xfrm>
-          <a:prstGeom prst="rect">
-            <a:avLst/>
-          </a:prstGeom>
-          <a:noFill/>
-        </p:spPr>
-        <p:txBody>
-          <a:bodyPr wrap="square" lIns="0" rIns="0" tIns="0" bIns="0" anchor="t">
-            <a:spAutoFit/>
-          </a:bodyPr>
-          <a:lstStyle/>
-          <a:p>
-            <a:pPr algn="l">
-              <a:lnSpc>
-                <a:spcPct val="116000"/>
-              </a:lnSpc>
-              <a:spcBef>
-                <a:spcPts val="0"/>
-              </a:spcBef>
-              <a:spcAft>
-                <a:spcPts val="0"/>
-              </a:spcAft>
-              <a:defRPr sz="1100" b="1">
-                <a:solidFill>
-                  <a:srgbClr val="68757B"/>
-                </a:solidFill>
-                <a:latin typeface="Microsoft YaHei"/>
-                <a:ea typeface="Microsoft YaHei"/>
-              </a:defRPr>
-            </a:pPr>
-            <a:r>
-              <a:t>StoryBridge   ·   引用核对</a:t>
-            </a:r>
-          </a:p>
-        </p:txBody>
-      </p:sp>
-      <p:sp>
-        <p:nvSpPr>
-          <p:cNvPr id="4" name="TextBox 3"/>
-          <p:cNvSpPr txBox="1"/>
-          <p:nvPr/>
-        </p:nvSpPr>
-        <p:spPr>
-          <a:xfrm>
-            <a:off x="566928" y="832104"/>
-            <a:ext cx="10972800" cy="877824"/>
-          </a:xfrm>
-          <a:prstGeom prst="rect">
-            <a:avLst/>
-          </a:prstGeom>
-          <a:noFill/>
-        </p:spPr>
-        <p:txBody>
-          <a:bodyPr wrap="square" lIns="0" rIns="0" tIns="0" bIns="0" anchor="t">
-            <a:spAutoFit/>
-          </a:bodyPr>
-          <a:lstStyle/>
-          <a:p>
-            <a:pPr algn="l">
-              <a:lnSpc>
-                <a:spcPct val="116000"/>
-              </a:lnSpc>
-              <a:spcBef>
-                <a:spcPts val="0"/>
-              </a:spcBef>
-              <a:spcAft>
-                <a:spcPts val="0"/>
-              </a:spcAft>
-              <a:defRPr sz="3100" b="1">
-                <a:solidFill>
-                  <a:srgbClr val="182B37"/>
-                </a:solidFill>
-                <a:latin typeface="Microsoft YaHei"/>
-                <a:ea typeface="Microsoft YaHei"/>
-              </a:defRPr>
-            </a:pPr>
-            <a:r>
-              <a:t>备答：两份稿的英语原句</a:t>
-            </a:r>
-          </a:p>
-        </p:txBody>
-      </p:sp>
-      <p:sp>
-        <p:nvSpPr>
-          <p:cNvPr id="5" name="TextBox 4"/>
-          <p:cNvSpPr txBox="1"/>
-          <p:nvPr/>
-        </p:nvSpPr>
-        <p:spPr>
-          <a:xfrm>
-            <a:off x="566928" y="6419088"/>
-            <a:ext cx="10241280" cy="292608"/>
-          </a:xfrm>
-          <a:prstGeom prst="rect">
-            <a:avLst/>
-          </a:prstGeom>
-          <a:noFill/>
-        </p:spPr>
-        <p:txBody>
-          <a:bodyPr wrap="square" lIns="0" rIns="0" tIns="0" bIns="0" anchor="t">
-            <a:spAutoFit/>
-          </a:bodyPr>
-          <a:lstStyle/>
-          <a:p>
-            <a:pPr algn="l">
-              <a:lnSpc>
-                <a:spcPct val="116000"/>
-              </a:lnSpc>
-              <a:spcBef>
-                <a:spcPts val="0"/>
-              </a:spcBef>
-              <a:spcAft>
-                <a:spcPts val="0"/>
-              </a:spcAft>
-              <a:defRPr sz="1000" b="0">
-                <a:solidFill>
-                  <a:srgbClr val="68757B"/>
-                </a:solidFill>
-                <a:latin typeface="Microsoft YaHei"/>
-                <a:ea typeface="Microsoft YaHei"/>
-              </a:defRPr>
-            </a:pPr>
-            <a:r>
-              <a:t>第 10 场 · 庭审台词原文</a:t>
-            </a:r>
-          </a:p>
-        </p:txBody>
-      </p:sp>
-      <p:sp>
-        <p:nvSpPr>
-          <p:cNvPr id="6" name="TextBox 5"/>
-          <p:cNvSpPr txBox="1"/>
-          <p:nvPr/>
-        </p:nvSpPr>
-        <p:spPr>
-          <a:xfrm>
-            <a:off x="11045952" y="6419088"/>
-            <a:ext cx="704088" cy="256032"/>
-          </a:xfrm>
-          <a:prstGeom prst="rect">
-            <a:avLst/>
-          </a:prstGeom>
-          <a:noFill/>
-        </p:spPr>
-        <p:txBody>
-          <a:bodyPr wrap="square" lIns="0" rIns="0" tIns="0" bIns="0" anchor="t">
-            <a:spAutoFit/>
-          </a:bodyPr>
-          <a:lstStyle/>
-          <a:p>
-            <a:pPr algn="l">
-              <a:lnSpc>
-                <a:spcPct val="116000"/>
-              </a:lnSpc>
-              <a:spcBef>
-                <a:spcPts val="0"/>
-              </a:spcBef>
-              <a:spcAft>
-                <a:spcPts val="0"/>
-              </a:spcAft>
-              <a:defRPr sz="1000" b="0">
-                <a:solidFill>
-                  <a:srgbClr val="68757B"/>
-                </a:solidFill>
-                <a:latin typeface="Microsoft YaHei"/>
-                <a:ea typeface="Microsoft YaHei"/>
-              </a:defRPr>
-            </a:pPr>
-            <a:r>
-              <a:t>备答 1</a:t>
-            </a:r>
-          </a:p>
-        </p:txBody>
-      </p:sp>
-      <p:sp>
-        <p:nvSpPr>
-          <p:cNvPr id="7" name="Rounded Rectangle 6"/>
-          <p:cNvSpPr/>
-          <p:nvPr/>
-        </p:nvSpPr>
-        <p:spPr>
-          <a:xfrm>
-            <a:off x="694944" y="1920240"/>
-            <a:ext cx="5212080" cy="3474720"/>
-          </a:xfrm>
-          <a:prstGeom prst="roundRect">
-            <a:avLst>
-              <a:gd name="adj" fmla="val 5000"/>
-            </a:avLst>
-          </a:prstGeom>
-          <a:solidFill>
-            <a:srgbClr val="FFFFFF"/>
-          </a:solidFill>
-          <a:ln w="8890">
-            <a:solidFill>
-              <a:srgbClr val="DEDACF"/>
-            </a:solidFill>
-          </a:ln>
-        </p:spPr>
-        <p:style>
-          <a:lnRef idx="1">
-            <a:schemeClr val="accent1"/>
-          </a:lnRef>
-          <a:fillRef idx="3">
-            <a:schemeClr val="accent1"/>
-          </a:fillRef>
-          <a:effectRef idx="2">
-            <a:schemeClr val="accent1"/>
-          </a:effectRef>
-          <a:fontRef idx="minor">
-            <a:schemeClr val="lt1"/>
-          </a:fontRef>
-        </p:style>
-        <p:txBody>
-          <a:bodyPr rtlCol="0" anchor="ctr"/>
-          <a:lstStyle/>
-          <a:p>
-            <a:pPr algn="ctr"/>
-          </a:p>
-        </p:txBody>
-      </p:sp>
-      <p:sp>
-        <p:nvSpPr>
-          <p:cNvPr id="8" name="TextBox 7"/>
-          <p:cNvSpPr txBox="1"/>
-          <p:nvPr/>
-        </p:nvSpPr>
-        <p:spPr>
-          <a:xfrm>
-            <a:off x="923544" y="2185416"/>
-            <a:ext cx="4754880" cy="429768"/>
-          </a:xfrm>
-          <a:prstGeom prst="rect">
-            <a:avLst/>
-          </a:prstGeom>
-          <a:noFill/>
-        </p:spPr>
-        <p:txBody>
-          <a:bodyPr wrap="square" lIns="0" rIns="0" tIns="0" bIns="0" anchor="t">
-            <a:spAutoFit/>
-          </a:bodyPr>
-          <a:lstStyle/>
-          <a:p>
-            <a:pPr algn="l">
-              <a:lnSpc>
-                <a:spcPct val="116000"/>
-              </a:lnSpc>
-              <a:spcBef>
-                <a:spcPts val="0"/>
-              </a:spcBef>
-              <a:spcAft>
-                <a:spcPts val="0"/>
-              </a:spcAft>
-              <a:defRPr sz="2200" b="1">
-                <a:solidFill>
-                  <a:srgbClr val="267868"/>
-                </a:solidFill>
-                <a:latin typeface="Microsoft YaHei"/>
-                <a:ea typeface="Microsoft YaHei"/>
-              </a:defRPr>
-            </a:pPr>
-            <a:r>
-              <a:t>StoryBridge · 第 10 场</a:t>
-            </a:r>
-          </a:p>
-        </p:txBody>
-      </p:sp>
-      <p:sp>
-        <p:nvSpPr>
-          <p:cNvPr id="9" name="TextBox 8"/>
-          <p:cNvSpPr txBox="1"/>
-          <p:nvPr/>
-        </p:nvSpPr>
-        <p:spPr>
-          <a:xfrm>
-            <a:off x="923544" y="2953512"/>
-            <a:ext cx="4754880" cy="2093976"/>
-          </a:xfrm>
-          <a:prstGeom prst="rect">
-            <a:avLst/>
-          </a:prstGeom>
-          <a:noFill/>
-        </p:spPr>
-        <p:txBody>
-          <a:bodyPr wrap="square" lIns="0" rIns="0" tIns="0" bIns="0" anchor="t">
-            <a:spAutoFit/>
-          </a:bodyPr>
-          <a:lstStyle/>
-          <a:p>
-            <a:pPr algn="l">
-              <a:lnSpc>
-                <a:spcPct val="116000"/>
-              </a:lnSpc>
-              <a:spcBef>
-                <a:spcPts val="0"/>
-              </a:spcBef>
-              <a:spcAft>
-                <a:spcPts val="0"/>
-              </a:spcAft>
-              <a:defRPr sz="2500" b="0">
-                <a:solidFill>
-                  <a:srgbClr val="182B37"/>
-                </a:solidFill>
-                <a:latin typeface="Microsoft YaHei"/>
-                <a:ea typeface="Microsoft YaHei"/>
-              </a:defRPr>
-            </a:pPr>
-            <a:r>
-              <a:t>You saw 330. Your first reaction was to call Lin Zhixia — not to file a data audit with the Alliance. Why?</a:t>
-            </a:r>
-          </a:p>
-        </p:txBody>
-      </p:sp>
-      <p:sp>
-        <p:nvSpPr>
-          <p:cNvPr id="10" name="Rounded Rectangle 9"/>
-          <p:cNvSpPr/>
-          <p:nvPr/>
-        </p:nvSpPr>
-        <p:spPr>
-          <a:xfrm>
-            <a:off x="6300216" y="1920240"/>
-            <a:ext cx="5212080" cy="3474720"/>
-          </a:xfrm>
-          <a:prstGeom prst="roundRect">
-            <a:avLst>
-              <a:gd name="adj" fmla="val 5000"/>
-            </a:avLst>
-          </a:prstGeom>
-          <a:solidFill>
-            <a:srgbClr val="FFFFFF"/>
-          </a:solidFill>
-          <a:ln w="8890">
-            <a:solidFill>
-              <a:srgbClr val="DEDACF"/>
-            </a:solidFill>
-          </a:ln>
-        </p:spPr>
-        <p:style>
-          <a:lnRef idx="1">
-            <a:schemeClr val="accent1"/>
-          </a:lnRef>
-          <a:fillRef idx="3">
-            <a:schemeClr val="accent1"/>
-          </a:fillRef>
-          <a:effectRef idx="2">
-            <a:schemeClr val="accent1"/>
-          </a:effectRef>
-          <a:fontRef idx="minor">
-            <a:schemeClr val="lt1"/>
-          </a:fontRef>
-        </p:style>
-        <p:txBody>
-          <a:bodyPr rtlCol="0" anchor="ctr"/>
-          <a:lstStyle/>
-          <a:p>
-            <a:pPr algn="ctr"/>
-          </a:p>
-        </p:txBody>
-      </p:sp>
-      <p:sp>
-        <p:nvSpPr>
-          <p:cNvPr id="11" name="TextBox 10"/>
-          <p:cNvSpPr txBox="1"/>
-          <p:nvPr/>
-        </p:nvSpPr>
-        <p:spPr>
-          <a:xfrm>
-            <a:off x="6528816" y="2185416"/>
-            <a:ext cx="4754880" cy="429768"/>
-          </a:xfrm>
-          <a:prstGeom prst="rect">
-            <a:avLst/>
-          </a:prstGeom>
-          <a:noFill/>
-        </p:spPr>
-        <p:txBody>
-          <a:bodyPr wrap="square" lIns="0" rIns="0" tIns="0" bIns="0" anchor="t">
-            <a:spAutoFit/>
-          </a:bodyPr>
-          <a:lstStyle/>
-          <a:p>
-            <a:pPr algn="l">
-              <a:lnSpc>
-                <a:spcPct val="116000"/>
-              </a:lnSpc>
-              <a:spcBef>
-                <a:spcPts val="0"/>
-              </a:spcBef>
-              <a:spcAft>
-                <a:spcPts val="0"/>
-              </a:spcAft>
-              <a:defRPr sz="2200" b="1">
-                <a:solidFill>
-                  <a:srgbClr val="C64B3C"/>
-                </a:solidFill>
-                <a:latin typeface="Microsoft YaHei"/>
-                <a:ea typeface="Microsoft YaHei"/>
-              </a:defRPr>
-            </a:pPr>
-            <a:r>
-              <a:t>一次全文改编 · 第 10 场</a:t>
-            </a:r>
-          </a:p>
-        </p:txBody>
-      </p:sp>
-      <p:sp>
-        <p:nvSpPr>
-          <p:cNvPr id="12" name="TextBox 11"/>
-          <p:cNvSpPr txBox="1"/>
-          <p:nvPr/>
-        </p:nvSpPr>
-        <p:spPr>
-          <a:xfrm>
-            <a:off x="6528816" y="2953512"/>
-            <a:ext cx="4754880" cy="2093976"/>
-          </a:xfrm>
-          <a:prstGeom prst="rect">
-            <a:avLst/>
-          </a:prstGeom>
-          <a:noFill/>
-        </p:spPr>
-        <p:txBody>
-          <a:bodyPr wrap="square" lIns="0" rIns="0" tIns="0" bIns="0" anchor="t">
-            <a:spAutoFit/>
-          </a:bodyPr>
-          <a:lstStyle/>
-          <a:p>
-            <a:pPr algn="l">
-              <a:lnSpc>
-                <a:spcPct val="116000"/>
-              </a:lnSpc>
-              <a:spcBef>
-                <a:spcPts val="0"/>
-              </a:spcBef>
-              <a:spcAft>
-                <a:spcPts val="0"/>
-              </a:spcAft>
-              <a:defRPr sz="2500" b="0">
-                <a:solidFill>
-                  <a:srgbClr val="182B37"/>
-                </a:solidFill>
-                <a:latin typeface="Microsoft YaHei"/>
-                <a:ea typeface="Microsoft YaHei"/>
-              </a:defRPr>
-            </a:pPr>
-            <a:r>
-              <a:t>When you saw your score was 487, why did you call Lydia Chen instead of filing an audit request?</a:t>
-            </a:r>
-          </a:p>
-        </p:txBody>
-      </p:sp>
-      <p:sp>
-        <p:nvSpPr>
-          <p:cNvPr id="13" name="Rounded Rectangle 12"/>
-          <p:cNvSpPr/>
-          <p:nvPr/>
-        </p:nvSpPr>
-        <p:spPr>
-          <a:xfrm>
-            <a:off x="658368" y="5687568"/>
-            <a:ext cx="10881360" cy="576072"/>
-          </a:xfrm>
-          <a:prstGeom prst="roundRect">
-            <a:avLst>
-              <a:gd name="adj" fmla="val 5000"/>
-            </a:avLst>
-          </a:prstGeom>
-          <a:solidFill>
-            <a:srgbClr val="E7F0EC"/>
-          </a:solidFill>
-          <a:ln>
-            <a:noFill/>
-          </a:ln>
-        </p:spPr>
-        <p:style>
-          <a:lnRef idx="1">
-            <a:schemeClr val="accent1"/>
-          </a:lnRef>
-          <a:fillRef idx="3">
-            <a:schemeClr val="accent1"/>
-          </a:fillRef>
-          <a:effectRef idx="2">
-            <a:schemeClr val="accent1"/>
-          </a:effectRef>
-          <a:fontRef idx="minor">
-            <a:schemeClr val="lt1"/>
-          </a:fontRef>
-        </p:style>
-        <p:txBody>
-          <a:bodyPr rtlCol="0" anchor="ctr"/>
-          <a:lstStyle/>
-          <a:p>
-            <a:pPr algn="ctr"/>
-          </a:p>
-        </p:txBody>
-      </p:sp>
-      <p:sp>
-        <p:nvSpPr>
-          <p:cNvPr id="14" name="TextBox 13"/>
-          <p:cNvSpPr txBox="1"/>
-          <p:nvPr/>
-        </p:nvSpPr>
-        <p:spPr>
-          <a:xfrm>
-            <a:off x="859536" y="5824728"/>
-            <a:ext cx="10479024" cy="347472"/>
-          </a:xfrm>
-          <a:prstGeom prst="rect">
-            <a:avLst/>
-          </a:prstGeom>
-          <a:noFill/>
-        </p:spPr>
-        <p:txBody>
-          <a:bodyPr wrap="square" lIns="0" rIns="0" tIns="0" bIns="0" anchor="t">
-            <a:spAutoFit/>
-          </a:bodyPr>
-          <a:lstStyle/>
-          <a:p>
-            <a:pPr algn="ctr">
-              <a:lnSpc>
-                <a:spcPct val="116000"/>
-              </a:lnSpc>
-              <a:spcBef>
-                <a:spcPts val="0"/>
-              </a:spcBef>
-              <a:spcAft>
-                <a:spcPts val="0"/>
-              </a:spcAft>
-              <a:defRPr sz="2000" b="1">
-                <a:solidFill>
-                  <a:srgbClr val="267868"/>
-                </a:solidFill>
-                <a:latin typeface="Microsoft YaHei"/>
-                <a:ea typeface="Microsoft YaHei"/>
-              </a:defRPr>
-            </a:pPr>
-            <a:r>
-              <a:t>核对依据：两份稿的第 6 场都写沈曼 330；第 10 场也应对应这个数字。</a:t>
             </a:r>
           </a:p>
         </p:txBody>
@@ -7845,7 +8010,7 @@
               </a:defRPr>
             </a:pPr>
             <a:r>
-              <a:t>StoryBridge   ·   案例说明</a:t>
+              <a:t>StoryBridge   ·   引用核对</a:t>
             </a:r>
           </a:p>
         </p:txBody>
@@ -7891,7 +8056,7 @@
               </a:defRPr>
             </a:pPr>
             <a:r>
-              <a:t>备答：比较方法与审稿范围</a:t>
+              <a:t>备答：两份稿的英语原句</a:t>
             </a:r>
           </a:p>
         </p:txBody>
@@ -7937,7 +8102,7 @@
               </a:defRPr>
             </a:pPr>
             <a:r>
-              <a:t>完整记录随交付包提供</a:t>
+              <a:t>第 10 场 · 庭审台词原文</a:t>
             </a:r>
           </a:p>
         </p:txBody>
@@ -7983,7 +8148,7 @@
               </a:defRPr>
             </a:pPr>
             <a:r>
-              <a:t>备答 2</a:t>
+              <a:t>备答 1</a:t>
             </a:r>
           </a:p>
         </p:txBody>
@@ -7996,8 +8161,8 @@
         </p:nvSpPr>
         <p:spPr>
           <a:xfrm>
-            <a:off x="704088" y="1865376"/>
-            <a:ext cx="10789920" cy="786384"/>
+            <a:off x="694944" y="1920240"/>
+            <a:ext cx="5212080" cy="3474720"/>
           </a:xfrm>
           <a:prstGeom prst="roundRect">
             <a:avLst>
@@ -8043,8 +8208,8 @@
         </p:nvSpPr>
         <p:spPr>
           <a:xfrm>
-            <a:off x="896112" y="2084832"/>
-            <a:ext cx="1920240" cy="365760"/>
+            <a:off x="923544" y="2185416"/>
+            <a:ext cx="4754880" cy="429768"/>
           </a:xfrm>
           <a:prstGeom prst="rect">
             <a:avLst/>
@@ -8067,7 +8232,7 @@
               <a:spcAft>
                 <a:spcPts val="0"/>
               </a:spcAft>
-              <a:defRPr sz="2100" b="1">
+              <a:defRPr sz="2200" b="1">
                 <a:solidFill>
                   <a:srgbClr val="267868"/>
                 </a:solidFill>
@@ -8076,7 +8241,7 @@
               </a:defRPr>
             </a:pPr>
             <a:r>
-              <a:t>相同输入</a:t>
+              <a:t>StoryBridge · 第 10 场</a:t>
             </a:r>
           </a:p>
         </p:txBody>
@@ -8089,8 +8254,8 @@
         </p:nvSpPr>
         <p:spPr>
           <a:xfrm>
-            <a:off x="2944368" y="2084832"/>
-            <a:ext cx="8266175" cy="393192"/>
+            <a:off x="923544" y="2953512"/>
+            <a:ext cx="4754880" cy="2093976"/>
           </a:xfrm>
           <a:prstGeom prst="rect">
             <a:avLst/>
@@ -8113,7 +8278,7 @@
               <a:spcAft>
                 <a:spcPts val="0"/>
               </a:spcAft>
-              <a:defRPr sz="2100" b="0">
+              <a:defRPr sz="2500" b="0">
                 <a:solidFill>
                   <a:srgbClr val="182B37"/>
                 </a:solidFill>
@@ -8122,7 +8287,7 @@
               </a:defRPr>
             </a:pPr>
             <a:r>
-              <a:t>同一模型、完整十二场剧本、相同约束和选定改编方案。</a:t>
+              <a:t>You saw 330. Your first reaction was to call Lin Zhixia — not to file a data audit with the Alliance. Why?</a:t>
             </a:r>
           </a:p>
         </p:txBody>
@@ -8135,8 +8300,8 @@
         </p:nvSpPr>
         <p:spPr>
           <a:xfrm>
-            <a:off x="704088" y="2816352"/>
-            <a:ext cx="10789920" cy="786384"/>
+            <a:off x="6300216" y="1920240"/>
+            <a:ext cx="5212080" cy="3474720"/>
           </a:xfrm>
           <a:prstGeom prst="roundRect">
             <a:avLst>
@@ -8182,8 +8347,8 @@
         </p:nvSpPr>
         <p:spPr>
           <a:xfrm>
-            <a:off x="896112" y="3035808"/>
-            <a:ext cx="1920240" cy="365760"/>
+            <a:off x="6528816" y="2185416"/>
+            <a:ext cx="4754880" cy="429768"/>
           </a:xfrm>
           <a:prstGeom prst="rect">
             <a:avLst/>
@@ -8206,16 +8371,16 @@
               <a:spcAft>
                 <a:spcPts val="0"/>
               </a:spcAft>
-              <a:defRPr sz="2100" b="1">
-                <a:solidFill>
-                  <a:srgbClr val="267868"/>
-                </a:solidFill>
-                <a:latin typeface="Microsoft YaHei"/>
-                <a:ea typeface="Microsoft YaHei"/>
-              </a:defRPr>
-            </a:pPr>
-            <a:r>
-              <a:t>不同流程</a:t>
+              <a:defRPr sz="2200" b="1">
+                <a:solidFill>
+                  <a:srgbClr val="C64B3C"/>
+                </a:solidFill>
+                <a:latin typeface="Microsoft YaHei"/>
+                <a:ea typeface="Microsoft YaHei"/>
+              </a:defRPr>
+            </a:pPr>
+            <a:r>
+              <a:t>一次全文改编 · 第 10 场</a:t>
             </a:r>
           </a:p>
         </p:txBody>
@@ -8228,8 +8393,8 @@
         </p:nvSpPr>
         <p:spPr>
           <a:xfrm>
-            <a:off x="2944368" y="3035808"/>
-            <a:ext cx="8266175" cy="393192"/>
+            <a:off x="6528816" y="2953512"/>
+            <a:ext cx="4754880" cy="2093976"/>
           </a:xfrm>
           <a:prstGeom prst="rect">
             <a:avLst/>
@@ -8252,7 +8417,7 @@
               <a:spcAft>
                 <a:spcPts val="0"/>
               </a:spcAft>
-              <a:defRPr sz="2100" b="0">
+              <a:defRPr sz="2500" b="0">
                 <a:solidFill>
                   <a:srgbClr val="182B37"/>
                 </a:solidFill>
@@ -8261,7 +8426,7 @@
               </a:defRPr>
             </a:pPr>
             <a:r>
-              <a:t>一次全文生成，与多阶段改写、检查、修复比较；预算不同。</a:t>
+              <a:t>When you saw your score was 487, why did you call Lydia Chen instead of filing an audit request?</a:t>
             </a:r>
           </a:p>
         </p:txBody>
@@ -8274,8 +8439,8 @@
         </p:nvSpPr>
         <p:spPr>
           <a:xfrm>
-            <a:off x="704088" y="3767328"/>
-            <a:ext cx="10789920" cy="786384"/>
+            <a:off x="658368" y="5687568"/>
+            <a:ext cx="10881360" cy="576072"/>
           </a:xfrm>
           <a:prstGeom prst="roundRect">
             <a:avLst>
@@ -8283,12 +8448,10 @@
             </a:avLst>
           </a:prstGeom>
           <a:solidFill>
-            <a:srgbClr val="FFFFFF"/>
+            <a:srgbClr val="E7F0EC"/>
           </a:solidFill>
-          <a:ln w="8890">
-            <a:solidFill>
-              <a:srgbClr val="DEDACF"/>
-            </a:solidFill>
+          <a:ln>
+            <a:noFill/>
           </a:ln>
         </p:spPr>
         <p:style>
@@ -8321,8 +8484,8 @@
         </p:nvSpPr>
         <p:spPr>
           <a:xfrm>
-            <a:off x="896112" y="3986784"/>
-            <a:ext cx="1920240" cy="365760"/>
+            <a:off x="859536" y="5824728"/>
+            <a:ext cx="10479024" cy="347472"/>
           </a:xfrm>
           <a:prstGeom prst="rect">
             <a:avLst/>
@@ -8335,17 +8498,17 @@
           </a:bodyPr>
           <a:lstStyle/>
           <a:p>
-            <a:pPr algn="l">
-              <a:lnSpc>
-                <a:spcPct val="116000"/>
-              </a:lnSpc>
-              <a:spcBef>
-                <a:spcPts val="0"/>
-              </a:spcBef>
-              <a:spcAft>
-                <a:spcPts val="0"/>
-              </a:spcAft>
-              <a:defRPr sz="2100" b="1">
+            <a:pPr algn="ctr">
+              <a:lnSpc>
+                <a:spcPct val="116000"/>
+              </a:lnSpc>
+              <a:spcBef>
+                <a:spcPts val="0"/>
+              </a:spcBef>
+              <a:spcAft>
+                <a:spcPts val="0"/>
+              </a:spcAft>
+              <a:defRPr sz="2000" b="1">
                 <a:solidFill>
                   <a:srgbClr val="267868"/>
                 </a:solidFill>
@@ -8354,192 +8517,7 @@
               </a:defRPr>
             </a:pPr>
             <a:r>
-              <a:t>关系图缺口</a:t>
-            </a:r>
-          </a:p>
-        </p:txBody>
-      </p:sp>
-      <p:sp>
-        <p:nvSpPr>
-          <p:cNvPr id="15" name="TextBox 14"/>
-          <p:cNvSpPr txBox="1"/>
-          <p:nvPr/>
-        </p:nvSpPr>
-        <p:spPr>
-          <a:xfrm>
-            <a:off x="2944368" y="3986784"/>
-            <a:ext cx="8266175" cy="393192"/>
-          </a:xfrm>
-          <a:prstGeom prst="rect">
-            <a:avLst/>
-          </a:prstGeom>
-          <a:noFill/>
-        </p:spPr>
-        <p:txBody>
-          <a:bodyPr wrap="square" lIns="0" rIns="0" tIns="0" bIns="0" anchor="t">
-            <a:spAutoFit/>
-          </a:bodyPr>
-          <a:lstStyle/>
-          <a:p>
-            <a:pPr algn="l">
-              <a:lnSpc>
-                <a:spcPct val="116000"/>
-              </a:lnSpc>
-              <a:spcBef>
-                <a:spcPts val="0"/>
-              </a:spcBef>
-              <a:spcAft>
-                <a:spcPts val="0"/>
-              </a:spcAft>
-              <a:defRPr sz="2100" b="0">
-                <a:solidFill>
-                  <a:srgbClr val="182B37"/>
-                </a:solidFill>
-                <a:latin typeface="Microsoft YaHei"/>
-                <a:ea typeface="Microsoft YaHei"/>
-              </a:defRPr>
-            </a:pPr>
-            <a:r>
-              <a:t>初始关系图未找出换分模块的后续场景；后续仍需检查。</a:t>
-            </a:r>
-          </a:p>
-        </p:txBody>
-      </p:sp>
-      <p:sp>
-        <p:nvSpPr>
-          <p:cNvPr id="16" name="Rounded Rectangle 15"/>
-          <p:cNvSpPr/>
-          <p:nvPr/>
-        </p:nvSpPr>
-        <p:spPr>
-          <a:xfrm>
-            <a:off x="704088" y="4718304"/>
-            <a:ext cx="10789920" cy="786384"/>
-          </a:xfrm>
-          <a:prstGeom prst="roundRect">
-            <a:avLst>
-              <a:gd name="adj" fmla="val 5000"/>
-            </a:avLst>
-          </a:prstGeom>
-          <a:solidFill>
-            <a:srgbClr val="FFFFFF"/>
-          </a:solidFill>
-          <a:ln w="8890">
-            <a:solidFill>
-              <a:srgbClr val="DEDACF"/>
-            </a:solidFill>
-          </a:ln>
-        </p:spPr>
-        <p:style>
-          <a:lnRef idx="1">
-            <a:schemeClr val="accent1"/>
-          </a:lnRef>
-          <a:fillRef idx="3">
-            <a:schemeClr val="accent1"/>
-          </a:fillRef>
-          <a:effectRef idx="2">
-            <a:schemeClr val="accent1"/>
-          </a:effectRef>
-          <a:fontRef idx="minor">
-            <a:schemeClr val="lt1"/>
-          </a:fontRef>
-        </p:style>
-        <p:txBody>
-          <a:bodyPr rtlCol="0" anchor="ctr"/>
-          <a:lstStyle/>
-          <a:p>
-            <a:pPr algn="ctr"/>
-          </a:p>
-        </p:txBody>
-      </p:sp>
-      <p:sp>
-        <p:nvSpPr>
-          <p:cNvPr id="17" name="TextBox 16"/>
-          <p:cNvSpPr txBox="1"/>
-          <p:nvPr/>
-        </p:nvSpPr>
-        <p:spPr>
-          <a:xfrm>
-            <a:off x="896112" y="4937760"/>
-            <a:ext cx="1920240" cy="365760"/>
-          </a:xfrm>
-          <a:prstGeom prst="rect">
-            <a:avLst/>
-          </a:prstGeom>
-          <a:noFill/>
-        </p:spPr>
-        <p:txBody>
-          <a:bodyPr wrap="square" lIns="0" rIns="0" tIns="0" bIns="0" anchor="t">
-            <a:spAutoFit/>
-          </a:bodyPr>
-          <a:lstStyle/>
-          <a:p>
-            <a:pPr algn="l">
-              <a:lnSpc>
-                <a:spcPct val="116000"/>
-              </a:lnSpc>
-              <a:spcBef>
-                <a:spcPts val="0"/>
-              </a:spcBef>
-              <a:spcAft>
-                <a:spcPts val="0"/>
-              </a:spcAft>
-              <a:defRPr sz="2100" b="1">
-                <a:solidFill>
-                  <a:srgbClr val="267868"/>
-                </a:solidFill>
-                <a:latin typeface="Microsoft YaHei"/>
-                <a:ea typeface="Microsoft YaHei"/>
-              </a:defRPr>
-            </a:pPr>
-            <a:r>
-              <a:t>结论范围</a:t>
-            </a:r>
-          </a:p>
-        </p:txBody>
-      </p:sp>
-      <p:sp>
-        <p:nvSpPr>
-          <p:cNvPr id="18" name="TextBox 17"/>
-          <p:cNvSpPr txBox="1"/>
-          <p:nvPr/>
-        </p:nvSpPr>
-        <p:spPr>
-          <a:xfrm>
-            <a:off x="2944368" y="4937760"/>
-            <a:ext cx="8266175" cy="393192"/>
-          </a:xfrm>
-          <a:prstGeom prst="rect">
-            <a:avLst/>
-          </a:prstGeom>
-          <a:noFill/>
-        </p:spPr>
-        <p:txBody>
-          <a:bodyPr wrap="square" lIns="0" rIns="0" tIns="0" bIns="0" anchor="t">
-            <a:spAutoFit/>
-          </a:bodyPr>
-          <a:lstStyle/>
-          <a:p>
-            <a:pPr algn="l">
-              <a:lnSpc>
-                <a:spcPct val="116000"/>
-              </a:lnSpc>
-              <a:spcBef>
-                <a:spcPts val="0"/>
-              </a:spcBef>
-              <a:spcAft>
-                <a:spcPts val="0"/>
-              </a:spcAft>
-              <a:defRPr sz="2100" b="0">
-                <a:solidFill>
-                  <a:srgbClr val="182B37"/>
-                </a:solidFill>
-                <a:latin typeface="Microsoft YaHei"/>
-                <a:ea typeface="Microsoft YaHei"/>
-              </a:defRPr>
-            </a:pPr>
-            <a:r>
-              <a:t>只核对这个案例；内部检查未全部通过，也没有统计胜率。</a:t>
+              <a:t>核对依据：两份稿的第 6 场都写沈曼 330；第 10 场也应对应这个数字。</a:t>
             </a:r>
           </a:p>
         </p:txBody>
@@ -8646,7 +8624,7 @@
               </a:defRPr>
             </a:pPr>
             <a:r>
-              <a:t>StoryBridge   ·   真实产品截图</a:t>
+              <a:t>StoryBridge   ·   案例说明</a:t>
             </a:r>
           </a:p>
         </p:txBody>
@@ -8692,7 +8670,7 @@
               </a:defRPr>
             </a:pPr>
             <a:r>
-              <a:t>视频备用：这里引用的是沈曼的 330 分</a:t>
+              <a:t>备答：比较方法与审稿范围</a:t>
             </a:r>
           </a:p>
         </p:txBody>
@@ -8738,7 +8716,808 @@
               </a:defRPr>
             </a:pPr>
             <a:r>
-              <a:t>视频播放失败时跳到本页，结束后回到第 12 页</a:t>
+              <a:t>完整记录随交付包提供</a:t>
+            </a:r>
+          </a:p>
+        </p:txBody>
+      </p:sp>
+      <p:sp>
+        <p:nvSpPr>
+          <p:cNvPr id="6" name="TextBox 5"/>
+          <p:cNvSpPr txBox="1"/>
+          <p:nvPr/>
+        </p:nvSpPr>
+        <p:spPr>
+          <a:xfrm>
+            <a:off x="11045952" y="6419088"/>
+            <a:ext cx="704088" cy="256032"/>
+          </a:xfrm>
+          <a:prstGeom prst="rect">
+            <a:avLst/>
+          </a:prstGeom>
+          <a:noFill/>
+        </p:spPr>
+        <p:txBody>
+          <a:bodyPr wrap="square" lIns="0" rIns="0" tIns="0" bIns="0" anchor="t">
+            <a:spAutoFit/>
+          </a:bodyPr>
+          <a:lstStyle/>
+          <a:p>
+            <a:pPr algn="l">
+              <a:lnSpc>
+                <a:spcPct val="116000"/>
+              </a:lnSpc>
+              <a:spcBef>
+                <a:spcPts val="0"/>
+              </a:spcBef>
+              <a:spcAft>
+                <a:spcPts val="0"/>
+              </a:spcAft>
+              <a:defRPr sz="1000" b="0">
+                <a:solidFill>
+                  <a:srgbClr val="68757B"/>
+                </a:solidFill>
+                <a:latin typeface="Microsoft YaHei"/>
+                <a:ea typeface="Microsoft YaHei"/>
+              </a:defRPr>
+            </a:pPr>
+            <a:r>
+              <a:t>备答 2</a:t>
+            </a:r>
+          </a:p>
+        </p:txBody>
+      </p:sp>
+      <p:sp>
+        <p:nvSpPr>
+          <p:cNvPr id="7" name="Rounded Rectangle 6"/>
+          <p:cNvSpPr/>
+          <p:nvPr/>
+        </p:nvSpPr>
+        <p:spPr>
+          <a:xfrm>
+            <a:off x="704088" y="1865376"/>
+            <a:ext cx="10789920" cy="786384"/>
+          </a:xfrm>
+          <a:prstGeom prst="roundRect">
+            <a:avLst>
+              <a:gd name="adj" fmla="val 5000"/>
+            </a:avLst>
+          </a:prstGeom>
+          <a:solidFill>
+            <a:srgbClr val="FFFFFF"/>
+          </a:solidFill>
+          <a:ln w="8890">
+            <a:solidFill>
+              <a:srgbClr val="DEDACF"/>
+            </a:solidFill>
+          </a:ln>
+        </p:spPr>
+        <p:style>
+          <a:lnRef idx="1">
+            <a:schemeClr val="accent1"/>
+          </a:lnRef>
+          <a:fillRef idx="3">
+            <a:schemeClr val="accent1"/>
+          </a:fillRef>
+          <a:effectRef idx="2">
+            <a:schemeClr val="accent1"/>
+          </a:effectRef>
+          <a:fontRef idx="minor">
+            <a:schemeClr val="lt1"/>
+          </a:fontRef>
+        </p:style>
+        <p:txBody>
+          <a:bodyPr rtlCol="0" anchor="ctr"/>
+          <a:lstStyle/>
+          <a:p>
+            <a:pPr algn="ctr"/>
+          </a:p>
+        </p:txBody>
+      </p:sp>
+      <p:sp>
+        <p:nvSpPr>
+          <p:cNvPr id="8" name="TextBox 7"/>
+          <p:cNvSpPr txBox="1"/>
+          <p:nvPr/>
+        </p:nvSpPr>
+        <p:spPr>
+          <a:xfrm>
+            <a:off x="896112" y="2084832"/>
+            <a:ext cx="1920240" cy="365760"/>
+          </a:xfrm>
+          <a:prstGeom prst="rect">
+            <a:avLst/>
+          </a:prstGeom>
+          <a:noFill/>
+        </p:spPr>
+        <p:txBody>
+          <a:bodyPr wrap="square" lIns="0" rIns="0" tIns="0" bIns="0" anchor="t">
+            <a:spAutoFit/>
+          </a:bodyPr>
+          <a:lstStyle/>
+          <a:p>
+            <a:pPr algn="l">
+              <a:lnSpc>
+                <a:spcPct val="116000"/>
+              </a:lnSpc>
+              <a:spcBef>
+                <a:spcPts val="0"/>
+              </a:spcBef>
+              <a:spcAft>
+                <a:spcPts val="0"/>
+              </a:spcAft>
+              <a:defRPr sz="2100" b="1">
+                <a:solidFill>
+                  <a:srgbClr val="267868"/>
+                </a:solidFill>
+                <a:latin typeface="Microsoft YaHei"/>
+                <a:ea typeface="Microsoft YaHei"/>
+              </a:defRPr>
+            </a:pPr>
+            <a:r>
+              <a:t>相同输入</a:t>
+            </a:r>
+          </a:p>
+        </p:txBody>
+      </p:sp>
+      <p:sp>
+        <p:nvSpPr>
+          <p:cNvPr id="9" name="TextBox 8"/>
+          <p:cNvSpPr txBox="1"/>
+          <p:nvPr/>
+        </p:nvSpPr>
+        <p:spPr>
+          <a:xfrm>
+            <a:off x="2944368" y="2084832"/>
+            <a:ext cx="8266175" cy="393192"/>
+          </a:xfrm>
+          <a:prstGeom prst="rect">
+            <a:avLst/>
+          </a:prstGeom>
+          <a:noFill/>
+        </p:spPr>
+        <p:txBody>
+          <a:bodyPr wrap="square" lIns="0" rIns="0" tIns="0" bIns="0" anchor="t">
+            <a:spAutoFit/>
+          </a:bodyPr>
+          <a:lstStyle/>
+          <a:p>
+            <a:pPr algn="l">
+              <a:lnSpc>
+                <a:spcPct val="116000"/>
+              </a:lnSpc>
+              <a:spcBef>
+                <a:spcPts val="0"/>
+              </a:spcBef>
+              <a:spcAft>
+                <a:spcPts val="0"/>
+              </a:spcAft>
+              <a:defRPr sz="2100" b="0">
+                <a:solidFill>
+                  <a:srgbClr val="182B37"/>
+                </a:solidFill>
+                <a:latin typeface="Microsoft YaHei"/>
+                <a:ea typeface="Microsoft YaHei"/>
+              </a:defRPr>
+            </a:pPr>
+            <a:r>
+              <a:t>同一模型、完整十二场剧本、相同约束和选定改编方案。</a:t>
+            </a:r>
+          </a:p>
+        </p:txBody>
+      </p:sp>
+      <p:sp>
+        <p:nvSpPr>
+          <p:cNvPr id="10" name="Rounded Rectangle 9"/>
+          <p:cNvSpPr/>
+          <p:nvPr/>
+        </p:nvSpPr>
+        <p:spPr>
+          <a:xfrm>
+            <a:off x="704088" y="2816352"/>
+            <a:ext cx="10789920" cy="786384"/>
+          </a:xfrm>
+          <a:prstGeom prst="roundRect">
+            <a:avLst>
+              <a:gd name="adj" fmla="val 5000"/>
+            </a:avLst>
+          </a:prstGeom>
+          <a:solidFill>
+            <a:srgbClr val="FFFFFF"/>
+          </a:solidFill>
+          <a:ln w="8890">
+            <a:solidFill>
+              <a:srgbClr val="DEDACF"/>
+            </a:solidFill>
+          </a:ln>
+        </p:spPr>
+        <p:style>
+          <a:lnRef idx="1">
+            <a:schemeClr val="accent1"/>
+          </a:lnRef>
+          <a:fillRef idx="3">
+            <a:schemeClr val="accent1"/>
+          </a:fillRef>
+          <a:effectRef idx="2">
+            <a:schemeClr val="accent1"/>
+          </a:effectRef>
+          <a:fontRef idx="minor">
+            <a:schemeClr val="lt1"/>
+          </a:fontRef>
+        </p:style>
+        <p:txBody>
+          <a:bodyPr rtlCol="0" anchor="ctr"/>
+          <a:lstStyle/>
+          <a:p>
+            <a:pPr algn="ctr"/>
+          </a:p>
+        </p:txBody>
+      </p:sp>
+      <p:sp>
+        <p:nvSpPr>
+          <p:cNvPr id="11" name="TextBox 10"/>
+          <p:cNvSpPr txBox="1"/>
+          <p:nvPr/>
+        </p:nvSpPr>
+        <p:spPr>
+          <a:xfrm>
+            <a:off x="896112" y="3035808"/>
+            <a:ext cx="1920240" cy="365760"/>
+          </a:xfrm>
+          <a:prstGeom prst="rect">
+            <a:avLst/>
+          </a:prstGeom>
+          <a:noFill/>
+        </p:spPr>
+        <p:txBody>
+          <a:bodyPr wrap="square" lIns="0" rIns="0" tIns="0" bIns="0" anchor="t">
+            <a:spAutoFit/>
+          </a:bodyPr>
+          <a:lstStyle/>
+          <a:p>
+            <a:pPr algn="l">
+              <a:lnSpc>
+                <a:spcPct val="116000"/>
+              </a:lnSpc>
+              <a:spcBef>
+                <a:spcPts val="0"/>
+              </a:spcBef>
+              <a:spcAft>
+                <a:spcPts val="0"/>
+              </a:spcAft>
+              <a:defRPr sz="2100" b="1">
+                <a:solidFill>
+                  <a:srgbClr val="267868"/>
+                </a:solidFill>
+                <a:latin typeface="Microsoft YaHei"/>
+                <a:ea typeface="Microsoft YaHei"/>
+              </a:defRPr>
+            </a:pPr>
+            <a:r>
+              <a:t>不同流程</a:t>
+            </a:r>
+          </a:p>
+        </p:txBody>
+      </p:sp>
+      <p:sp>
+        <p:nvSpPr>
+          <p:cNvPr id="12" name="TextBox 11"/>
+          <p:cNvSpPr txBox="1"/>
+          <p:nvPr/>
+        </p:nvSpPr>
+        <p:spPr>
+          <a:xfrm>
+            <a:off x="2944368" y="3035808"/>
+            <a:ext cx="8266175" cy="393192"/>
+          </a:xfrm>
+          <a:prstGeom prst="rect">
+            <a:avLst/>
+          </a:prstGeom>
+          <a:noFill/>
+        </p:spPr>
+        <p:txBody>
+          <a:bodyPr wrap="square" lIns="0" rIns="0" tIns="0" bIns="0" anchor="t">
+            <a:spAutoFit/>
+          </a:bodyPr>
+          <a:lstStyle/>
+          <a:p>
+            <a:pPr algn="l">
+              <a:lnSpc>
+                <a:spcPct val="116000"/>
+              </a:lnSpc>
+              <a:spcBef>
+                <a:spcPts val="0"/>
+              </a:spcBef>
+              <a:spcAft>
+                <a:spcPts val="0"/>
+              </a:spcAft>
+              <a:defRPr sz="2100" b="0">
+                <a:solidFill>
+                  <a:srgbClr val="182B37"/>
+                </a:solidFill>
+                <a:latin typeface="Microsoft YaHei"/>
+                <a:ea typeface="Microsoft YaHei"/>
+              </a:defRPr>
+            </a:pPr>
+            <a:r>
+              <a:t>一次全文生成，与多阶段改写、检查、修复比较；预算不同。</a:t>
+            </a:r>
+          </a:p>
+        </p:txBody>
+      </p:sp>
+      <p:sp>
+        <p:nvSpPr>
+          <p:cNvPr id="13" name="Rounded Rectangle 12"/>
+          <p:cNvSpPr/>
+          <p:nvPr/>
+        </p:nvSpPr>
+        <p:spPr>
+          <a:xfrm>
+            <a:off x="704088" y="3767328"/>
+            <a:ext cx="10789920" cy="786384"/>
+          </a:xfrm>
+          <a:prstGeom prst="roundRect">
+            <a:avLst>
+              <a:gd name="adj" fmla="val 5000"/>
+            </a:avLst>
+          </a:prstGeom>
+          <a:solidFill>
+            <a:srgbClr val="FFFFFF"/>
+          </a:solidFill>
+          <a:ln w="8890">
+            <a:solidFill>
+              <a:srgbClr val="DEDACF"/>
+            </a:solidFill>
+          </a:ln>
+        </p:spPr>
+        <p:style>
+          <a:lnRef idx="1">
+            <a:schemeClr val="accent1"/>
+          </a:lnRef>
+          <a:fillRef idx="3">
+            <a:schemeClr val="accent1"/>
+          </a:fillRef>
+          <a:effectRef idx="2">
+            <a:schemeClr val="accent1"/>
+          </a:effectRef>
+          <a:fontRef idx="minor">
+            <a:schemeClr val="lt1"/>
+          </a:fontRef>
+        </p:style>
+        <p:txBody>
+          <a:bodyPr rtlCol="0" anchor="ctr"/>
+          <a:lstStyle/>
+          <a:p>
+            <a:pPr algn="ctr"/>
+          </a:p>
+        </p:txBody>
+      </p:sp>
+      <p:sp>
+        <p:nvSpPr>
+          <p:cNvPr id="14" name="TextBox 13"/>
+          <p:cNvSpPr txBox="1"/>
+          <p:nvPr/>
+        </p:nvSpPr>
+        <p:spPr>
+          <a:xfrm>
+            <a:off x="896112" y="3986784"/>
+            <a:ext cx="1920240" cy="365760"/>
+          </a:xfrm>
+          <a:prstGeom prst="rect">
+            <a:avLst/>
+          </a:prstGeom>
+          <a:noFill/>
+        </p:spPr>
+        <p:txBody>
+          <a:bodyPr wrap="square" lIns="0" rIns="0" tIns="0" bIns="0" anchor="t">
+            <a:spAutoFit/>
+          </a:bodyPr>
+          <a:lstStyle/>
+          <a:p>
+            <a:pPr algn="l">
+              <a:lnSpc>
+                <a:spcPct val="116000"/>
+              </a:lnSpc>
+              <a:spcBef>
+                <a:spcPts val="0"/>
+              </a:spcBef>
+              <a:spcAft>
+                <a:spcPts val="0"/>
+              </a:spcAft>
+              <a:defRPr sz="2100" b="1">
+                <a:solidFill>
+                  <a:srgbClr val="267868"/>
+                </a:solidFill>
+                <a:latin typeface="Microsoft YaHei"/>
+                <a:ea typeface="Microsoft YaHei"/>
+              </a:defRPr>
+            </a:pPr>
+            <a:r>
+              <a:t>关系图缺口</a:t>
+            </a:r>
+          </a:p>
+        </p:txBody>
+      </p:sp>
+      <p:sp>
+        <p:nvSpPr>
+          <p:cNvPr id="15" name="TextBox 14"/>
+          <p:cNvSpPr txBox="1"/>
+          <p:nvPr/>
+        </p:nvSpPr>
+        <p:spPr>
+          <a:xfrm>
+            <a:off x="2944368" y="3986784"/>
+            <a:ext cx="8266175" cy="393192"/>
+          </a:xfrm>
+          <a:prstGeom prst="rect">
+            <a:avLst/>
+          </a:prstGeom>
+          <a:noFill/>
+        </p:spPr>
+        <p:txBody>
+          <a:bodyPr wrap="square" lIns="0" rIns="0" tIns="0" bIns="0" anchor="t">
+            <a:spAutoFit/>
+          </a:bodyPr>
+          <a:lstStyle/>
+          <a:p>
+            <a:pPr algn="l">
+              <a:lnSpc>
+                <a:spcPct val="116000"/>
+              </a:lnSpc>
+              <a:spcBef>
+                <a:spcPts val="0"/>
+              </a:spcBef>
+              <a:spcAft>
+                <a:spcPts val="0"/>
+              </a:spcAft>
+              <a:defRPr sz="2100" b="0">
+                <a:solidFill>
+                  <a:srgbClr val="182B37"/>
+                </a:solidFill>
+                <a:latin typeface="Microsoft YaHei"/>
+                <a:ea typeface="Microsoft YaHei"/>
+              </a:defRPr>
+            </a:pPr>
+            <a:r>
+              <a:t>初始关系图未找出换分模块的后续场景；后续仍需检查。</a:t>
+            </a:r>
+          </a:p>
+        </p:txBody>
+      </p:sp>
+      <p:sp>
+        <p:nvSpPr>
+          <p:cNvPr id="16" name="Rounded Rectangle 15"/>
+          <p:cNvSpPr/>
+          <p:nvPr/>
+        </p:nvSpPr>
+        <p:spPr>
+          <a:xfrm>
+            <a:off x="704088" y="4718304"/>
+            <a:ext cx="10789920" cy="786384"/>
+          </a:xfrm>
+          <a:prstGeom prst="roundRect">
+            <a:avLst>
+              <a:gd name="adj" fmla="val 5000"/>
+            </a:avLst>
+          </a:prstGeom>
+          <a:solidFill>
+            <a:srgbClr val="FFFFFF"/>
+          </a:solidFill>
+          <a:ln w="8890">
+            <a:solidFill>
+              <a:srgbClr val="DEDACF"/>
+            </a:solidFill>
+          </a:ln>
+        </p:spPr>
+        <p:style>
+          <a:lnRef idx="1">
+            <a:schemeClr val="accent1"/>
+          </a:lnRef>
+          <a:fillRef idx="3">
+            <a:schemeClr val="accent1"/>
+          </a:fillRef>
+          <a:effectRef idx="2">
+            <a:schemeClr val="accent1"/>
+          </a:effectRef>
+          <a:fontRef idx="minor">
+            <a:schemeClr val="lt1"/>
+          </a:fontRef>
+        </p:style>
+        <p:txBody>
+          <a:bodyPr rtlCol="0" anchor="ctr"/>
+          <a:lstStyle/>
+          <a:p>
+            <a:pPr algn="ctr"/>
+          </a:p>
+        </p:txBody>
+      </p:sp>
+      <p:sp>
+        <p:nvSpPr>
+          <p:cNvPr id="17" name="TextBox 16"/>
+          <p:cNvSpPr txBox="1"/>
+          <p:nvPr/>
+        </p:nvSpPr>
+        <p:spPr>
+          <a:xfrm>
+            <a:off x="896112" y="4937760"/>
+            <a:ext cx="1920240" cy="365760"/>
+          </a:xfrm>
+          <a:prstGeom prst="rect">
+            <a:avLst/>
+          </a:prstGeom>
+          <a:noFill/>
+        </p:spPr>
+        <p:txBody>
+          <a:bodyPr wrap="square" lIns="0" rIns="0" tIns="0" bIns="0" anchor="t">
+            <a:spAutoFit/>
+          </a:bodyPr>
+          <a:lstStyle/>
+          <a:p>
+            <a:pPr algn="l">
+              <a:lnSpc>
+                <a:spcPct val="116000"/>
+              </a:lnSpc>
+              <a:spcBef>
+                <a:spcPts val="0"/>
+              </a:spcBef>
+              <a:spcAft>
+                <a:spcPts val="0"/>
+              </a:spcAft>
+              <a:defRPr sz="2100" b="1">
+                <a:solidFill>
+                  <a:srgbClr val="267868"/>
+                </a:solidFill>
+                <a:latin typeface="Microsoft YaHei"/>
+                <a:ea typeface="Microsoft YaHei"/>
+              </a:defRPr>
+            </a:pPr>
+            <a:r>
+              <a:t>结论范围</a:t>
+            </a:r>
+          </a:p>
+        </p:txBody>
+      </p:sp>
+      <p:sp>
+        <p:nvSpPr>
+          <p:cNvPr id="18" name="TextBox 17"/>
+          <p:cNvSpPr txBox="1"/>
+          <p:nvPr/>
+        </p:nvSpPr>
+        <p:spPr>
+          <a:xfrm>
+            <a:off x="2944368" y="4937760"/>
+            <a:ext cx="8266175" cy="393192"/>
+          </a:xfrm>
+          <a:prstGeom prst="rect">
+            <a:avLst/>
+          </a:prstGeom>
+          <a:noFill/>
+        </p:spPr>
+        <p:txBody>
+          <a:bodyPr wrap="square" lIns="0" rIns="0" tIns="0" bIns="0" anchor="t">
+            <a:spAutoFit/>
+          </a:bodyPr>
+          <a:lstStyle/>
+          <a:p>
+            <a:pPr algn="l">
+              <a:lnSpc>
+                <a:spcPct val="116000"/>
+              </a:lnSpc>
+              <a:spcBef>
+                <a:spcPts val="0"/>
+              </a:spcBef>
+              <a:spcAft>
+                <a:spcPts val="0"/>
+              </a:spcAft>
+              <a:defRPr sz="2100" b="0">
+                <a:solidFill>
+                  <a:srgbClr val="182B37"/>
+                </a:solidFill>
+                <a:latin typeface="Microsoft YaHei"/>
+                <a:ea typeface="Microsoft YaHei"/>
+              </a:defRPr>
+            </a:pPr>
+            <a:r>
+              <a:t>只核对这个案例；内部检查未全部通过，也没有统计胜率。</a:t>
+            </a:r>
+          </a:p>
+        </p:txBody>
+      </p:sp>
+    </p:spTree>
+  </p:cSld>
+  <p:clrMapOvr>
+    <a:masterClrMapping/>
+  </p:clrMapOvr>
+</p:sld>
+</file>
+
+<file path=ppt/slides/slide16.xml><?xml version="1.0" encoding="utf-8"?>
+<p:sld xmlns:a="http://schemas.openxmlformats.org/drawingml/2006/main" xmlns:p="http://schemas.openxmlformats.org/presentationml/2006/main" xmlns:r="http://schemas.openxmlformats.org/officeDocument/2006/relationships" show="0">
+  <p:cSld>
+    <p:spTree>
+      <p:nvGrpSpPr>
+        <p:cNvPr id="1" name=""/>
+        <p:cNvGrpSpPr/>
+        <p:nvPr/>
+      </p:nvGrpSpPr>
+      <p:grpSpPr/>
+      <p:sp>
+        <p:nvSpPr>
+          <p:cNvPr id="2" name="Rectangle 1"/>
+          <p:cNvSpPr/>
+          <p:nvPr/>
+        </p:nvSpPr>
+        <p:spPr>
+          <a:xfrm>
+            <a:off x="0" y="0"/>
+            <a:ext cx="12191999" cy="6858000"/>
+          </a:xfrm>
+          <a:prstGeom prst="rect">
+            <a:avLst/>
+          </a:prstGeom>
+          <a:solidFill>
+            <a:srgbClr val="FAF9F5"/>
+          </a:solidFill>
+          <a:ln>
+            <a:noFill/>
+          </a:ln>
+        </p:spPr>
+        <p:style>
+          <a:lnRef idx="1">
+            <a:schemeClr val="accent1"/>
+          </a:lnRef>
+          <a:fillRef idx="3">
+            <a:schemeClr val="accent1"/>
+          </a:fillRef>
+          <a:effectRef idx="2">
+            <a:schemeClr val="accent1"/>
+          </a:effectRef>
+          <a:fontRef idx="minor">
+            <a:schemeClr val="lt1"/>
+          </a:fontRef>
+        </p:style>
+        <p:txBody>
+          <a:bodyPr rtlCol="0" anchor="ctr"/>
+          <a:lstStyle/>
+          <a:p>
+            <a:pPr algn="ctr"/>
+          </a:p>
+        </p:txBody>
+      </p:sp>
+      <p:sp>
+        <p:nvSpPr>
+          <p:cNvPr id="3" name="TextBox 2"/>
+          <p:cNvSpPr txBox="1"/>
+          <p:nvPr/>
+        </p:nvSpPr>
+        <p:spPr>
+          <a:xfrm>
+            <a:off x="566928" y="310896"/>
+            <a:ext cx="10972800" cy="246888"/>
+          </a:xfrm>
+          <a:prstGeom prst="rect">
+            <a:avLst/>
+          </a:prstGeom>
+          <a:noFill/>
+        </p:spPr>
+        <p:txBody>
+          <a:bodyPr wrap="square" lIns="0" rIns="0" tIns="0" bIns="0" anchor="t">
+            <a:spAutoFit/>
+          </a:bodyPr>
+          <a:lstStyle/>
+          <a:p>
+            <a:pPr algn="l">
+              <a:lnSpc>
+                <a:spcPct val="116000"/>
+              </a:lnSpc>
+              <a:spcBef>
+                <a:spcPts val="0"/>
+              </a:spcBef>
+              <a:spcAft>
+                <a:spcPts val="0"/>
+              </a:spcAft>
+              <a:defRPr sz="1100" b="1">
+                <a:solidFill>
+                  <a:srgbClr val="68757B"/>
+                </a:solidFill>
+                <a:latin typeface="Microsoft YaHei"/>
+                <a:ea typeface="Microsoft YaHei"/>
+              </a:defRPr>
+            </a:pPr>
+            <a:r>
+              <a:t>StoryBridge   ·   真实产品截图</a:t>
+            </a:r>
+          </a:p>
+        </p:txBody>
+      </p:sp>
+      <p:sp>
+        <p:nvSpPr>
+          <p:cNvPr id="4" name="TextBox 3"/>
+          <p:cNvSpPr txBox="1"/>
+          <p:nvPr/>
+        </p:nvSpPr>
+        <p:spPr>
+          <a:xfrm>
+            <a:off x="566928" y="832104"/>
+            <a:ext cx="10972800" cy="877824"/>
+          </a:xfrm>
+          <a:prstGeom prst="rect">
+            <a:avLst/>
+          </a:prstGeom>
+          <a:noFill/>
+        </p:spPr>
+        <p:txBody>
+          <a:bodyPr wrap="square" lIns="0" rIns="0" tIns="0" bIns="0" anchor="t">
+            <a:spAutoFit/>
+          </a:bodyPr>
+          <a:lstStyle/>
+          <a:p>
+            <a:pPr algn="l">
+              <a:lnSpc>
+                <a:spcPct val="116000"/>
+              </a:lnSpc>
+              <a:spcBef>
+                <a:spcPts val="0"/>
+              </a:spcBef>
+              <a:spcAft>
+                <a:spcPts val="0"/>
+              </a:spcAft>
+              <a:defRPr sz="3100" b="1">
+                <a:solidFill>
+                  <a:srgbClr val="182B37"/>
+                </a:solidFill>
+                <a:latin typeface="Microsoft YaHei"/>
+                <a:ea typeface="Microsoft YaHei"/>
+              </a:defRPr>
+            </a:pPr>
+            <a:r>
+              <a:t>视频备用：这里引用的是沈曼的 330 分</a:t>
+            </a:r>
+          </a:p>
+        </p:txBody>
+      </p:sp>
+      <p:sp>
+        <p:nvSpPr>
+          <p:cNvPr id="5" name="TextBox 4"/>
+          <p:cNvSpPr txBox="1"/>
+          <p:nvPr/>
+        </p:nvSpPr>
+        <p:spPr>
+          <a:xfrm>
+            <a:off x="566928" y="6419088"/>
+            <a:ext cx="10241280" cy="292608"/>
+          </a:xfrm>
+          <a:prstGeom prst="rect">
+            <a:avLst/>
+          </a:prstGeom>
+          <a:noFill/>
+        </p:spPr>
+        <p:txBody>
+          <a:bodyPr wrap="square" lIns="0" rIns="0" tIns="0" bIns="0" anchor="t">
+            <a:spAutoFit/>
+          </a:bodyPr>
+          <a:lstStyle/>
+          <a:p>
+            <a:pPr algn="l">
+              <a:lnSpc>
+                <a:spcPct val="116000"/>
+              </a:lnSpc>
+              <a:spcBef>
+                <a:spcPts val="0"/>
+              </a:spcBef>
+              <a:spcAft>
+                <a:spcPts val="0"/>
+              </a:spcAft>
+              <a:defRPr sz="1000" b="0">
+                <a:solidFill>
+                  <a:srgbClr val="68757B"/>
+                </a:solidFill>
+                <a:latin typeface="Microsoft YaHei"/>
+                <a:ea typeface="Microsoft YaHei"/>
+              </a:defRPr>
+            </a:pPr>
+            <a:r>
+              <a:t>视频播放失败时跳到本页，结束后回到第 13 页</a:t>
             </a:r>
           </a:p>
         </p:txBody>
@@ -9144,7 +9923,7 @@
               </a:defRPr>
             </a:pPr>
             <a:r>
-              <a:t>02 / 12</a:t>
+              <a:t>02 / 13</a:t>
             </a:r>
           </a:p>
         </p:txBody>
@@ -10173,7 +10952,7 @@
               </a:defRPr>
             </a:pPr>
             <a:r>
-              <a:t>03 / 12</a:t>
+              <a:t>03 / 13</a:t>
             </a:r>
           </a:p>
         </p:txBody>
@@ -11134,7 +11913,7 @@
               </a:defRPr>
             </a:pPr>
             <a:r>
-              <a:t>StoryBridge   ·   案例中的方法 1 · 故事状态 = 可追踪的故事档案</a:t>
+              <a:t>StoryBridge   ·   案例中的方法 1 · 结构化故事状态</a:t>
             </a:r>
           </a:p>
         </p:txBody>
@@ -11180,7 +11959,7 @@
               </a:defRPr>
             </a:pPr>
             <a:r>
-              <a:t>把这个故事拆成 Story State，再选改法</a:t>
+              <a:t>Story State：系统怎样理解完整故事</a:t>
             </a:r>
           </a:p>
         </p:txBody>
@@ -11226,7 +12005,7 @@
               </a:defRPr>
             </a:pPr>
             <a:r>
-              <a:t>StoryBridge · 短剧出海改编助手</a:t>
+              <a:t>真实保存结果 · 内部证据排版，非访客 UI</a:t>
             </a:r>
           </a:p>
         </p:txBody>
@@ -11272,1108 +12051,35 @@
               </a:defRPr>
             </a:pPr>
             <a:r>
-              <a:t>04 / 12</a:t>
-            </a:r>
-          </a:p>
-        </p:txBody>
-      </p:sp>
-      <p:sp>
-        <p:nvSpPr>
-          <p:cNvPr id="7" name="Rounded Rectangle 6"/>
-          <p:cNvSpPr/>
-          <p:nvPr/>
-        </p:nvSpPr>
-        <p:spPr>
-          <a:xfrm>
-            <a:off x="694944" y="1847088"/>
-            <a:ext cx="4892040" cy="3621024"/>
-          </a:xfrm>
-          <a:prstGeom prst="roundRect">
-            <a:avLst>
-              <a:gd name="adj" fmla="val 5000"/>
-            </a:avLst>
-          </a:prstGeom>
-          <a:solidFill>
-            <a:srgbClr val="FFFFFF"/>
-          </a:solidFill>
-          <a:ln w="8890">
-            <a:solidFill>
-              <a:srgbClr val="DEDACF"/>
-            </a:solidFill>
-          </a:ln>
-        </p:spPr>
-        <p:style>
-          <a:lnRef idx="1">
-            <a:schemeClr val="accent1"/>
-          </a:lnRef>
-          <a:fillRef idx="3">
-            <a:schemeClr val="accent1"/>
-          </a:fillRef>
-          <a:effectRef idx="2">
-            <a:schemeClr val="accent1"/>
-          </a:effectRef>
-          <a:fontRef idx="minor">
-            <a:schemeClr val="lt1"/>
-          </a:fontRef>
-        </p:style>
-        <p:txBody>
-          <a:bodyPr rtlCol="0" anchor="ctr"/>
-          <a:lstStyle/>
-          <a:p>
-            <a:pPr algn="ctr"/>
-          </a:p>
-        </p:txBody>
-      </p:sp>
-      <p:sp>
-        <p:nvSpPr>
-          <p:cNvPr id="8" name="TextBox 7"/>
-          <p:cNvSpPr txBox="1"/>
-          <p:nvPr/>
-        </p:nvSpPr>
-        <p:spPr>
-          <a:xfrm>
-            <a:off x="914400" y="2103120"/>
-            <a:ext cx="4453128" cy="429768"/>
-          </a:xfrm>
-          <a:prstGeom prst="rect">
-            <a:avLst/>
-          </a:prstGeom>
-          <a:noFill/>
-        </p:spPr>
-        <p:txBody>
-          <a:bodyPr wrap="square" lIns="0" rIns="0" tIns="0" bIns="0" anchor="t">
-            <a:spAutoFit/>
-          </a:bodyPr>
-          <a:lstStyle/>
-          <a:p>
-            <a:pPr algn="l">
-              <a:lnSpc>
-                <a:spcPct val="116000"/>
-              </a:lnSpc>
-              <a:spcBef>
-                <a:spcPts val="0"/>
-              </a:spcBef>
-              <a:spcAft>
-                <a:spcPts val="0"/>
-              </a:spcAft>
-              <a:defRPr sz="2300" b="1">
-                <a:solidFill>
-                  <a:srgbClr val="267868"/>
-                </a:solidFill>
-                <a:latin typeface="Microsoft YaHei"/>
-                <a:ea typeface="Microsoft YaHei"/>
-              </a:defRPr>
-            </a:pPr>
-            <a:r>
-              <a:t>本案例的故事状态（节选）</a:t>
-            </a:r>
-          </a:p>
-        </p:txBody>
-      </p:sp>
-      <p:sp>
-        <p:nvSpPr>
-          <p:cNvPr id="9" name="TextBox 8"/>
-          <p:cNvSpPr txBox="1"/>
-          <p:nvPr/>
-        </p:nvSpPr>
-        <p:spPr>
-          <a:xfrm>
-            <a:off x="914400" y="2770632"/>
-            <a:ext cx="4453128" cy="365760"/>
-          </a:xfrm>
-          <a:prstGeom prst="rect">
-            <a:avLst/>
-          </a:prstGeom>
-          <a:noFill/>
-        </p:spPr>
-        <p:txBody>
-          <a:bodyPr wrap="square" lIns="0" rIns="0" tIns="0" bIns="0" anchor="t">
-            <a:spAutoFit/>
-          </a:bodyPr>
-          <a:lstStyle/>
-          <a:p>
-            <a:pPr algn="l">
-              <a:lnSpc>
-                <a:spcPct val="116000"/>
-              </a:lnSpc>
-              <a:spcBef>
-                <a:spcPts val="0"/>
-              </a:spcBef>
-              <a:spcAft>
-                <a:spcPts val="0"/>
-              </a:spcAft>
-              <a:defRPr sz="2000" b="1">
-                <a:solidFill>
-                  <a:srgbClr val="267868"/>
-                </a:solidFill>
-                <a:latin typeface="Microsoft YaHei"/>
-                <a:ea typeface="Microsoft YaHei"/>
-              </a:defRPr>
-            </a:pPr>
-            <a:r>
-              <a:t>文化设定 · CM01</a:t>
-            </a:r>
-          </a:p>
-        </p:txBody>
-      </p:sp>
-      <p:sp>
-        <p:nvSpPr>
-          <p:cNvPr id="10" name="TextBox 9"/>
-          <p:cNvSpPr txBox="1"/>
-          <p:nvPr/>
-        </p:nvSpPr>
-        <p:spPr>
-          <a:xfrm>
-            <a:off x="914400" y="3154679"/>
-            <a:ext cx="4453128" cy="365760"/>
-          </a:xfrm>
-          <a:prstGeom prst="rect">
-            <a:avLst/>
-          </a:prstGeom>
-          <a:noFill/>
-        </p:spPr>
-        <p:txBody>
-          <a:bodyPr wrap="square" lIns="0" rIns="0" tIns="0" bIns="0" anchor="t">
-            <a:spAutoFit/>
-          </a:bodyPr>
-          <a:lstStyle/>
-          <a:p>
-            <a:pPr algn="l">
-              <a:lnSpc>
-                <a:spcPct val="116000"/>
-              </a:lnSpc>
-              <a:spcBef>
-                <a:spcPts val="0"/>
-              </a:spcBef>
-              <a:spcAft>
-                <a:spcPts val="0"/>
-              </a:spcAft>
-              <a:defRPr sz="2100" b="0">
-                <a:solidFill>
-                  <a:srgbClr val="182B37"/>
-                </a:solidFill>
-                <a:latin typeface="Microsoft YaHei"/>
-                <a:ea typeface="Microsoft YaHei"/>
-              </a:defRPr>
-            </a:pPr>
-            <a:r>
-              <a:t>高考</a:t>
-            </a:r>
-          </a:p>
-        </p:txBody>
-      </p:sp>
-      <p:sp>
-        <p:nvSpPr>
-          <p:cNvPr id="11" name="TextBox 10"/>
-          <p:cNvSpPr txBox="1"/>
-          <p:nvPr/>
-        </p:nvSpPr>
-        <p:spPr>
-          <a:xfrm>
-            <a:off x="914400" y="3630168"/>
-            <a:ext cx="4453128" cy="365760"/>
-          </a:xfrm>
-          <a:prstGeom prst="rect">
-            <a:avLst/>
-          </a:prstGeom>
-          <a:noFill/>
-        </p:spPr>
-        <p:txBody>
-          <a:bodyPr wrap="square" lIns="0" rIns="0" tIns="0" bIns="0" anchor="t">
-            <a:spAutoFit/>
-          </a:bodyPr>
-          <a:lstStyle/>
-          <a:p>
-            <a:pPr algn="l">
-              <a:lnSpc>
-                <a:spcPct val="116000"/>
-              </a:lnSpc>
-              <a:spcBef>
-                <a:spcPts val="0"/>
-              </a:spcBef>
-              <a:spcAft>
-                <a:spcPts val="0"/>
-              </a:spcAft>
-              <a:defRPr sz="2000" b="1">
-                <a:solidFill>
-                  <a:srgbClr val="267868"/>
-                </a:solidFill>
-                <a:latin typeface="Microsoft YaHei"/>
-                <a:ea typeface="Microsoft YaHei"/>
-              </a:defRPr>
-            </a:pPr>
-            <a:r>
-              <a:t>事件 E09 / 场景 S05</a:t>
-            </a:r>
-          </a:p>
-        </p:txBody>
-      </p:sp>
-      <p:sp>
-        <p:nvSpPr>
-          <p:cNvPr id="12" name="TextBox 11"/>
-          <p:cNvSpPr txBox="1"/>
-          <p:nvPr/>
-        </p:nvSpPr>
-        <p:spPr>
-          <a:xfrm>
-            <a:off x="914400" y="4014216"/>
-            <a:ext cx="4453128" cy="365760"/>
-          </a:xfrm>
-          <a:prstGeom prst="rect">
-            <a:avLst/>
-          </a:prstGeom>
-          <a:noFill/>
-        </p:spPr>
-        <p:txBody>
-          <a:bodyPr wrap="square" lIns="0" rIns="0" tIns="0" bIns="0" anchor="t">
-            <a:spAutoFit/>
-          </a:bodyPr>
-          <a:lstStyle/>
-          <a:p>
-            <a:pPr algn="l">
-              <a:lnSpc>
-                <a:spcPct val="116000"/>
-              </a:lnSpc>
-              <a:spcBef>
-                <a:spcPts val="0"/>
-              </a:spcBef>
-              <a:spcAft>
-                <a:spcPts val="0"/>
-              </a:spcAft>
-              <a:defRPr sz="2100" b="0">
-                <a:solidFill>
-                  <a:srgbClr val="182B37"/>
-                </a:solidFill>
-                <a:latin typeface="Microsoft YaHei"/>
-                <a:ea typeface="Microsoft YaHei"/>
-              </a:defRPr>
-            </a:pPr>
-            <a:r>
-              <a:t>沈曼借到周雨的笔</a:t>
-            </a:r>
-          </a:p>
-        </p:txBody>
-      </p:sp>
-      <p:sp>
-        <p:nvSpPr>
-          <p:cNvPr id="13" name="TextBox 12"/>
-          <p:cNvSpPr txBox="1"/>
-          <p:nvPr/>
-        </p:nvSpPr>
-        <p:spPr>
-          <a:xfrm>
-            <a:off x="914400" y="4489704"/>
-            <a:ext cx="4453128" cy="365760"/>
-          </a:xfrm>
-          <a:prstGeom prst="rect">
-            <a:avLst/>
-          </a:prstGeom>
-          <a:noFill/>
-        </p:spPr>
-        <p:txBody>
-          <a:bodyPr wrap="square" lIns="0" rIns="0" tIns="0" bIns="0" anchor="t">
-            <a:spAutoFit/>
-          </a:bodyPr>
-          <a:lstStyle/>
-          <a:p>
-            <a:pPr algn="l">
-              <a:lnSpc>
-                <a:spcPct val="116000"/>
-              </a:lnSpc>
-              <a:spcBef>
-                <a:spcPts val="0"/>
-              </a:spcBef>
-              <a:spcAft>
-                <a:spcPts val="0"/>
-              </a:spcAft>
-              <a:defRPr sz="2000" b="1">
-                <a:solidFill>
-                  <a:srgbClr val="267868"/>
-                </a:solidFill>
-                <a:latin typeface="Microsoft YaHei"/>
-                <a:ea typeface="Microsoft YaHei"/>
-              </a:defRPr>
-            </a:pPr>
-            <a:r>
-              <a:t>事件 E11 / 场景 S06</a:t>
-            </a:r>
-          </a:p>
-        </p:txBody>
-      </p:sp>
-      <p:sp>
-        <p:nvSpPr>
-          <p:cNvPr id="14" name="TextBox 13"/>
-          <p:cNvSpPr txBox="1"/>
-          <p:nvPr/>
-        </p:nvSpPr>
-        <p:spPr>
-          <a:xfrm>
-            <a:off x="914400" y="4873752"/>
-            <a:ext cx="4453128" cy="365760"/>
-          </a:xfrm>
-          <a:prstGeom prst="rect">
-            <a:avLst/>
-          </a:prstGeom>
-          <a:noFill/>
-        </p:spPr>
-        <p:txBody>
-          <a:bodyPr wrap="square" lIns="0" rIns="0" tIns="0" bIns="0" anchor="t">
-            <a:spAutoFit/>
-          </a:bodyPr>
-          <a:lstStyle/>
-          <a:p>
-            <a:pPr algn="l">
-              <a:lnSpc>
-                <a:spcPct val="116000"/>
-              </a:lnSpc>
-              <a:spcBef>
-                <a:spcPts val="0"/>
-              </a:spcBef>
-              <a:spcAft>
-                <a:spcPts val="0"/>
-              </a:spcAft>
-              <a:defRPr sz="2100" b="0">
-                <a:solidFill>
-                  <a:srgbClr val="182B37"/>
-                </a:solidFill>
-                <a:latin typeface="Microsoft YaHei"/>
-                <a:ea typeface="Microsoft YaHei"/>
-              </a:defRPr>
-            </a:pPr>
-            <a:r>
-              <a:t>周雨查到 487</a:t>
-            </a:r>
-          </a:p>
-        </p:txBody>
-      </p:sp>
-      <p:cxnSp>
-        <p:nvCxnSpPr>
-          <p:cNvPr id="15" name="Connector 14"/>
-          <p:cNvCxnSpPr/>
-          <p:nvPr/>
-        </p:nvCxnSpPr>
-        <p:spPr>
-          <a:xfrm>
-            <a:off x="5687568" y="3639312"/>
-            <a:ext cx="502920" cy="0"/>
-          </a:xfrm>
-          <a:prstGeom prst="line">
-            <a:avLst/>
-          </a:prstGeom>
-          <a:ln w="25400">
-            <a:solidFill>
-              <a:srgbClr val="B79456"/>
-            </a:solidFill>
-            <a:tailEnd type="triangle"/>
-          </a:ln>
-        </p:spPr>
-        <p:style>
-          <a:lnRef idx="2">
-            <a:schemeClr val="accent1"/>
-          </a:lnRef>
-          <a:fillRef idx="0">
-            <a:schemeClr val="accent1"/>
-          </a:fillRef>
-          <a:effectRef idx="1">
-            <a:schemeClr val="accent1"/>
-          </a:effectRef>
-          <a:fontRef idx="minor">
-            <a:schemeClr val="tx1"/>
-          </a:fontRef>
-        </p:style>
-      </p:cxnSp>
-      <p:sp>
-        <p:nvSpPr>
-          <p:cNvPr id="16" name="TextBox 15"/>
-          <p:cNvSpPr txBox="1"/>
-          <p:nvPr/>
-        </p:nvSpPr>
-        <p:spPr>
-          <a:xfrm>
-            <a:off x="6455664" y="2029968"/>
-            <a:ext cx="4745736" cy="466344"/>
-          </a:xfrm>
-          <a:prstGeom prst="rect">
-            <a:avLst/>
-          </a:prstGeom>
-          <a:noFill/>
-        </p:spPr>
-        <p:txBody>
-          <a:bodyPr wrap="square" lIns="0" rIns="0" tIns="0" bIns="0" anchor="t">
-            <a:spAutoFit/>
-          </a:bodyPr>
-          <a:lstStyle/>
-          <a:p>
-            <a:pPr algn="l">
-              <a:lnSpc>
-                <a:spcPct val="116000"/>
-              </a:lnSpc>
-              <a:spcBef>
-                <a:spcPts val="0"/>
-              </a:spcBef>
-              <a:spcAft>
-                <a:spcPts val="0"/>
-              </a:spcAft>
-              <a:defRPr sz="2400" b="1">
-                <a:solidFill>
-                  <a:srgbClr val="182B37"/>
-                </a:solidFill>
-                <a:latin typeface="Microsoft YaHei"/>
-                <a:ea typeface="Microsoft YaHei"/>
-              </a:defRPr>
-            </a:pPr>
-            <a:r>
-              <a:t>选择“高考”的改编方案</a:t>
-            </a:r>
-          </a:p>
-        </p:txBody>
-      </p:sp>
-      <p:sp>
-        <p:nvSpPr>
-          <p:cNvPr id="17" name="Rounded Rectangle 16"/>
-          <p:cNvSpPr/>
-          <p:nvPr/>
-        </p:nvSpPr>
-        <p:spPr>
-          <a:xfrm>
-            <a:off x="6373368" y="2788920"/>
-            <a:ext cx="5111496" cy="731520"/>
-          </a:xfrm>
-          <a:prstGeom prst="roundRect">
-            <a:avLst>
-              <a:gd name="adj" fmla="val 5000"/>
-            </a:avLst>
-          </a:prstGeom>
-          <a:solidFill>
-            <a:srgbClr val="FFFFFF"/>
-          </a:solidFill>
-          <a:ln w="8890">
-            <a:solidFill>
-              <a:srgbClr val="DEDACF"/>
-            </a:solidFill>
-          </a:ln>
-        </p:spPr>
-        <p:style>
-          <a:lnRef idx="1">
-            <a:schemeClr val="accent1"/>
-          </a:lnRef>
-          <a:fillRef idx="3">
-            <a:schemeClr val="accent1"/>
-          </a:fillRef>
-          <a:effectRef idx="2">
-            <a:schemeClr val="accent1"/>
-          </a:effectRef>
-          <a:fontRef idx="minor">
-            <a:schemeClr val="lt1"/>
-          </a:fontRef>
-        </p:style>
-        <p:txBody>
-          <a:bodyPr rtlCol="0" anchor="ctr"/>
-          <a:lstStyle/>
-          <a:p>
-            <a:pPr algn="ctr"/>
-          </a:p>
-        </p:txBody>
-      </p:sp>
-      <p:sp>
-        <p:nvSpPr>
-          <p:cNvPr id="18" name="TextBox 17"/>
-          <p:cNvSpPr txBox="1"/>
-          <p:nvPr/>
-        </p:nvSpPr>
-        <p:spPr>
-          <a:xfrm>
-            <a:off x="6537960" y="2962656"/>
-            <a:ext cx="393192" cy="411480"/>
-          </a:xfrm>
-          <a:prstGeom prst="rect">
-            <a:avLst/>
-          </a:prstGeom>
-          <a:noFill/>
-        </p:spPr>
-        <p:txBody>
-          <a:bodyPr wrap="square" lIns="0" rIns="0" tIns="0" bIns="0" anchor="t">
-            <a:spAutoFit/>
-          </a:bodyPr>
-          <a:lstStyle/>
-          <a:p>
-            <a:pPr algn="l">
-              <a:lnSpc>
-                <a:spcPct val="116000"/>
-              </a:lnSpc>
-              <a:spcBef>
-                <a:spcPts val="0"/>
-              </a:spcBef>
-              <a:spcAft>
-                <a:spcPts val="0"/>
-              </a:spcAft>
-              <a:defRPr sz="2400" b="1">
-                <a:solidFill>
-                  <a:srgbClr val="B79456"/>
-                </a:solidFill>
-                <a:latin typeface="Microsoft YaHei"/>
-                <a:ea typeface="Microsoft YaHei"/>
-              </a:defRPr>
-            </a:pPr>
-            <a:r>
-              <a:t>A</a:t>
-            </a:r>
-          </a:p>
-        </p:txBody>
-      </p:sp>
-      <p:sp>
-        <p:nvSpPr>
-          <p:cNvPr id="19" name="TextBox 18"/>
-          <p:cNvSpPr txBox="1"/>
-          <p:nvPr/>
-        </p:nvSpPr>
-        <p:spPr>
-          <a:xfrm>
-            <a:off x="7104888" y="2907791"/>
-            <a:ext cx="4114800" cy="347472"/>
-          </a:xfrm>
-          <a:prstGeom prst="rect">
-            <a:avLst/>
-          </a:prstGeom>
-          <a:noFill/>
-        </p:spPr>
-        <p:txBody>
-          <a:bodyPr wrap="square" lIns="0" rIns="0" tIns="0" bIns="0" anchor="t">
-            <a:spAutoFit/>
-          </a:bodyPr>
-          <a:lstStyle/>
-          <a:p>
-            <a:pPr algn="l">
-              <a:lnSpc>
-                <a:spcPct val="116000"/>
-              </a:lnSpc>
-              <a:spcBef>
-                <a:spcPts val="0"/>
-              </a:spcBef>
-              <a:spcAft>
-                <a:spcPts val="0"/>
-              </a:spcAft>
-              <a:defRPr sz="2100" b="1">
-                <a:solidFill>
-                  <a:srgbClr val="182B37"/>
-                </a:solidFill>
-                <a:latin typeface="Microsoft YaHei"/>
-                <a:ea typeface="Microsoft YaHei"/>
-              </a:defRPr>
-            </a:pPr>
-            <a:r>
-              <a:t>保留解释</a:t>
-            </a:r>
-          </a:p>
-        </p:txBody>
-      </p:sp>
-      <p:sp>
-        <p:nvSpPr>
-          <p:cNvPr id="20" name="TextBox 19"/>
-          <p:cNvSpPr txBox="1"/>
-          <p:nvPr/>
-        </p:nvSpPr>
-        <p:spPr>
-          <a:xfrm>
-            <a:off x="7104888" y="3227832"/>
-            <a:ext cx="4114800" cy="265176"/>
-          </a:xfrm>
-          <a:prstGeom prst="rect">
-            <a:avLst/>
-          </a:prstGeom>
-          <a:noFill/>
-        </p:spPr>
-        <p:txBody>
-          <a:bodyPr wrap="square" lIns="0" rIns="0" tIns="0" bIns="0" anchor="t">
-            <a:spAutoFit/>
-          </a:bodyPr>
-          <a:lstStyle/>
-          <a:p>
-            <a:pPr algn="l">
-              <a:lnSpc>
-                <a:spcPct val="116000"/>
-              </a:lnSpc>
-              <a:spcBef>
-                <a:spcPts val="0"/>
-              </a:spcBef>
-              <a:spcAft>
-                <a:spcPts val="0"/>
-              </a:spcAft>
-              <a:defRPr sz="1600" b="0">
-                <a:solidFill>
-                  <a:srgbClr val="68757B"/>
-                </a:solidFill>
-                <a:latin typeface="Microsoft YaHei"/>
-                <a:ea typeface="Microsoft YaHei"/>
-              </a:defRPr>
-            </a:pPr>
-            <a:r>
-              <a:t>保留设定，补足理解背景</a:t>
-            </a:r>
-          </a:p>
-        </p:txBody>
-      </p:sp>
-      <p:sp>
-        <p:nvSpPr>
-          <p:cNvPr id="21" name="Rounded Rectangle 20"/>
-          <p:cNvSpPr/>
-          <p:nvPr/>
-        </p:nvSpPr>
-        <p:spPr>
-          <a:xfrm>
-            <a:off x="6373368" y="3675887"/>
-            <a:ext cx="5111496" cy="731520"/>
-          </a:xfrm>
-          <a:prstGeom prst="roundRect">
-            <a:avLst>
-              <a:gd name="adj" fmla="val 5000"/>
-            </a:avLst>
-          </a:prstGeom>
-          <a:solidFill>
-            <a:srgbClr val="FFFFFF"/>
-          </a:solidFill>
-          <a:ln w="8890">
-            <a:solidFill>
-              <a:srgbClr val="DEDACF"/>
-            </a:solidFill>
-          </a:ln>
-        </p:spPr>
-        <p:style>
-          <a:lnRef idx="1">
-            <a:schemeClr val="accent1"/>
-          </a:lnRef>
-          <a:fillRef idx="3">
-            <a:schemeClr val="accent1"/>
-          </a:fillRef>
-          <a:effectRef idx="2">
-            <a:schemeClr val="accent1"/>
-          </a:effectRef>
-          <a:fontRef idx="minor">
-            <a:schemeClr val="lt1"/>
-          </a:fontRef>
-        </p:style>
-        <p:txBody>
-          <a:bodyPr rtlCol="0" anchor="ctr"/>
-          <a:lstStyle/>
-          <a:p>
-            <a:pPr algn="ctr"/>
-          </a:p>
-        </p:txBody>
-      </p:sp>
-      <p:sp>
-        <p:nvSpPr>
-          <p:cNvPr id="22" name="TextBox 21"/>
-          <p:cNvSpPr txBox="1"/>
-          <p:nvPr/>
-        </p:nvSpPr>
-        <p:spPr>
-          <a:xfrm>
-            <a:off x="6537960" y="3849624"/>
-            <a:ext cx="393192" cy="411480"/>
-          </a:xfrm>
-          <a:prstGeom prst="rect">
-            <a:avLst/>
-          </a:prstGeom>
-          <a:noFill/>
-        </p:spPr>
-        <p:txBody>
-          <a:bodyPr wrap="square" lIns="0" rIns="0" tIns="0" bIns="0" anchor="t">
-            <a:spAutoFit/>
-          </a:bodyPr>
-          <a:lstStyle/>
-          <a:p>
-            <a:pPr algn="l">
-              <a:lnSpc>
-                <a:spcPct val="116000"/>
-              </a:lnSpc>
-              <a:spcBef>
-                <a:spcPts val="0"/>
-              </a:spcBef>
-              <a:spcAft>
-                <a:spcPts val="0"/>
-              </a:spcAft>
-              <a:defRPr sz="2400" b="1">
-                <a:solidFill>
-                  <a:srgbClr val="B79456"/>
-                </a:solidFill>
-                <a:latin typeface="Microsoft YaHei"/>
-                <a:ea typeface="Microsoft YaHei"/>
-              </a:defRPr>
-            </a:pPr>
-            <a:r>
-              <a:t>B</a:t>
-            </a:r>
-          </a:p>
-        </p:txBody>
-      </p:sp>
-      <p:sp>
-        <p:nvSpPr>
-          <p:cNvPr id="23" name="TextBox 22"/>
-          <p:cNvSpPr txBox="1"/>
-          <p:nvPr/>
-        </p:nvSpPr>
-        <p:spPr>
-          <a:xfrm>
-            <a:off x="7104888" y="3794759"/>
-            <a:ext cx="4114800" cy="347472"/>
-          </a:xfrm>
-          <a:prstGeom prst="rect">
-            <a:avLst/>
-          </a:prstGeom>
-          <a:noFill/>
-        </p:spPr>
-        <p:txBody>
-          <a:bodyPr wrap="square" lIns="0" rIns="0" tIns="0" bIns="0" anchor="t">
-            <a:spAutoFit/>
-          </a:bodyPr>
-          <a:lstStyle/>
-          <a:p>
-            <a:pPr algn="l">
-              <a:lnSpc>
-                <a:spcPct val="116000"/>
-              </a:lnSpc>
-              <a:spcBef>
-                <a:spcPts val="0"/>
-              </a:spcBef>
-              <a:spcAft>
-                <a:spcPts val="0"/>
-              </a:spcAft>
-              <a:defRPr sz="2100" b="1">
-                <a:solidFill>
-                  <a:srgbClr val="182B37"/>
-                </a:solidFill>
-                <a:latin typeface="Microsoft YaHei"/>
-                <a:ea typeface="Microsoft YaHei"/>
-              </a:defRPr>
-            </a:pPr>
-            <a:r>
-              <a:t>功能替换</a:t>
-            </a:r>
-          </a:p>
-        </p:txBody>
-      </p:sp>
-      <p:sp>
-        <p:nvSpPr>
-          <p:cNvPr id="24" name="TextBox 23"/>
-          <p:cNvSpPr txBox="1"/>
-          <p:nvPr/>
-        </p:nvSpPr>
-        <p:spPr>
-          <a:xfrm>
-            <a:off x="7104888" y="4114800"/>
-            <a:ext cx="4114800" cy="265176"/>
-          </a:xfrm>
-          <a:prstGeom prst="rect">
-            <a:avLst/>
-          </a:prstGeom>
-          <a:noFill/>
-        </p:spPr>
-        <p:txBody>
-          <a:bodyPr wrap="square" lIns="0" rIns="0" tIns="0" bIns="0" anchor="t">
-            <a:spAutoFit/>
-          </a:bodyPr>
-          <a:lstStyle/>
-          <a:p>
-            <a:pPr algn="l">
-              <a:lnSpc>
-                <a:spcPct val="116000"/>
-              </a:lnSpc>
-              <a:spcBef>
-                <a:spcPts val="0"/>
-              </a:spcBef>
-              <a:spcAft>
-                <a:spcPts val="0"/>
-              </a:spcAft>
-              <a:defRPr sz="1600" b="0">
-                <a:solidFill>
-                  <a:srgbClr val="68757B"/>
-                </a:solidFill>
-                <a:latin typeface="Microsoft YaHei"/>
-                <a:ea typeface="Microsoft YaHei"/>
-              </a:defRPr>
-            </a:pPr>
-            <a:r>
-              <a:t>换一种设定，保留剧情作用</a:t>
-            </a:r>
-          </a:p>
-        </p:txBody>
-      </p:sp>
-      <p:sp>
-        <p:nvSpPr>
-          <p:cNvPr id="25" name="Rounded Rectangle 24"/>
-          <p:cNvSpPr/>
-          <p:nvPr/>
-        </p:nvSpPr>
-        <p:spPr>
-          <a:xfrm>
-            <a:off x="6373368" y="4562856"/>
-            <a:ext cx="5111496" cy="731520"/>
-          </a:xfrm>
-          <a:prstGeom prst="roundRect">
-            <a:avLst>
-              <a:gd name="adj" fmla="val 5000"/>
-            </a:avLst>
-          </a:prstGeom>
-          <a:solidFill>
-            <a:srgbClr val="E7F0EC"/>
-          </a:solidFill>
-          <a:ln w="8890">
-            <a:solidFill>
-              <a:srgbClr val="267868"/>
-            </a:solidFill>
-          </a:ln>
-        </p:spPr>
-        <p:style>
-          <a:lnRef idx="1">
-            <a:schemeClr val="accent1"/>
-          </a:lnRef>
-          <a:fillRef idx="3">
-            <a:schemeClr val="accent1"/>
-          </a:fillRef>
-          <a:effectRef idx="2">
-            <a:schemeClr val="accent1"/>
-          </a:effectRef>
-          <a:fontRef idx="minor">
-            <a:schemeClr val="lt1"/>
-          </a:fontRef>
-        </p:style>
-        <p:txBody>
-          <a:bodyPr rtlCol="0" anchor="ctr"/>
-          <a:lstStyle/>
-          <a:p>
-            <a:pPr algn="ctr"/>
-          </a:p>
-        </p:txBody>
-      </p:sp>
-      <p:sp>
-        <p:nvSpPr>
-          <p:cNvPr id="26" name="TextBox 25"/>
-          <p:cNvSpPr txBox="1"/>
-          <p:nvPr/>
-        </p:nvSpPr>
-        <p:spPr>
-          <a:xfrm>
-            <a:off x="6537960" y="4736592"/>
-            <a:ext cx="393192" cy="411480"/>
-          </a:xfrm>
-          <a:prstGeom prst="rect">
-            <a:avLst/>
-          </a:prstGeom>
-          <a:noFill/>
-        </p:spPr>
-        <p:txBody>
-          <a:bodyPr wrap="square" lIns="0" rIns="0" tIns="0" bIns="0" anchor="t">
-            <a:spAutoFit/>
-          </a:bodyPr>
-          <a:lstStyle/>
-          <a:p>
-            <a:pPr algn="l">
-              <a:lnSpc>
-                <a:spcPct val="116000"/>
-              </a:lnSpc>
-              <a:spcBef>
-                <a:spcPts val="0"/>
-              </a:spcBef>
-              <a:spcAft>
-                <a:spcPts val="0"/>
-              </a:spcAft>
-              <a:defRPr sz="2400" b="1">
-                <a:solidFill>
-                  <a:srgbClr val="B79456"/>
-                </a:solidFill>
-                <a:latin typeface="Microsoft YaHei"/>
-                <a:ea typeface="Microsoft YaHei"/>
-              </a:defRPr>
-            </a:pPr>
-            <a:r>
-              <a:t>C</a:t>
-            </a:r>
-          </a:p>
-        </p:txBody>
-      </p:sp>
-      <p:sp>
-        <p:nvSpPr>
-          <p:cNvPr id="27" name="TextBox 26"/>
-          <p:cNvSpPr txBox="1"/>
-          <p:nvPr/>
-        </p:nvSpPr>
-        <p:spPr>
-          <a:xfrm>
-            <a:off x="7104888" y="4681728"/>
-            <a:ext cx="4114800" cy="347472"/>
-          </a:xfrm>
-          <a:prstGeom prst="rect">
-            <a:avLst/>
-          </a:prstGeom>
-          <a:noFill/>
-        </p:spPr>
-        <p:txBody>
-          <a:bodyPr wrap="square" lIns="0" rIns="0" tIns="0" bIns="0" anchor="t">
-            <a:spAutoFit/>
-          </a:bodyPr>
-          <a:lstStyle/>
-          <a:p>
-            <a:pPr algn="l">
-              <a:lnSpc>
-                <a:spcPct val="116000"/>
-              </a:lnSpc>
-              <a:spcBef>
-                <a:spcPts val="0"/>
-              </a:spcBef>
-              <a:spcAft>
-                <a:spcPts val="0"/>
-              </a:spcAft>
-              <a:defRPr sz="2100" b="1">
-                <a:solidFill>
-                  <a:srgbClr val="182B37"/>
-                </a:solidFill>
-                <a:latin typeface="Microsoft YaHei"/>
-                <a:ea typeface="Microsoft YaHei"/>
-              </a:defRPr>
-            </a:pPr>
-            <a:r>
-              <a:t>情节重构</a:t>
-            </a:r>
-          </a:p>
-        </p:txBody>
-      </p:sp>
-      <p:sp>
-        <p:nvSpPr>
-          <p:cNvPr id="28" name="TextBox 27"/>
-          <p:cNvSpPr txBox="1"/>
-          <p:nvPr/>
-        </p:nvSpPr>
-        <p:spPr>
-          <a:xfrm>
-            <a:off x="7104888" y="5001768"/>
-            <a:ext cx="4114800" cy="265176"/>
-          </a:xfrm>
-          <a:prstGeom prst="rect">
-            <a:avLst/>
-          </a:prstGeom>
-          <a:noFill/>
-        </p:spPr>
-        <p:txBody>
-          <a:bodyPr wrap="square" lIns="0" rIns="0" tIns="0" bIns="0" anchor="t">
-            <a:spAutoFit/>
-          </a:bodyPr>
-          <a:lstStyle/>
-          <a:p>
-            <a:pPr algn="l">
-              <a:lnSpc>
-                <a:spcPct val="116000"/>
-              </a:lnSpc>
-              <a:spcBef>
-                <a:spcPts val="0"/>
-              </a:spcBef>
-              <a:spcAft>
-                <a:spcPts val="0"/>
-              </a:spcAft>
-              <a:defRPr sz="1600" b="0">
-                <a:solidFill>
-                  <a:srgbClr val="68757B"/>
-                </a:solidFill>
-                <a:latin typeface="Microsoft YaHei"/>
-                <a:ea typeface="Microsoft YaHei"/>
-              </a:defRPr>
-            </a:pPr>
-            <a:r>
-              <a:t>重新设计相关情节</a:t>
-            </a:r>
-          </a:p>
-        </p:txBody>
-      </p:sp>
-      <p:sp>
-        <p:nvSpPr>
-          <p:cNvPr id="29" name="Rounded Rectangle 28"/>
-          <p:cNvSpPr/>
-          <p:nvPr/>
-        </p:nvSpPr>
-        <p:spPr>
-          <a:xfrm>
-            <a:off x="658368" y="5687568"/>
-            <a:ext cx="10881360" cy="576072"/>
-          </a:xfrm>
-          <a:prstGeom prst="roundRect">
-            <a:avLst>
-              <a:gd name="adj" fmla="val 5000"/>
-            </a:avLst>
-          </a:prstGeom>
-          <a:solidFill>
-            <a:srgbClr val="E7F0EC"/>
-          </a:solidFill>
-          <a:ln>
-            <a:noFill/>
-          </a:ln>
-        </p:spPr>
-        <p:style>
-          <a:lnRef idx="1">
-            <a:schemeClr val="accent1"/>
-          </a:lnRef>
-          <a:fillRef idx="3">
-            <a:schemeClr val="accent1"/>
-          </a:fillRef>
-          <a:effectRef idx="2">
-            <a:schemeClr val="accent1"/>
-          </a:effectRef>
-          <a:fontRef idx="minor">
-            <a:schemeClr val="lt1"/>
-          </a:fontRef>
-        </p:style>
-        <p:txBody>
-          <a:bodyPr rtlCol="0" anchor="ctr"/>
-          <a:lstStyle/>
-          <a:p>
-            <a:pPr algn="ctr"/>
-          </a:p>
-        </p:txBody>
-      </p:sp>
-      <p:sp>
-        <p:nvSpPr>
-          <p:cNvPr id="30" name="TextBox 29"/>
-          <p:cNvSpPr txBox="1"/>
-          <p:nvPr/>
-        </p:nvSpPr>
-        <p:spPr>
-          <a:xfrm>
-            <a:off x="859536" y="5824728"/>
-            <a:ext cx="10479024" cy="347472"/>
-          </a:xfrm>
-          <a:prstGeom prst="rect">
-            <a:avLst/>
-          </a:prstGeom>
-          <a:noFill/>
-        </p:spPr>
-        <p:txBody>
-          <a:bodyPr wrap="square" lIns="0" rIns="0" tIns="0" bIns="0" anchor="t">
-            <a:spAutoFit/>
-          </a:bodyPr>
-          <a:lstStyle/>
-          <a:p>
-            <a:pPr algn="ctr">
-              <a:lnSpc>
-                <a:spcPct val="116000"/>
-              </a:lnSpc>
-              <a:spcBef>
-                <a:spcPts val="0"/>
-              </a:spcBef>
-              <a:spcAft>
-                <a:spcPts val="0"/>
-              </a:spcAft>
-              <a:defRPr sz="2000" b="1">
-                <a:solidFill>
-                  <a:srgbClr val="267868"/>
-                </a:solidFill>
-                <a:latin typeface="Microsoft YaHei"/>
-                <a:ea typeface="Microsoft YaHei"/>
-              </a:defRPr>
-            </a:pPr>
-            <a:r>
-              <a:t>本次选 C：高考 → 虚构的学术能力认证体系；接着追踪哪些场景要改。</a:t>
-            </a:r>
-          </a:p>
-        </p:txBody>
-      </p:sp>
+              <a:t>04 / 13</a:t>
+            </a:r>
+          </a:p>
+        </p:txBody>
+      </p:sp>
+      <p:pic>
+        <p:nvPicPr>
+          <p:cNvPr id="7" name="Picture 6" descr="story_state.png"/>
+          <p:cNvPicPr>
+            <a:picLocks noChangeAspect="1"/>
+          </p:cNvPicPr>
+          <p:nvPr/>
+        </p:nvPicPr>
+        <p:blipFill>
+          <a:blip r:embed="rId2"/>
+          <a:stretch>
+            <a:fillRect/>
+          </a:stretch>
+        </p:blipFill>
+        <p:spPr>
+          <a:xfrm>
+            <a:off x="0" y="0"/>
+            <a:ext cx="12191999" cy="6857999"/>
+          </a:xfrm>
+          <a:prstGeom prst="rect">
+            <a:avLst/>
+          </a:prstGeom>
+        </p:spPr>
+      </p:pic>
     </p:spTree>
   </p:cSld>
   <p:clrMapOvr>
@@ -12476,7 +12182,7 @@
               </a:defRPr>
             </a:pPr>
             <a:r>
-              <a:t>StoryBridge   ·   案例中的方法 2 · 从高考节点追踪借笔与查分</a:t>
+              <a:t>StoryBridge   ·   案例中的方法 2 · 文化节点与改编方案</a:t>
             </a:r>
           </a:p>
         </p:txBody>
@@ -12522,7 +12228,7 @@
               </a:defRPr>
             </a:pPr>
             <a:r>
-              <a:t>Dependency Graph：这次改动会牵动哪几场？</a:t>
+              <a:t>文化节点：先明确改什么、为什么改</a:t>
             </a:r>
           </a:p>
         </p:txBody>
@@ -12568,7 +12274,7 @@
               </a:defRPr>
             </a:pPr>
             <a:r>
-              <a:t>真实依赖图节选 · CM 为文化设定，E 为事件，S 为场景</a:t>
+              <a:t>真实保存结果 · 内部证据排版，非访客 UI</a:t>
             </a:r>
           </a:p>
         </p:txBody>
@@ -12614,1240 +12320,35 @@
               </a:defRPr>
             </a:pPr>
             <a:r>
-              <a:t>05 / 12</a:t>
-            </a:r>
-          </a:p>
-        </p:txBody>
-      </p:sp>
-      <p:sp>
-        <p:nvSpPr>
-          <p:cNvPr id="7" name="TextBox 6"/>
-          <p:cNvSpPr txBox="1"/>
-          <p:nvPr/>
-        </p:nvSpPr>
-        <p:spPr>
-          <a:xfrm>
-            <a:off x="749808" y="1783080"/>
-            <a:ext cx="10698480" cy="502920"/>
-          </a:xfrm>
-          <a:prstGeom prst="rect">
-            <a:avLst/>
-          </a:prstGeom>
-          <a:noFill/>
-        </p:spPr>
-        <p:txBody>
-          <a:bodyPr wrap="square" lIns="0" rIns="0" tIns="0" bIns="0" anchor="t">
-            <a:spAutoFit/>
-          </a:bodyPr>
-          <a:lstStyle/>
-          <a:p>
-            <a:pPr algn="l">
-              <a:lnSpc>
-                <a:spcPct val="116000"/>
-              </a:lnSpc>
-              <a:spcBef>
-                <a:spcPts val="0"/>
-              </a:spcBef>
-              <a:spcAft>
-                <a:spcPts val="0"/>
-              </a:spcAft>
-              <a:defRPr sz="2300" b="1">
-                <a:solidFill>
-                  <a:srgbClr val="182B37"/>
-                </a:solidFill>
-                <a:latin typeface="Microsoft YaHei"/>
-                <a:ea typeface="Microsoft YaHei"/>
-              </a:defRPr>
-            </a:pPr>
-            <a:r>
-              <a:t>例如：换掉“高考”背景，为什么借笔和查分都需要检查？</a:t>
-            </a:r>
-          </a:p>
-        </p:txBody>
-      </p:sp>
-      <p:sp>
-        <p:nvSpPr>
-          <p:cNvPr id="8" name="Rounded Rectangle 7"/>
-          <p:cNvSpPr/>
-          <p:nvPr/>
-        </p:nvSpPr>
-        <p:spPr>
-          <a:xfrm>
-            <a:off x="713232" y="2715768"/>
-            <a:ext cx="2377440" cy="960120"/>
-          </a:xfrm>
-          <a:prstGeom prst="roundRect">
-            <a:avLst>
-              <a:gd name="adj" fmla="val 5000"/>
-            </a:avLst>
-          </a:prstGeom>
-          <a:solidFill>
-            <a:srgbClr val="FFFFFF"/>
-          </a:solidFill>
-          <a:ln w="8890">
-            <a:solidFill>
-              <a:srgbClr val="267868"/>
-            </a:solidFill>
-          </a:ln>
-        </p:spPr>
-        <p:style>
-          <a:lnRef idx="1">
-            <a:schemeClr val="accent1"/>
-          </a:lnRef>
-          <a:fillRef idx="3">
-            <a:schemeClr val="accent1"/>
-          </a:fillRef>
-          <a:effectRef idx="2">
-            <a:schemeClr val="accent1"/>
-          </a:effectRef>
-          <a:fontRef idx="minor">
-            <a:schemeClr val="lt1"/>
-          </a:fontRef>
-        </p:style>
-        <p:txBody>
-          <a:bodyPr rtlCol="0" anchor="ctr"/>
-          <a:lstStyle/>
-          <a:p>
-            <a:pPr algn="ctr"/>
-          </a:p>
-        </p:txBody>
-      </p:sp>
-      <p:sp>
-        <p:nvSpPr>
-          <p:cNvPr id="9" name="TextBox 8"/>
-          <p:cNvSpPr txBox="1"/>
-          <p:nvPr/>
-        </p:nvSpPr>
-        <p:spPr>
-          <a:xfrm>
-            <a:off x="877824" y="2843784"/>
-            <a:ext cx="2048256" cy="274320"/>
-          </a:xfrm>
-          <a:prstGeom prst="rect">
-            <a:avLst/>
-          </a:prstGeom>
-          <a:noFill/>
-        </p:spPr>
-        <p:txBody>
-          <a:bodyPr wrap="square" lIns="0" rIns="0" tIns="0" bIns="0" anchor="t">
-            <a:spAutoFit/>
-          </a:bodyPr>
-          <a:lstStyle/>
-          <a:p>
-            <a:pPr algn="l">
-              <a:lnSpc>
-                <a:spcPct val="116000"/>
-              </a:lnSpc>
-              <a:spcBef>
-                <a:spcPts val="0"/>
-              </a:spcBef>
-              <a:spcAft>
-                <a:spcPts val="0"/>
-              </a:spcAft>
-              <a:defRPr sz="1500" b="1">
-                <a:solidFill>
-                  <a:srgbClr val="267868"/>
-                </a:solidFill>
-                <a:latin typeface="Microsoft YaHei"/>
-                <a:ea typeface="Microsoft YaHei"/>
-              </a:defRPr>
-            </a:pPr>
-            <a:r>
-              <a:t>改动起点 · CM01</a:t>
-            </a:r>
-          </a:p>
-        </p:txBody>
-      </p:sp>
-      <p:sp>
-        <p:nvSpPr>
-          <p:cNvPr id="10" name="TextBox 9"/>
-          <p:cNvSpPr txBox="1"/>
-          <p:nvPr/>
-        </p:nvSpPr>
-        <p:spPr>
-          <a:xfrm>
-            <a:off x="877824" y="3182112"/>
-            <a:ext cx="2048256" cy="402336"/>
-          </a:xfrm>
-          <a:prstGeom prst="rect">
-            <a:avLst/>
-          </a:prstGeom>
-          <a:noFill/>
-        </p:spPr>
-        <p:txBody>
-          <a:bodyPr wrap="square" lIns="0" rIns="0" tIns="0" bIns="0" anchor="t">
-            <a:spAutoFit/>
-          </a:bodyPr>
-          <a:lstStyle/>
-          <a:p>
-            <a:pPr algn="ctr">
-              <a:lnSpc>
-                <a:spcPct val="116000"/>
-              </a:lnSpc>
-              <a:spcBef>
-                <a:spcPts val="0"/>
-              </a:spcBef>
-              <a:spcAft>
-                <a:spcPts val="0"/>
-              </a:spcAft>
-              <a:defRPr sz="2400" b="1">
-                <a:solidFill>
-                  <a:srgbClr val="182B37"/>
-                </a:solidFill>
-                <a:latin typeface="Microsoft YaHei"/>
-                <a:ea typeface="Microsoft YaHei"/>
-              </a:defRPr>
-            </a:pPr>
-            <a:r>
-              <a:t>高考背景</a:t>
-            </a:r>
-          </a:p>
-        </p:txBody>
-      </p:sp>
-      <p:sp>
-        <p:nvSpPr>
-          <p:cNvPr id="11" name="Rounded Rectangle 10"/>
-          <p:cNvSpPr/>
-          <p:nvPr/>
-        </p:nvSpPr>
-        <p:spPr>
-          <a:xfrm>
-            <a:off x="4087368" y="2715768"/>
-            <a:ext cx="2834640" cy="960120"/>
-          </a:xfrm>
-          <a:prstGeom prst="roundRect">
-            <a:avLst>
-              <a:gd name="adj" fmla="val 5000"/>
-            </a:avLst>
-          </a:prstGeom>
-          <a:solidFill>
-            <a:srgbClr val="FFFFFF"/>
-          </a:solidFill>
-          <a:ln w="8890">
-            <a:solidFill>
-              <a:srgbClr val="B79456"/>
-            </a:solidFill>
-          </a:ln>
-        </p:spPr>
-        <p:style>
-          <a:lnRef idx="1">
-            <a:schemeClr val="accent1"/>
-          </a:lnRef>
-          <a:fillRef idx="3">
-            <a:schemeClr val="accent1"/>
-          </a:fillRef>
-          <a:effectRef idx="2">
-            <a:schemeClr val="accent1"/>
-          </a:effectRef>
-          <a:fontRef idx="minor">
-            <a:schemeClr val="lt1"/>
-          </a:fontRef>
-        </p:style>
-        <p:txBody>
-          <a:bodyPr rtlCol="0" anchor="ctr"/>
-          <a:lstStyle/>
-          <a:p>
-            <a:pPr algn="ctr"/>
-          </a:p>
-        </p:txBody>
-      </p:sp>
-      <p:sp>
-        <p:nvSpPr>
-          <p:cNvPr id="12" name="TextBox 11"/>
-          <p:cNvSpPr txBox="1"/>
-          <p:nvPr/>
-        </p:nvSpPr>
-        <p:spPr>
-          <a:xfrm>
-            <a:off x="4251959" y="2843784"/>
-            <a:ext cx="2505456" cy="274320"/>
-          </a:xfrm>
-          <a:prstGeom prst="rect">
-            <a:avLst/>
-          </a:prstGeom>
-          <a:noFill/>
-        </p:spPr>
-        <p:txBody>
-          <a:bodyPr wrap="square" lIns="0" rIns="0" tIns="0" bIns="0" anchor="t">
-            <a:spAutoFit/>
-          </a:bodyPr>
-          <a:lstStyle/>
-          <a:p>
-            <a:pPr algn="l">
-              <a:lnSpc>
-                <a:spcPct val="116000"/>
-              </a:lnSpc>
-              <a:spcBef>
-                <a:spcPts val="0"/>
-              </a:spcBef>
-              <a:spcAft>
-                <a:spcPts val="0"/>
-              </a:spcAft>
-              <a:defRPr sz="1500" b="1">
-                <a:solidFill>
-                  <a:srgbClr val="B79456"/>
-                </a:solidFill>
-                <a:latin typeface="Microsoft YaHei"/>
-                <a:ea typeface="Microsoft YaHei"/>
-              </a:defRPr>
-            </a:pPr>
-            <a:r>
-              <a:t>事件 · E09</a:t>
-            </a:r>
-          </a:p>
-        </p:txBody>
-      </p:sp>
-      <p:sp>
-        <p:nvSpPr>
-          <p:cNvPr id="13" name="TextBox 12"/>
-          <p:cNvSpPr txBox="1"/>
-          <p:nvPr/>
-        </p:nvSpPr>
-        <p:spPr>
-          <a:xfrm>
-            <a:off x="4251959" y="3182112"/>
-            <a:ext cx="2505456" cy="402336"/>
-          </a:xfrm>
-          <a:prstGeom prst="rect">
-            <a:avLst/>
-          </a:prstGeom>
-          <a:noFill/>
-        </p:spPr>
-        <p:txBody>
-          <a:bodyPr wrap="square" lIns="0" rIns="0" tIns="0" bIns="0" anchor="t">
-            <a:spAutoFit/>
-          </a:bodyPr>
-          <a:lstStyle/>
-          <a:p>
-            <a:pPr algn="ctr">
-              <a:lnSpc>
-                <a:spcPct val="116000"/>
-              </a:lnSpc>
-              <a:spcBef>
-                <a:spcPts val="0"/>
-              </a:spcBef>
-              <a:spcAft>
-                <a:spcPts val="0"/>
-              </a:spcAft>
-              <a:defRPr sz="2400" b="1">
-                <a:solidFill>
-                  <a:srgbClr val="182B37"/>
-                </a:solidFill>
-                <a:latin typeface="Microsoft YaHei"/>
-                <a:ea typeface="Microsoft YaHei"/>
-              </a:defRPr>
-            </a:pPr>
-            <a:r>
-              <a:t>再次借笔</a:t>
-            </a:r>
-          </a:p>
-        </p:txBody>
-      </p:sp>
-      <p:sp>
-        <p:nvSpPr>
-          <p:cNvPr id="14" name="Rounded Rectangle 13"/>
-          <p:cNvSpPr/>
-          <p:nvPr/>
-        </p:nvSpPr>
-        <p:spPr>
-          <a:xfrm>
-            <a:off x="8595360" y="2715768"/>
-            <a:ext cx="2852928" cy="960120"/>
-          </a:xfrm>
-          <a:prstGeom prst="roundRect">
-            <a:avLst>
-              <a:gd name="adj" fmla="val 5000"/>
-            </a:avLst>
-          </a:prstGeom>
-          <a:solidFill>
-            <a:srgbClr val="FFFFFF"/>
-          </a:solidFill>
-          <a:ln w="8890">
-            <a:solidFill>
-              <a:srgbClr val="267868"/>
-            </a:solidFill>
-          </a:ln>
-        </p:spPr>
-        <p:style>
-          <a:lnRef idx="1">
-            <a:schemeClr val="accent1"/>
-          </a:lnRef>
-          <a:fillRef idx="3">
-            <a:schemeClr val="accent1"/>
-          </a:fillRef>
-          <a:effectRef idx="2">
-            <a:schemeClr val="accent1"/>
-          </a:effectRef>
-          <a:fontRef idx="minor">
-            <a:schemeClr val="lt1"/>
-          </a:fontRef>
-        </p:style>
-        <p:txBody>
-          <a:bodyPr rtlCol="0" anchor="ctr"/>
-          <a:lstStyle/>
-          <a:p>
-            <a:pPr algn="ctr"/>
-          </a:p>
-        </p:txBody>
-      </p:sp>
-      <p:sp>
-        <p:nvSpPr>
-          <p:cNvPr id="15" name="TextBox 14"/>
-          <p:cNvSpPr txBox="1"/>
-          <p:nvPr/>
-        </p:nvSpPr>
-        <p:spPr>
-          <a:xfrm>
-            <a:off x="8759952" y="2843784"/>
-            <a:ext cx="2523744" cy="274320"/>
-          </a:xfrm>
-          <a:prstGeom prst="rect">
-            <a:avLst/>
-          </a:prstGeom>
-          <a:noFill/>
-        </p:spPr>
-        <p:txBody>
-          <a:bodyPr wrap="square" lIns="0" rIns="0" tIns="0" bIns="0" anchor="t">
-            <a:spAutoFit/>
-          </a:bodyPr>
-          <a:lstStyle/>
-          <a:p>
-            <a:pPr algn="l">
-              <a:lnSpc>
-                <a:spcPct val="116000"/>
-              </a:lnSpc>
-              <a:spcBef>
-                <a:spcPts val="0"/>
-              </a:spcBef>
-              <a:spcAft>
-                <a:spcPts val="0"/>
-              </a:spcAft>
-              <a:defRPr sz="1500" b="1">
-                <a:solidFill>
-                  <a:srgbClr val="267868"/>
-                </a:solidFill>
-                <a:latin typeface="Microsoft YaHei"/>
-                <a:ea typeface="Microsoft YaHei"/>
-              </a:defRPr>
-            </a:pPr>
-            <a:r>
-              <a:t>场景 · S05</a:t>
-            </a:r>
-          </a:p>
-        </p:txBody>
-      </p:sp>
-      <p:sp>
-        <p:nvSpPr>
-          <p:cNvPr id="16" name="TextBox 15"/>
-          <p:cNvSpPr txBox="1"/>
-          <p:nvPr/>
-        </p:nvSpPr>
-        <p:spPr>
-          <a:xfrm>
-            <a:off x="8759952" y="3182112"/>
-            <a:ext cx="2523744" cy="402336"/>
-          </a:xfrm>
-          <a:prstGeom prst="rect">
-            <a:avLst/>
-          </a:prstGeom>
-          <a:noFill/>
-        </p:spPr>
-        <p:txBody>
-          <a:bodyPr wrap="square" lIns="0" rIns="0" tIns="0" bIns="0" anchor="t">
-            <a:spAutoFit/>
-          </a:bodyPr>
-          <a:lstStyle/>
-          <a:p>
-            <a:pPr algn="ctr">
-              <a:lnSpc>
-                <a:spcPct val="116000"/>
-              </a:lnSpc>
-              <a:spcBef>
-                <a:spcPts val="0"/>
-              </a:spcBef>
-              <a:spcAft>
-                <a:spcPts val="0"/>
-              </a:spcAft>
-              <a:defRPr sz="2400" b="1">
-                <a:solidFill>
-                  <a:srgbClr val="182B37"/>
-                </a:solidFill>
-                <a:latin typeface="Microsoft YaHei"/>
-                <a:ea typeface="Microsoft YaHei"/>
-              </a:defRPr>
-            </a:pPr>
-            <a:r>
-              <a:t>第 5 场：借笔</a:t>
-            </a:r>
-          </a:p>
-        </p:txBody>
-      </p:sp>
-      <p:sp>
-        <p:nvSpPr>
-          <p:cNvPr id="17" name="Rounded Rectangle 16"/>
-          <p:cNvSpPr/>
-          <p:nvPr/>
-        </p:nvSpPr>
-        <p:spPr>
-          <a:xfrm>
-            <a:off x="4087368" y="4507992"/>
-            <a:ext cx="2834640" cy="960120"/>
-          </a:xfrm>
-          <a:prstGeom prst="roundRect">
-            <a:avLst>
-              <a:gd name="adj" fmla="val 5000"/>
-            </a:avLst>
-          </a:prstGeom>
-          <a:solidFill>
-            <a:srgbClr val="FFFFFF"/>
-          </a:solidFill>
-          <a:ln w="8890">
-            <a:solidFill>
-              <a:srgbClr val="B79456"/>
-            </a:solidFill>
-          </a:ln>
-        </p:spPr>
-        <p:style>
-          <a:lnRef idx="1">
-            <a:schemeClr val="accent1"/>
-          </a:lnRef>
-          <a:fillRef idx="3">
-            <a:schemeClr val="accent1"/>
-          </a:fillRef>
-          <a:effectRef idx="2">
-            <a:schemeClr val="accent1"/>
-          </a:effectRef>
-          <a:fontRef idx="minor">
-            <a:schemeClr val="lt1"/>
-          </a:fontRef>
-        </p:style>
-        <p:txBody>
-          <a:bodyPr rtlCol="0" anchor="ctr"/>
-          <a:lstStyle/>
-          <a:p>
-            <a:pPr algn="ctr"/>
-          </a:p>
-        </p:txBody>
-      </p:sp>
-      <p:sp>
-        <p:nvSpPr>
-          <p:cNvPr id="18" name="TextBox 17"/>
-          <p:cNvSpPr txBox="1"/>
-          <p:nvPr/>
-        </p:nvSpPr>
-        <p:spPr>
-          <a:xfrm>
-            <a:off x="4251959" y="4636007"/>
-            <a:ext cx="2505456" cy="274320"/>
-          </a:xfrm>
-          <a:prstGeom prst="rect">
-            <a:avLst/>
-          </a:prstGeom>
-          <a:noFill/>
-        </p:spPr>
-        <p:txBody>
-          <a:bodyPr wrap="square" lIns="0" rIns="0" tIns="0" bIns="0" anchor="t">
-            <a:spAutoFit/>
-          </a:bodyPr>
-          <a:lstStyle/>
-          <a:p>
-            <a:pPr algn="l">
-              <a:lnSpc>
-                <a:spcPct val="116000"/>
-              </a:lnSpc>
-              <a:spcBef>
-                <a:spcPts val="0"/>
-              </a:spcBef>
-              <a:spcAft>
-                <a:spcPts val="0"/>
-              </a:spcAft>
-              <a:defRPr sz="1500" b="1">
-                <a:solidFill>
-                  <a:srgbClr val="B79456"/>
-                </a:solidFill>
-                <a:latin typeface="Microsoft YaHei"/>
-                <a:ea typeface="Microsoft YaHei"/>
-              </a:defRPr>
-            </a:pPr>
-            <a:r>
-              <a:t>事件 · E11</a:t>
-            </a:r>
-          </a:p>
-        </p:txBody>
-      </p:sp>
-      <p:sp>
-        <p:nvSpPr>
-          <p:cNvPr id="19" name="TextBox 18"/>
-          <p:cNvSpPr txBox="1"/>
-          <p:nvPr/>
-        </p:nvSpPr>
-        <p:spPr>
-          <a:xfrm>
-            <a:off x="4251959" y="4974336"/>
-            <a:ext cx="2505456" cy="402336"/>
-          </a:xfrm>
-          <a:prstGeom prst="rect">
-            <a:avLst/>
-          </a:prstGeom>
-          <a:noFill/>
-        </p:spPr>
-        <p:txBody>
-          <a:bodyPr wrap="square" lIns="0" rIns="0" tIns="0" bIns="0" anchor="t">
-            <a:spAutoFit/>
-          </a:bodyPr>
-          <a:lstStyle/>
-          <a:p>
-            <a:pPr algn="ctr">
-              <a:lnSpc>
-                <a:spcPct val="116000"/>
-              </a:lnSpc>
-              <a:spcBef>
-                <a:spcPts val="0"/>
-              </a:spcBef>
-              <a:spcAft>
-                <a:spcPts val="0"/>
-              </a:spcAft>
-              <a:defRPr sz="2400" b="1">
-                <a:solidFill>
-                  <a:srgbClr val="182B37"/>
-                </a:solidFill>
-                <a:latin typeface="Microsoft YaHei"/>
-                <a:ea typeface="Microsoft YaHei"/>
-              </a:defRPr>
-            </a:pPr>
-            <a:r>
-              <a:t>周雨查到 487</a:t>
-            </a:r>
-          </a:p>
-        </p:txBody>
-      </p:sp>
-      <p:sp>
-        <p:nvSpPr>
-          <p:cNvPr id="20" name="Rounded Rectangle 19"/>
-          <p:cNvSpPr/>
-          <p:nvPr/>
-        </p:nvSpPr>
-        <p:spPr>
-          <a:xfrm>
-            <a:off x="8595360" y="4507992"/>
-            <a:ext cx="2852928" cy="960120"/>
-          </a:xfrm>
-          <a:prstGeom prst="roundRect">
-            <a:avLst>
-              <a:gd name="adj" fmla="val 5000"/>
-            </a:avLst>
-          </a:prstGeom>
-          <a:solidFill>
-            <a:srgbClr val="FFFFFF"/>
-          </a:solidFill>
-          <a:ln w="8890">
-            <a:solidFill>
-              <a:srgbClr val="267868"/>
-            </a:solidFill>
-          </a:ln>
-        </p:spPr>
-        <p:style>
-          <a:lnRef idx="1">
-            <a:schemeClr val="accent1"/>
-          </a:lnRef>
-          <a:fillRef idx="3">
-            <a:schemeClr val="accent1"/>
-          </a:fillRef>
-          <a:effectRef idx="2">
-            <a:schemeClr val="accent1"/>
-          </a:effectRef>
-          <a:fontRef idx="minor">
-            <a:schemeClr val="lt1"/>
-          </a:fontRef>
-        </p:style>
-        <p:txBody>
-          <a:bodyPr rtlCol="0" anchor="ctr"/>
-          <a:lstStyle/>
-          <a:p>
-            <a:pPr algn="ctr"/>
-          </a:p>
-        </p:txBody>
-      </p:sp>
-      <p:sp>
-        <p:nvSpPr>
-          <p:cNvPr id="21" name="TextBox 20"/>
-          <p:cNvSpPr txBox="1"/>
-          <p:nvPr/>
-        </p:nvSpPr>
-        <p:spPr>
-          <a:xfrm>
-            <a:off x="8759952" y="4636007"/>
-            <a:ext cx="2523744" cy="274320"/>
-          </a:xfrm>
-          <a:prstGeom prst="rect">
-            <a:avLst/>
-          </a:prstGeom>
-          <a:noFill/>
-        </p:spPr>
-        <p:txBody>
-          <a:bodyPr wrap="square" lIns="0" rIns="0" tIns="0" bIns="0" anchor="t">
-            <a:spAutoFit/>
-          </a:bodyPr>
-          <a:lstStyle/>
-          <a:p>
-            <a:pPr algn="l">
-              <a:lnSpc>
-                <a:spcPct val="116000"/>
-              </a:lnSpc>
-              <a:spcBef>
-                <a:spcPts val="0"/>
-              </a:spcBef>
-              <a:spcAft>
-                <a:spcPts val="0"/>
-              </a:spcAft>
-              <a:defRPr sz="1500" b="1">
-                <a:solidFill>
-                  <a:srgbClr val="267868"/>
-                </a:solidFill>
-                <a:latin typeface="Microsoft YaHei"/>
-                <a:ea typeface="Microsoft YaHei"/>
-              </a:defRPr>
-            </a:pPr>
-            <a:r>
-              <a:t>场景 · S06</a:t>
-            </a:r>
-          </a:p>
-        </p:txBody>
-      </p:sp>
-      <p:sp>
-        <p:nvSpPr>
-          <p:cNvPr id="22" name="TextBox 21"/>
-          <p:cNvSpPr txBox="1"/>
-          <p:nvPr/>
-        </p:nvSpPr>
-        <p:spPr>
-          <a:xfrm>
-            <a:off x="8759952" y="4974336"/>
-            <a:ext cx="2523744" cy="402336"/>
-          </a:xfrm>
-          <a:prstGeom prst="rect">
-            <a:avLst/>
-          </a:prstGeom>
-          <a:noFill/>
-        </p:spPr>
-        <p:txBody>
-          <a:bodyPr wrap="square" lIns="0" rIns="0" tIns="0" bIns="0" anchor="t">
-            <a:spAutoFit/>
-          </a:bodyPr>
-          <a:lstStyle/>
-          <a:p>
-            <a:pPr algn="ctr">
-              <a:lnSpc>
-                <a:spcPct val="116000"/>
-              </a:lnSpc>
-              <a:spcBef>
-                <a:spcPts val="0"/>
-              </a:spcBef>
-              <a:spcAft>
-                <a:spcPts val="0"/>
-              </a:spcAft>
-              <a:defRPr sz="2400" b="1">
-                <a:solidFill>
-                  <a:srgbClr val="182B37"/>
-                </a:solidFill>
-                <a:latin typeface="Microsoft YaHei"/>
-                <a:ea typeface="Microsoft YaHei"/>
-              </a:defRPr>
-            </a:pPr>
-            <a:r>
-              <a:t>第 6 场：查分</a:t>
-            </a:r>
-          </a:p>
-        </p:txBody>
-      </p:sp>
-      <p:cxnSp>
-        <p:nvCxnSpPr>
-          <p:cNvPr id="23" name="Connector 22"/>
-          <p:cNvCxnSpPr/>
-          <p:nvPr/>
-        </p:nvCxnSpPr>
-        <p:spPr>
-          <a:xfrm>
-            <a:off x="3127248" y="3209544"/>
-            <a:ext cx="877824" cy="0"/>
-          </a:xfrm>
-          <a:prstGeom prst="line">
-            <a:avLst/>
-          </a:prstGeom>
-          <a:ln w="25400">
-            <a:solidFill>
-              <a:srgbClr val="267868"/>
-            </a:solidFill>
-            <a:tailEnd type="triangle"/>
-          </a:ln>
-        </p:spPr>
-        <p:style>
-          <a:lnRef idx="2">
-            <a:schemeClr val="accent1"/>
-          </a:lnRef>
-          <a:fillRef idx="0">
-            <a:schemeClr val="accent1"/>
-          </a:fillRef>
-          <a:effectRef idx="1">
-            <a:schemeClr val="accent1"/>
-          </a:effectRef>
-          <a:fontRef idx="minor">
-            <a:schemeClr val="tx1"/>
-          </a:fontRef>
-        </p:style>
-      </p:cxnSp>
-      <p:sp>
-        <p:nvSpPr>
-          <p:cNvPr id="24" name="TextBox 23"/>
-          <p:cNvSpPr txBox="1"/>
-          <p:nvPr/>
-        </p:nvSpPr>
-        <p:spPr>
-          <a:xfrm>
-            <a:off x="3154680" y="2752344"/>
-            <a:ext cx="813816" cy="292608"/>
-          </a:xfrm>
-          <a:prstGeom prst="rect">
-            <a:avLst/>
-          </a:prstGeom>
-          <a:noFill/>
-        </p:spPr>
-        <p:txBody>
-          <a:bodyPr wrap="square" lIns="0" rIns="0" tIns="0" bIns="0" anchor="t">
-            <a:spAutoFit/>
-          </a:bodyPr>
-          <a:lstStyle/>
-          <a:p>
-            <a:pPr algn="ctr">
-              <a:lnSpc>
-                <a:spcPct val="116000"/>
-              </a:lnSpc>
-              <a:spcBef>
-                <a:spcPts val="0"/>
-              </a:spcBef>
-              <a:spcAft>
-                <a:spcPts val="0"/>
-              </a:spcAft>
-              <a:defRPr sz="1700" b="1">
-                <a:solidFill>
-                  <a:srgbClr val="267868"/>
-                </a:solidFill>
-                <a:latin typeface="Microsoft YaHei"/>
-                <a:ea typeface="Microsoft YaHei"/>
-              </a:defRPr>
-            </a:pPr>
-            <a:r>
-              <a:t>推动</a:t>
-            </a:r>
-          </a:p>
-        </p:txBody>
-      </p:sp>
-      <p:cxnSp>
-        <p:nvCxnSpPr>
-          <p:cNvPr id="25" name="Connector 24"/>
-          <p:cNvCxnSpPr/>
-          <p:nvPr/>
-        </p:nvCxnSpPr>
-        <p:spPr>
-          <a:xfrm>
-            <a:off x="6995160" y="3209544"/>
-            <a:ext cx="1508760" cy="0"/>
-          </a:xfrm>
-          <a:prstGeom prst="line">
-            <a:avLst/>
-          </a:prstGeom>
-          <a:ln w="25400">
-            <a:solidFill>
-              <a:srgbClr val="267868"/>
-            </a:solidFill>
-            <a:tailEnd type="triangle"/>
-          </a:ln>
-        </p:spPr>
-        <p:style>
-          <a:lnRef idx="2">
-            <a:schemeClr val="accent1"/>
-          </a:lnRef>
-          <a:fillRef idx="0">
-            <a:schemeClr val="accent1"/>
-          </a:fillRef>
-          <a:effectRef idx="1">
-            <a:schemeClr val="accent1"/>
-          </a:effectRef>
-          <a:fontRef idx="minor">
-            <a:schemeClr val="tx1"/>
-          </a:fontRef>
-        </p:style>
-      </p:cxnSp>
-      <p:sp>
-        <p:nvSpPr>
-          <p:cNvPr id="26" name="TextBox 25"/>
-          <p:cNvSpPr txBox="1"/>
-          <p:nvPr/>
-        </p:nvSpPr>
-        <p:spPr>
-          <a:xfrm>
-            <a:off x="7022592" y="2752344"/>
-            <a:ext cx="1426464" cy="301752"/>
-          </a:xfrm>
-          <a:prstGeom prst="rect">
-            <a:avLst/>
-          </a:prstGeom>
-          <a:noFill/>
-        </p:spPr>
-        <p:txBody>
-          <a:bodyPr wrap="square" lIns="0" rIns="0" tIns="0" bIns="0" anchor="t">
-            <a:spAutoFit/>
-          </a:bodyPr>
-          <a:lstStyle/>
-          <a:p>
-            <a:pPr algn="ctr">
-              <a:lnSpc>
-                <a:spcPct val="116000"/>
-              </a:lnSpc>
-              <a:spcBef>
-                <a:spcPts val="0"/>
-              </a:spcBef>
-              <a:spcAft>
-                <a:spcPts val="0"/>
-              </a:spcAft>
-              <a:defRPr sz="1700" b="1">
-                <a:solidFill>
-                  <a:srgbClr val="267868"/>
-                </a:solidFill>
-                <a:latin typeface="Microsoft YaHei"/>
-                <a:ea typeface="Microsoft YaHei"/>
-              </a:defRPr>
-            </a:pPr>
-            <a:r>
-              <a:t>发生于</a:t>
-            </a:r>
-          </a:p>
-        </p:txBody>
-      </p:sp>
-      <p:cxnSp>
-        <p:nvCxnSpPr>
-          <p:cNvPr id="27" name="Connector 26"/>
-          <p:cNvCxnSpPr/>
-          <p:nvPr/>
-        </p:nvCxnSpPr>
-        <p:spPr>
-          <a:xfrm>
-            <a:off x="6995160" y="5001768"/>
-            <a:ext cx="1508760" cy="0"/>
-          </a:xfrm>
-          <a:prstGeom prst="line">
-            <a:avLst/>
-          </a:prstGeom>
-          <a:ln w="25400">
-            <a:solidFill>
-              <a:srgbClr val="267868"/>
-            </a:solidFill>
-            <a:tailEnd type="triangle"/>
-          </a:ln>
-        </p:spPr>
-        <p:style>
-          <a:lnRef idx="2">
-            <a:schemeClr val="accent1"/>
-          </a:lnRef>
-          <a:fillRef idx="0">
-            <a:schemeClr val="accent1"/>
-          </a:fillRef>
-          <a:effectRef idx="1">
-            <a:schemeClr val="accent1"/>
-          </a:effectRef>
-          <a:fontRef idx="minor">
-            <a:schemeClr val="tx1"/>
-          </a:fontRef>
-        </p:style>
-      </p:cxnSp>
-      <p:sp>
-        <p:nvSpPr>
-          <p:cNvPr id="28" name="TextBox 27"/>
-          <p:cNvSpPr txBox="1"/>
-          <p:nvPr/>
-        </p:nvSpPr>
-        <p:spPr>
-          <a:xfrm>
-            <a:off x="7022592" y="4544568"/>
-            <a:ext cx="1426464" cy="301752"/>
-          </a:xfrm>
-          <a:prstGeom prst="rect">
-            <a:avLst/>
-          </a:prstGeom>
-          <a:noFill/>
-        </p:spPr>
-        <p:txBody>
-          <a:bodyPr wrap="square" lIns="0" rIns="0" tIns="0" bIns="0" anchor="t">
-            <a:spAutoFit/>
-          </a:bodyPr>
-          <a:lstStyle/>
-          <a:p>
-            <a:pPr algn="ctr">
-              <a:lnSpc>
-                <a:spcPct val="116000"/>
-              </a:lnSpc>
-              <a:spcBef>
-                <a:spcPts val="0"/>
-              </a:spcBef>
-              <a:spcAft>
-                <a:spcPts val="0"/>
-              </a:spcAft>
-              <a:defRPr sz="1700" b="1">
-                <a:solidFill>
-                  <a:srgbClr val="267868"/>
-                </a:solidFill>
-                <a:latin typeface="Microsoft YaHei"/>
-                <a:ea typeface="Microsoft YaHei"/>
-              </a:defRPr>
-            </a:pPr>
-            <a:r>
-              <a:t>发生于</a:t>
-            </a:r>
-          </a:p>
-        </p:txBody>
-      </p:sp>
-      <p:cxnSp>
-        <p:nvCxnSpPr>
-          <p:cNvPr id="29" name="Connector 28"/>
-          <p:cNvCxnSpPr/>
-          <p:nvPr/>
-        </p:nvCxnSpPr>
-        <p:spPr>
-          <a:xfrm>
-            <a:off x="5504688" y="3749039"/>
-            <a:ext cx="0" cy="676657"/>
-          </a:xfrm>
-          <a:prstGeom prst="line">
-            <a:avLst/>
-          </a:prstGeom>
-          <a:ln w="25400">
-            <a:solidFill>
-              <a:srgbClr val="B79456"/>
-            </a:solidFill>
-            <a:tailEnd type="triangle"/>
-          </a:ln>
-        </p:spPr>
-        <p:style>
-          <a:lnRef idx="2">
-            <a:schemeClr val="accent1"/>
-          </a:lnRef>
-          <a:fillRef idx="0">
-            <a:schemeClr val="accent1"/>
-          </a:fillRef>
-          <a:effectRef idx="1">
-            <a:schemeClr val="accent1"/>
-          </a:effectRef>
-          <a:fontRef idx="minor">
-            <a:schemeClr val="tx1"/>
-          </a:fontRef>
-        </p:style>
-      </p:cxnSp>
-      <p:sp>
-        <p:nvSpPr>
-          <p:cNvPr id="30" name="TextBox 29"/>
-          <p:cNvSpPr txBox="1"/>
-          <p:nvPr/>
-        </p:nvSpPr>
-        <p:spPr>
-          <a:xfrm>
-            <a:off x="5678424" y="3931920"/>
-            <a:ext cx="2670048" cy="310896"/>
-          </a:xfrm>
-          <a:prstGeom prst="rect">
-            <a:avLst/>
-          </a:prstGeom>
-          <a:noFill/>
-        </p:spPr>
-        <p:txBody>
-          <a:bodyPr wrap="square" lIns="0" rIns="0" tIns="0" bIns="0" anchor="t">
-            <a:spAutoFit/>
-          </a:bodyPr>
-          <a:lstStyle/>
-          <a:p>
-            <a:pPr algn="l">
-              <a:lnSpc>
-                <a:spcPct val="116000"/>
-              </a:lnSpc>
-              <a:spcBef>
-                <a:spcPts val="0"/>
-              </a:spcBef>
-              <a:spcAft>
-                <a:spcPts val="0"/>
-              </a:spcAft>
-              <a:defRPr sz="1800" b="1">
-                <a:solidFill>
-                  <a:srgbClr val="B79456"/>
-                </a:solidFill>
-                <a:latin typeface="Microsoft YaHei"/>
-                <a:ea typeface="Microsoft YaHei"/>
-              </a:defRPr>
-            </a:pPr>
-            <a:r>
-              <a:t>导致分数变化</a:t>
-            </a:r>
-          </a:p>
-        </p:txBody>
-      </p:sp>
-      <p:sp>
-        <p:nvSpPr>
-          <p:cNvPr id="31" name="TextBox 30"/>
-          <p:cNvSpPr txBox="1"/>
-          <p:nvPr/>
-        </p:nvSpPr>
-        <p:spPr>
-          <a:xfrm>
-            <a:off x="804672" y="4334256"/>
-            <a:ext cx="3054096" cy="804672"/>
-          </a:xfrm>
-          <a:prstGeom prst="rect">
-            <a:avLst/>
-          </a:prstGeom>
-          <a:noFill/>
-        </p:spPr>
-        <p:txBody>
-          <a:bodyPr wrap="square" lIns="0" rIns="0" tIns="0" bIns="0" anchor="t">
-            <a:spAutoFit/>
-          </a:bodyPr>
-          <a:lstStyle/>
-          <a:p>
-            <a:pPr algn="l">
-              <a:lnSpc>
-                <a:spcPct val="116000"/>
-              </a:lnSpc>
-              <a:spcBef>
-                <a:spcPts val="0"/>
-              </a:spcBef>
-              <a:spcAft>
-                <a:spcPts val="0"/>
-              </a:spcAft>
-              <a:defRPr sz="2100" b="0">
-                <a:solidFill>
-                  <a:srgbClr val="182B37"/>
-                </a:solidFill>
-                <a:latin typeface="Microsoft YaHei"/>
-                <a:ea typeface="Microsoft YaHei"/>
-              </a:defRPr>
-            </a:pPr>
-            <a:r>
-              <a:t>每条边记录</a:t>
-            </a:r>
-          </a:p>
-          <a:p>
-            <a:pPr algn="l">
-              <a:lnSpc>
-                <a:spcPct val="116000"/>
-              </a:lnSpc>
-              <a:spcBef>
-                <a:spcPts val="0"/>
-              </a:spcBef>
-              <a:spcAft>
-                <a:spcPts val="0"/>
-              </a:spcAft>
-              <a:defRPr sz="2100" b="0">
-                <a:solidFill>
-                  <a:srgbClr val="182B37"/>
-                </a:solidFill>
-                <a:latin typeface="Microsoft YaHei"/>
-                <a:ea typeface="Microsoft YaHei"/>
-              </a:defRPr>
-            </a:pPr>
-            <a:r>
-              <a:t>关系类型＋原文依据</a:t>
-            </a:r>
-          </a:p>
-        </p:txBody>
-      </p:sp>
-      <p:sp>
-        <p:nvSpPr>
-          <p:cNvPr id="32" name="Rounded Rectangle 31"/>
-          <p:cNvSpPr/>
-          <p:nvPr/>
-        </p:nvSpPr>
-        <p:spPr>
-          <a:xfrm>
-            <a:off x="658368" y="5687568"/>
-            <a:ext cx="10881360" cy="576072"/>
-          </a:xfrm>
-          <a:prstGeom prst="roundRect">
-            <a:avLst>
-              <a:gd name="adj" fmla="val 5000"/>
-            </a:avLst>
-          </a:prstGeom>
-          <a:solidFill>
-            <a:srgbClr val="E7F0EC"/>
-          </a:solidFill>
-          <a:ln>
-            <a:noFill/>
-          </a:ln>
-        </p:spPr>
-        <p:style>
-          <a:lnRef idx="1">
-            <a:schemeClr val="accent1"/>
-          </a:lnRef>
-          <a:fillRef idx="3">
-            <a:schemeClr val="accent1"/>
-          </a:fillRef>
-          <a:effectRef idx="2">
-            <a:schemeClr val="accent1"/>
-          </a:effectRef>
-          <a:fontRef idx="minor">
-            <a:schemeClr val="lt1"/>
-          </a:fontRef>
-        </p:style>
-        <p:txBody>
-          <a:bodyPr rtlCol="0" anchor="ctr"/>
-          <a:lstStyle/>
-          <a:p>
-            <a:pPr algn="ctr"/>
-          </a:p>
-        </p:txBody>
-      </p:sp>
-      <p:sp>
-        <p:nvSpPr>
-          <p:cNvPr id="33" name="TextBox 32"/>
-          <p:cNvSpPr txBox="1"/>
-          <p:nvPr/>
-        </p:nvSpPr>
-        <p:spPr>
-          <a:xfrm>
-            <a:off x="859536" y="5824728"/>
-            <a:ext cx="10479024" cy="347472"/>
-          </a:xfrm>
-          <a:prstGeom prst="rect">
-            <a:avLst/>
-          </a:prstGeom>
-          <a:noFill/>
-        </p:spPr>
-        <p:txBody>
-          <a:bodyPr wrap="square" lIns="0" rIns="0" tIns="0" bIns="0" anchor="t">
-            <a:spAutoFit/>
-          </a:bodyPr>
-          <a:lstStyle/>
-          <a:p>
-            <a:pPr algn="ctr">
-              <a:lnSpc>
-                <a:spcPct val="116000"/>
-              </a:lnSpc>
-              <a:spcBef>
-                <a:spcPts val="0"/>
-              </a:spcBef>
-              <a:spcAft>
-                <a:spcPts val="0"/>
-              </a:spcAft>
-              <a:defRPr sz="2000" b="1">
-                <a:solidFill>
-                  <a:srgbClr val="267868"/>
-                </a:solidFill>
-                <a:latin typeface="Microsoft YaHei"/>
-                <a:ea typeface="Microsoft YaHei"/>
-              </a:defRPr>
-            </a:pPr>
-            <a:r>
-              <a:t>本次 CM01 实际返回第 1—6 场；每场附影响路径、原文依据和置信度。</a:t>
-            </a:r>
-          </a:p>
-        </p:txBody>
-      </p:sp>
+              <a:t>05 / 13</a:t>
+            </a:r>
+          </a:p>
+        </p:txBody>
+      </p:sp>
+      <p:pic>
+        <p:nvPicPr>
+          <p:cNvPr id="7" name="Picture 6" descr="evidence_culture_plan.png"/>
+          <p:cNvPicPr>
+            <a:picLocks noChangeAspect="1"/>
+          </p:cNvPicPr>
+          <p:nvPr/>
+        </p:nvPicPr>
+        <p:blipFill>
+          <a:blip r:embed="rId2"/>
+          <a:stretch>
+            <a:fillRect/>
+          </a:stretch>
+        </p:blipFill>
+        <p:spPr>
+          <a:xfrm>
+            <a:off x="0" y="0"/>
+            <a:ext cx="12191999" cy="6857999"/>
+          </a:xfrm>
+          <a:prstGeom prst="rect">
+            <a:avLst/>
+          </a:prstGeom>
+        </p:spPr>
+      </p:pic>
     </p:spTree>
   </p:cSld>
   <p:clrMapOvr>
@@ -13950,7 +12451,7 @@
               </a:defRPr>
             </a:pPr>
             <a:r>
-              <a:t>StoryBridge   ·   案例中的方法 3 · 改写输入 → 全篇检查 → 按场修复</a:t>
+              <a:t>StoryBridge   ·   案例中的方法 3 · 依赖传播与原因路径</a:t>
             </a:r>
           </a:p>
         </p:txBody>
@@ -13996,7 +12497,7 @@
               </a:defRPr>
             </a:pPr>
             <a:r>
-              <a:t>找到借笔和查分场景后，带着约束逐场改</a:t>
+              <a:t>Dependency Graph：哪些场景必须跟着改</a:t>
             </a:r>
           </a:p>
         </p:txBody>
@@ -14042,7 +12543,7 @@
               </a:defRPr>
             </a:pPr>
             <a:r>
-              <a:t>StoryBridge · 短剧出海改编助手</a:t>
+              <a:t>真实保存结果 · 内部证据排版，非访客 UI</a:t>
             </a:r>
           </a:p>
         </p:txBody>
@@ -14088,867 +12589,35 @@
               </a:defRPr>
             </a:pPr>
             <a:r>
-              <a:t>06 / 12</a:t>
-            </a:r>
-          </a:p>
-        </p:txBody>
-      </p:sp>
-      <p:sp>
-        <p:nvSpPr>
-          <p:cNvPr id="7" name="Rounded Rectangle 6"/>
-          <p:cNvSpPr/>
-          <p:nvPr/>
-        </p:nvSpPr>
-        <p:spPr>
-          <a:xfrm>
-            <a:off x="694944" y="2075688"/>
-            <a:ext cx="3419856" cy="3291840"/>
-          </a:xfrm>
-          <a:prstGeom prst="roundRect">
-            <a:avLst>
-              <a:gd name="adj" fmla="val 5000"/>
-            </a:avLst>
-          </a:prstGeom>
-          <a:solidFill>
-            <a:srgbClr val="FFFFFF"/>
-          </a:solidFill>
-          <a:ln w="8890">
-            <a:solidFill>
-              <a:srgbClr val="DEDACF"/>
-            </a:solidFill>
-          </a:ln>
-        </p:spPr>
-        <p:style>
-          <a:lnRef idx="1">
-            <a:schemeClr val="accent1"/>
-          </a:lnRef>
-          <a:fillRef idx="3">
-            <a:schemeClr val="accent1"/>
-          </a:fillRef>
-          <a:effectRef idx="2">
-            <a:schemeClr val="accent1"/>
-          </a:effectRef>
-          <a:fontRef idx="minor">
-            <a:schemeClr val="lt1"/>
-          </a:fontRef>
-        </p:style>
-        <p:txBody>
-          <a:bodyPr rtlCol="0" anchor="ctr"/>
-          <a:lstStyle/>
-          <a:p>
-            <a:pPr algn="ctr"/>
-          </a:p>
-        </p:txBody>
-      </p:sp>
-      <p:sp>
-        <p:nvSpPr>
-          <p:cNvPr id="8" name="TextBox 7"/>
-          <p:cNvSpPr txBox="1"/>
-          <p:nvPr/>
-        </p:nvSpPr>
-        <p:spPr>
-          <a:xfrm>
-            <a:off x="896112" y="2331720"/>
-            <a:ext cx="3017520" cy="310896"/>
-          </a:xfrm>
-          <a:prstGeom prst="rect">
-            <a:avLst/>
-          </a:prstGeom>
-          <a:noFill/>
-        </p:spPr>
-        <p:txBody>
-          <a:bodyPr wrap="square" lIns="0" rIns="0" tIns="0" bIns="0" anchor="t">
-            <a:spAutoFit/>
-          </a:bodyPr>
-          <a:lstStyle/>
-          <a:p>
-            <a:pPr algn="l">
-              <a:lnSpc>
-                <a:spcPct val="116000"/>
-              </a:lnSpc>
-              <a:spcBef>
-                <a:spcPts val="0"/>
-              </a:spcBef>
-              <a:spcAft>
-                <a:spcPts val="0"/>
-              </a:spcAft>
-              <a:defRPr sz="1600" b="1">
-                <a:solidFill>
-                  <a:srgbClr val="267868"/>
-                </a:solidFill>
-                <a:latin typeface="Microsoft YaHei"/>
-                <a:ea typeface="Microsoft YaHei"/>
-              </a:defRPr>
-            </a:pPr>
-            <a:r>
-              <a:t>输入改写器</a:t>
-            </a:r>
-          </a:p>
-        </p:txBody>
-      </p:sp>
-      <p:sp>
-        <p:nvSpPr>
-          <p:cNvPr id="9" name="TextBox 8"/>
-          <p:cNvSpPr txBox="1"/>
-          <p:nvPr/>
-        </p:nvSpPr>
-        <p:spPr>
-          <a:xfrm>
-            <a:off x="896112" y="2907792"/>
-            <a:ext cx="3017520" cy="877824"/>
-          </a:xfrm>
-          <a:prstGeom prst="rect">
-            <a:avLst/>
-          </a:prstGeom>
-          <a:noFill/>
-        </p:spPr>
-        <p:txBody>
-          <a:bodyPr wrap="square" lIns="0" rIns="0" tIns="0" bIns="0" anchor="t">
-            <a:spAutoFit/>
-          </a:bodyPr>
-          <a:lstStyle/>
-          <a:p>
-            <a:pPr algn="l">
-              <a:lnSpc>
-                <a:spcPct val="116000"/>
-              </a:lnSpc>
-              <a:spcBef>
-                <a:spcPts val="0"/>
-              </a:spcBef>
-              <a:spcAft>
-                <a:spcPts val="0"/>
-              </a:spcAft>
-              <a:defRPr sz="2400" b="1">
-                <a:solidFill>
-                  <a:srgbClr val="182B37"/>
-                </a:solidFill>
-                <a:latin typeface="Microsoft YaHei"/>
-                <a:ea typeface="Microsoft YaHei"/>
-              </a:defRPr>
-            </a:pPr>
-            <a:r>
-              <a:t>原场景＋改编约束</a:t>
-            </a:r>
-          </a:p>
-        </p:txBody>
-      </p:sp>
-      <p:sp>
-        <p:nvSpPr>
-          <p:cNvPr id="10" name="TextBox 9"/>
-          <p:cNvSpPr txBox="1"/>
-          <p:nvPr/>
-        </p:nvSpPr>
-        <p:spPr>
-          <a:xfrm>
-            <a:off x="896112" y="3968496"/>
-            <a:ext cx="3017520" cy="1161288"/>
-          </a:xfrm>
-          <a:prstGeom prst="rect">
-            <a:avLst/>
-          </a:prstGeom>
-          <a:noFill/>
-        </p:spPr>
-        <p:txBody>
-          <a:bodyPr wrap="square" lIns="0" rIns="0" tIns="0" bIns="0" anchor="t">
-            <a:spAutoFit/>
-          </a:bodyPr>
-          <a:lstStyle/>
-          <a:p>
-            <a:pPr algn="l">
-              <a:lnSpc>
-                <a:spcPct val="116000"/>
-              </a:lnSpc>
-              <a:spcBef>
-                <a:spcPts val="0"/>
-              </a:spcBef>
-              <a:spcAft>
-                <a:spcPts val="0"/>
-              </a:spcAft>
-              <a:defRPr sz="1900" b="0">
-                <a:solidFill>
-                  <a:srgbClr val="182B37"/>
-                </a:solidFill>
-                <a:latin typeface="Microsoft YaHei"/>
-                <a:ea typeface="Microsoft YaHei"/>
-              </a:defRPr>
-            </a:pPr>
-            <a:r>
-              <a:t>借笔原文＋新教育背景</a:t>
-            </a:r>
-          </a:p>
-          <a:p>
-            <a:pPr algn="l">
-              <a:lnSpc>
-                <a:spcPct val="116000"/>
-              </a:lnSpc>
-              <a:spcBef>
-                <a:spcPts val="0"/>
-              </a:spcBef>
-              <a:spcAft>
-                <a:spcPts val="0"/>
-              </a:spcAft>
-              <a:defRPr sz="1900" b="0">
-                <a:solidFill>
-                  <a:srgbClr val="182B37"/>
-                </a:solidFill>
-                <a:latin typeface="Microsoft YaHei"/>
-                <a:ea typeface="Microsoft YaHei"/>
-              </a:defRPr>
-            </a:pPr>
-            <a:r>
-              <a:t>相邻场摘要＋人物资料</a:t>
-            </a:r>
-          </a:p>
-          <a:p>
-            <a:pPr algn="l">
-              <a:lnSpc>
-                <a:spcPct val="116000"/>
-              </a:lnSpc>
-              <a:spcBef>
-                <a:spcPts val="0"/>
-              </a:spcBef>
-              <a:spcAft>
-                <a:spcPts val="0"/>
-              </a:spcAft>
-              <a:defRPr sz="1900" b="0">
-                <a:solidFill>
-                  <a:srgbClr val="182B37"/>
-                </a:solidFill>
-                <a:latin typeface="Microsoft YaHei"/>
-                <a:ea typeface="Microsoft YaHei"/>
-              </a:defRPr>
-            </a:pPr>
-            <a:r>
-              <a:t>保留换错人的分数反转</a:t>
-            </a:r>
-          </a:p>
-        </p:txBody>
-      </p:sp>
-      <p:sp>
-        <p:nvSpPr>
-          <p:cNvPr id="11" name="Rounded Rectangle 10"/>
-          <p:cNvSpPr/>
-          <p:nvPr/>
-        </p:nvSpPr>
-        <p:spPr>
-          <a:xfrm>
-            <a:off x="4389120" y="2075688"/>
-            <a:ext cx="3419856" cy="3291840"/>
-          </a:xfrm>
-          <a:prstGeom prst="roundRect">
-            <a:avLst>
-              <a:gd name="adj" fmla="val 5000"/>
-            </a:avLst>
-          </a:prstGeom>
-          <a:solidFill>
-            <a:srgbClr val="FFFFFF"/>
-          </a:solidFill>
-          <a:ln w="8890">
-            <a:solidFill>
-              <a:srgbClr val="DEDACF"/>
-            </a:solidFill>
-          </a:ln>
-        </p:spPr>
-        <p:style>
-          <a:lnRef idx="1">
-            <a:schemeClr val="accent1"/>
-          </a:lnRef>
-          <a:fillRef idx="3">
-            <a:schemeClr val="accent1"/>
-          </a:fillRef>
-          <a:effectRef idx="2">
-            <a:schemeClr val="accent1"/>
-          </a:effectRef>
-          <a:fontRef idx="minor">
-            <a:schemeClr val="lt1"/>
-          </a:fontRef>
-        </p:style>
-        <p:txBody>
-          <a:bodyPr rtlCol="0" anchor="ctr"/>
-          <a:lstStyle/>
-          <a:p>
-            <a:pPr algn="ctr"/>
-          </a:p>
-        </p:txBody>
-      </p:sp>
-      <p:sp>
-        <p:nvSpPr>
-          <p:cNvPr id="12" name="TextBox 11"/>
-          <p:cNvSpPr txBox="1"/>
-          <p:nvPr/>
-        </p:nvSpPr>
-        <p:spPr>
-          <a:xfrm>
-            <a:off x="4590288" y="2331720"/>
-            <a:ext cx="3017520" cy="310896"/>
-          </a:xfrm>
-          <a:prstGeom prst="rect">
-            <a:avLst/>
-          </a:prstGeom>
-          <a:noFill/>
-        </p:spPr>
-        <p:txBody>
-          <a:bodyPr wrap="square" lIns="0" rIns="0" tIns="0" bIns="0" anchor="t">
-            <a:spAutoFit/>
-          </a:bodyPr>
-          <a:lstStyle/>
-          <a:p>
-            <a:pPr algn="l">
-              <a:lnSpc>
-                <a:spcPct val="116000"/>
-              </a:lnSpc>
-              <a:spcBef>
-                <a:spcPts val="0"/>
-              </a:spcBef>
-              <a:spcAft>
-                <a:spcPts val="0"/>
-              </a:spcAft>
-              <a:defRPr sz="1600" b="1">
-                <a:solidFill>
-                  <a:srgbClr val="B79456"/>
-                </a:solidFill>
-                <a:latin typeface="Microsoft YaHei"/>
-                <a:ea typeface="Microsoft YaHei"/>
-              </a:defRPr>
-            </a:pPr>
-            <a:r>
-              <a:t>检查改稿</a:t>
-            </a:r>
-          </a:p>
-        </p:txBody>
-      </p:sp>
-      <p:sp>
-        <p:nvSpPr>
-          <p:cNvPr id="13" name="TextBox 12"/>
-          <p:cNvSpPr txBox="1"/>
-          <p:nvPr/>
-        </p:nvSpPr>
-        <p:spPr>
-          <a:xfrm>
-            <a:off x="4590288" y="2907792"/>
-            <a:ext cx="3017520" cy="877824"/>
-          </a:xfrm>
-          <a:prstGeom prst="rect">
-            <a:avLst/>
-          </a:prstGeom>
-          <a:noFill/>
-        </p:spPr>
-        <p:txBody>
-          <a:bodyPr wrap="square" lIns="0" rIns="0" tIns="0" bIns="0" anchor="t">
-            <a:spAutoFit/>
-          </a:bodyPr>
-          <a:lstStyle/>
-          <a:p>
-            <a:pPr algn="l">
-              <a:lnSpc>
-                <a:spcPct val="116000"/>
-              </a:lnSpc>
-              <a:spcBef>
-                <a:spcPts val="0"/>
-              </a:spcBef>
-              <a:spcAft>
-                <a:spcPts val="0"/>
-              </a:spcAft>
-              <a:defRPr sz="2400" b="1">
-                <a:solidFill>
-                  <a:srgbClr val="182B37"/>
-                </a:solidFill>
-                <a:latin typeface="Microsoft YaHei"/>
-                <a:ea typeface="Microsoft YaHei"/>
-              </a:defRPr>
-            </a:pPr>
-            <a:r>
-              <a:t>规则＋模型审稿</a:t>
-            </a:r>
-          </a:p>
-        </p:txBody>
-      </p:sp>
-      <p:sp>
-        <p:nvSpPr>
-          <p:cNvPr id="14" name="TextBox 13"/>
-          <p:cNvSpPr txBox="1"/>
-          <p:nvPr/>
-        </p:nvSpPr>
-        <p:spPr>
-          <a:xfrm>
-            <a:off x="4590288" y="3968496"/>
-            <a:ext cx="3017520" cy="1161288"/>
-          </a:xfrm>
-          <a:prstGeom prst="rect">
-            <a:avLst/>
-          </a:prstGeom>
-          <a:noFill/>
-        </p:spPr>
-        <p:txBody>
-          <a:bodyPr wrap="square" lIns="0" rIns="0" tIns="0" bIns="0" anchor="t">
-            <a:spAutoFit/>
-          </a:bodyPr>
-          <a:lstStyle/>
-          <a:p>
-            <a:pPr algn="l">
-              <a:lnSpc>
-                <a:spcPct val="116000"/>
-              </a:lnSpc>
-              <a:spcBef>
-                <a:spcPts val="0"/>
-              </a:spcBef>
-              <a:spcAft>
-                <a:spcPts val="0"/>
-              </a:spcAft>
-              <a:defRPr sz="1900" b="0">
-                <a:solidFill>
-                  <a:srgbClr val="182B37"/>
-                </a:solidFill>
-                <a:latin typeface="Microsoft YaHei"/>
-                <a:ea typeface="Microsoft YaHei"/>
-              </a:defRPr>
-            </a:pPr>
-            <a:r>
-              <a:t>检查高考旧称谓是否残留</a:t>
-            </a:r>
-          </a:p>
-          <a:p>
-            <a:pPr algn="l">
-              <a:lnSpc>
-                <a:spcPct val="116000"/>
-              </a:lnSpc>
-              <a:spcBef>
-                <a:spcPts val="0"/>
-              </a:spcBef>
-              <a:spcAft>
-                <a:spcPts val="0"/>
-              </a:spcAft>
-              <a:defRPr sz="1900" b="0">
-                <a:solidFill>
-                  <a:srgbClr val="182B37"/>
-                </a:solidFill>
-                <a:latin typeface="Microsoft YaHei"/>
-                <a:ea typeface="Microsoft YaHei"/>
-              </a:defRPr>
-            </a:pPr>
-            <a:r>
-              <a:t>核对人物、分数与因果</a:t>
-            </a:r>
-          </a:p>
-          <a:p>
-            <a:pPr algn="l">
-              <a:lnSpc>
-                <a:spcPct val="116000"/>
-              </a:lnSpc>
-              <a:spcBef>
-                <a:spcPts val="0"/>
-              </a:spcBef>
-              <a:spcAft>
-                <a:spcPts val="0"/>
-              </a:spcAft>
-              <a:defRPr sz="1900" b="0">
-                <a:solidFill>
-                  <a:srgbClr val="182B37"/>
-                </a:solidFill>
-                <a:latin typeface="Microsoft YaHei"/>
-                <a:ea typeface="Microsoft YaHei"/>
-              </a:defRPr>
-            </a:pPr>
-            <a:r>
-              <a:t>输出问题与场景编号</a:t>
-            </a:r>
-          </a:p>
-        </p:txBody>
-      </p:sp>
-      <p:sp>
-        <p:nvSpPr>
-          <p:cNvPr id="15" name="Rounded Rectangle 14"/>
-          <p:cNvSpPr/>
-          <p:nvPr/>
-        </p:nvSpPr>
-        <p:spPr>
-          <a:xfrm>
-            <a:off x="8083296" y="2075688"/>
-            <a:ext cx="3419856" cy="3291840"/>
-          </a:xfrm>
-          <a:prstGeom prst="roundRect">
-            <a:avLst>
-              <a:gd name="adj" fmla="val 5000"/>
-            </a:avLst>
-          </a:prstGeom>
-          <a:solidFill>
-            <a:srgbClr val="FFFFFF"/>
-          </a:solidFill>
-          <a:ln w="8890">
-            <a:solidFill>
-              <a:srgbClr val="DEDACF"/>
-            </a:solidFill>
-          </a:ln>
-        </p:spPr>
-        <p:style>
-          <a:lnRef idx="1">
-            <a:schemeClr val="accent1"/>
-          </a:lnRef>
-          <a:fillRef idx="3">
-            <a:schemeClr val="accent1"/>
-          </a:fillRef>
-          <a:effectRef idx="2">
-            <a:schemeClr val="accent1"/>
-          </a:effectRef>
-          <a:fontRef idx="minor">
-            <a:schemeClr val="lt1"/>
-          </a:fontRef>
-        </p:style>
-        <p:txBody>
-          <a:bodyPr rtlCol="0" anchor="ctr"/>
-          <a:lstStyle/>
-          <a:p>
-            <a:pPr algn="ctr"/>
-          </a:p>
-        </p:txBody>
-      </p:sp>
-      <p:sp>
-        <p:nvSpPr>
-          <p:cNvPr id="16" name="TextBox 15"/>
-          <p:cNvSpPr txBox="1"/>
-          <p:nvPr/>
-        </p:nvSpPr>
-        <p:spPr>
-          <a:xfrm>
-            <a:off x="8284464" y="2331720"/>
-            <a:ext cx="3017520" cy="310896"/>
-          </a:xfrm>
-          <a:prstGeom prst="rect">
-            <a:avLst/>
-          </a:prstGeom>
-          <a:noFill/>
-        </p:spPr>
-        <p:txBody>
-          <a:bodyPr wrap="square" lIns="0" rIns="0" tIns="0" bIns="0" anchor="t">
-            <a:spAutoFit/>
-          </a:bodyPr>
-          <a:lstStyle/>
-          <a:p>
-            <a:pPr algn="l">
-              <a:lnSpc>
-                <a:spcPct val="116000"/>
-              </a:lnSpc>
-              <a:spcBef>
-                <a:spcPts val="0"/>
-              </a:spcBef>
-              <a:spcAft>
-                <a:spcPts val="0"/>
-              </a:spcAft>
-              <a:defRPr sz="1600" b="1">
-                <a:solidFill>
-                  <a:srgbClr val="267868"/>
-                </a:solidFill>
-                <a:latin typeface="Microsoft YaHei"/>
-                <a:ea typeface="Microsoft YaHei"/>
-              </a:defRPr>
-            </a:pPr>
-            <a:r>
-              <a:t>回到问题场景</a:t>
-            </a:r>
-          </a:p>
-        </p:txBody>
-      </p:sp>
-      <p:sp>
-        <p:nvSpPr>
-          <p:cNvPr id="17" name="TextBox 16"/>
-          <p:cNvSpPr txBox="1"/>
-          <p:nvPr/>
-        </p:nvSpPr>
-        <p:spPr>
-          <a:xfrm>
-            <a:off x="8284464" y="2907792"/>
-            <a:ext cx="3017520" cy="877824"/>
-          </a:xfrm>
-          <a:prstGeom prst="rect">
-            <a:avLst/>
-          </a:prstGeom>
-          <a:noFill/>
-        </p:spPr>
-        <p:txBody>
-          <a:bodyPr wrap="square" lIns="0" rIns="0" tIns="0" bIns="0" anchor="t">
-            <a:spAutoFit/>
-          </a:bodyPr>
-          <a:lstStyle/>
-          <a:p>
-            <a:pPr algn="l">
-              <a:lnSpc>
-                <a:spcPct val="116000"/>
-              </a:lnSpc>
-              <a:spcBef>
-                <a:spcPts val="0"/>
-              </a:spcBef>
-              <a:spcAft>
-                <a:spcPts val="0"/>
-              </a:spcAft>
-              <a:defRPr sz="2400" b="1">
-                <a:solidFill>
-                  <a:srgbClr val="182B37"/>
-                </a:solidFill>
-                <a:latin typeface="Microsoft YaHei"/>
-                <a:ea typeface="Microsoft YaHei"/>
-              </a:defRPr>
-            </a:pPr>
-            <a:r>
-              <a:t>定点修复，再次检查</a:t>
-            </a:r>
-          </a:p>
-        </p:txBody>
-      </p:sp>
-      <p:sp>
-        <p:nvSpPr>
-          <p:cNvPr id="18" name="TextBox 17"/>
-          <p:cNvSpPr txBox="1"/>
-          <p:nvPr/>
-        </p:nvSpPr>
-        <p:spPr>
-          <a:xfrm>
-            <a:off x="8284464" y="3968496"/>
-            <a:ext cx="3017520" cy="1161288"/>
-          </a:xfrm>
-          <a:prstGeom prst="rect">
-            <a:avLst/>
-          </a:prstGeom>
-          <a:noFill/>
-        </p:spPr>
-        <p:txBody>
-          <a:bodyPr wrap="square" lIns="0" rIns="0" tIns="0" bIns="0" anchor="t">
-            <a:spAutoFit/>
-          </a:bodyPr>
-          <a:lstStyle/>
-          <a:p>
-            <a:pPr algn="l">
-              <a:lnSpc>
-                <a:spcPct val="116000"/>
-              </a:lnSpc>
-              <a:spcBef>
-                <a:spcPts val="0"/>
-              </a:spcBef>
-              <a:spcAft>
-                <a:spcPts val="0"/>
-              </a:spcAft>
-              <a:defRPr sz="1900" b="0">
-                <a:solidFill>
-                  <a:srgbClr val="182B37"/>
-                </a:solidFill>
-                <a:latin typeface="Microsoft YaHei"/>
-                <a:ea typeface="Microsoft YaHei"/>
-              </a:defRPr>
-            </a:pPr>
-            <a:r>
-              <a:t>按场景编号定位问题</a:t>
-            </a:r>
-          </a:p>
-          <a:p>
-            <a:pPr algn="l">
-              <a:lnSpc>
-                <a:spcPct val="116000"/>
-              </a:lnSpc>
-              <a:spcBef>
-                <a:spcPts val="0"/>
-              </a:spcBef>
-              <a:spcAft>
-                <a:spcPts val="0"/>
-              </a:spcAft>
-              <a:defRPr sz="1900" b="0">
-                <a:solidFill>
-                  <a:srgbClr val="182B37"/>
-                </a:solidFill>
-                <a:latin typeface="Microsoft YaHei"/>
-                <a:ea typeface="Microsoft YaHei"/>
-              </a:defRPr>
-            </a:pPr>
-            <a:r>
-              <a:t>生成修复计划并改写</a:t>
-            </a:r>
-          </a:p>
-          <a:p>
-            <a:pPr algn="l">
-              <a:lnSpc>
-                <a:spcPct val="116000"/>
-              </a:lnSpc>
-              <a:spcBef>
-                <a:spcPts val="0"/>
-              </a:spcBef>
-              <a:spcAft>
-                <a:spcPts val="0"/>
-              </a:spcAft>
-              <a:defRPr sz="1900" b="0">
-                <a:solidFill>
-                  <a:srgbClr val="182B37"/>
-                </a:solidFill>
-                <a:latin typeface="Microsoft YaHei"/>
-                <a:ea typeface="Microsoft YaHei"/>
-              </a:defRPr>
-            </a:pPr>
-            <a:r>
-              <a:t>复核结果交给编剧确认</a:t>
-            </a:r>
-          </a:p>
-        </p:txBody>
-      </p:sp>
-      <p:cxnSp>
-        <p:nvCxnSpPr>
-          <p:cNvPr id="19" name="Connector 18"/>
-          <p:cNvCxnSpPr/>
-          <p:nvPr/>
-        </p:nvCxnSpPr>
-        <p:spPr>
-          <a:xfrm>
-            <a:off x="4142232" y="3611880"/>
-            <a:ext cx="182880" cy="0"/>
-          </a:xfrm>
-          <a:prstGeom prst="line">
-            <a:avLst/>
-          </a:prstGeom>
-          <a:ln w="25400">
-            <a:solidFill>
-              <a:srgbClr val="B79456"/>
-            </a:solidFill>
-            <a:tailEnd type="triangle"/>
-          </a:ln>
-        </p:spPr>
-        <p:style>
-          <a:lnRef idx="2">
-            <a:schemeClr val="accent1"/>
-          </a:lnRef>
-          <a:fillRef idx="0">
-            <a:schemeClr val="accent1"/>
-          </a:fillRef>
-          <a:effectRef idx="1">
-            <a:schemeClr val="accent1"/>
-          </a:effectRef>
-          <a:fontRef idx="minor">
-            <a:schemeClr val="tx1"/>
-          </a:fontRef>
-        </p:style>
-      </p:cxnSp>
-      <p:cxnSp>
-        <p:nvCxnSpPr>
-          <p:cNvPr id="20" name="Connector 19"/>
-          <p:cNvCxnSpPr/>
-          <p:nvPr/>
-        </p:nvCxnSpPr>
-        <p:spPr>
-          <a:xfrm>
-            <a:off x="7836408" y="3611880"/>
-            <a:ext cx="182880" cy="0"/>
-          </a:xfrm>
-          <a:prstGeom prst="line">
-            <a:avLst/>
-          </a:prstGeom>
-          <a:ln w="25400">
-            <a:solidFill>
-              <a:srgbClr val="B79456"/>
-            </a:solidFill>
-            <a:tailEnd type="triangle"/>
-          </a:ln>
-        </p:spPr>
-        <p:style>
-          <a:lnRef idx="2">
-            <a:schemeClr val="accent1"/>
-          </a:lnRef>
-          <a:fillRef idx="0">
-            <a:schemeClr val="accent1"/>
-          </a:fillRef>
-          <a:effectRef idx="1">
-            <a:schemeClr val="accent1"/>
-          </a:effectRef>
-          <a:fontRef idx="minor">
-            <a:schemeClr val="tx1"/>
-          </a:fontRef>
-        </p:style>
-      </p:cxnSp>
-      <p:sp>
-        <p:nvSpPr>
-          <p:cNvPr id="21" name="Rounded Rectangle 20"/>
-          <p:cNvSpPr/>
-          <p:nvPr/>
-        </p:nvSpPr>
-        <p:spPr>
-          <a:xfrm>
-            <a:off x="658368" y="5687568"/>
-            <a:ext cx="10881360" cy="576072"/>
-          </a:xfrm>
-          <a:prstGeom prst="roundRect">
-            <a:avLst>
-              <a:gd name="adj" fmla="val 5000"/>
-            </a:avLst>
-          </a:prstGeom>
-          <a:solidFill>
-            <a:srgbClr val="E7F0EC"/>
-          </a:solidFill>
-          <a:ln>
-            <a:noFill/>
-          </a:ln>
-        </p:spPr>
-        <p:style>
-          <a:lnRef idx="1">
-            <a:schemeClr val="accent1"/>
-          </a:lnRef>
-          <a:fillRef idx="3">
-            <a:schemeClr val="accent1"/>
-          </a:fillRef>
-          <a:effectRef idx="2">
-            <a:schemeClr val="accent1"/>
-          </a:effectRef>
-          <a:fontRef idx="minor">
-            <a:schemeClr val="lt1"/>
-          </a:fontRef>
-        </p:style>
-        <p:txBody>
-          <a:bodyPr rtlCol="0" anchor="ctr"/>
-          <a:lstStyle/>
-          <a:p>
-            <a:pPr algn="ctr"/>
-          </a:p>
-        </p:txBody>
-      </p:sp>
-      <p:sp>
-        <p:nvSpPr>
-          <p:cNvPr id="22" name="TextBox 21"/>
-          <p:cNvSpPr txBox="1"/>
-          <p:nvPr/>
-        </p:nvSpPr>
-        <p:spPr>
-          <a:xfrm>
-            <a:off x="859536" y="5824728"/>
-            <a:ext cx="10479024" cy="347472"/>
-          </a:xfrm>
-          <a:prstGeom prst="rect">
-            <a:avLst/>
-          </a:prstGeom>
-          <a:noFill/>
-        </p:spPr>
-        <p:txBody>
-          <a:bodyPr wrap="square" lIns="0" rIns="0" tIns="0" bIns="0" anchor="t">
-            <a:spAutoFit/>
-          </a:bodyPr>
-          <a:lstStyle/>
-          <a:p>
-            <a:pPr algn="ctr">
-              <a:lnSpc>
-                <a:spcPct val="116000"/>
-              </a:lnSpc>
-              <a:spcBef>
-                <a:spcPts val="0"/>
-              </a:spcBef>
-              <a:spcAft>
-                <a:spcPts val="0"/>
-              </a:spcAft>
-              <a:defRPr sz="2000" b="1">
-                <a:solidFill>
-                  <a:srgbClr val="267868"/>
-                </a:solidFill>
-                <a:latin typeface="Microsoft YaHei"/>
-                <a:ea typeface="Microsoft YaHei"/>
-              </a:defRPr>
-            </a:pPr>
-            <a:r>
-              <a:t>依赖图负责定位；检查器结合全篇内容，继续核对事实和因果。</a:t>
-            </a:r>
-          </a:p>
-        </p:txBody>
-      </p:sp>
+              <a:t>06 / 13</a:t>
+            </a:r>
+          </a:p>
+        </p:txBody>
+      </p:sp>
+      <p:pic>
+        <p:nvPicPr>
+          <p:cNvPr id="7" name="Picture 6" descr="evidence_dependency_paths.png"/>
+          <p:cNvPicPr>
+            <a:picLocks noChangeAspect="1"/>
+          </p:cNvPicPr>
+          <p:nvPr/>
+        </p:nvPicPr>
+        <p:blipFill>
+          <a:blip r:embed="rId2"/>
+          <a:stretch>
+            <a:fillRect/>
+          </a:stretch>
+        </p:blipFill>
+        <p:spPr>
+          <a:xfrm>
+            <a:off x="0" y="0"/>
+            <a:ext cx="12191999" cy="6857999"/>
+          </a:xfrm>
+          <a:prstGeom prst="rect">
+            <a:avLst/>
+          </a:prstGeom>
+        </p:spPr>
+      </p:pic>
     </p:spTree>
   </p:cSld>
   <p:clrMapOvr>
@@ -15051,7 +12720,7 @@
               </a:defRPr>
             </a:pPr>
             <a:r>
-              <a:t>StoryBridge   ·   综合对照 · 看核心改编是否真正落实</a:t>
+              <a:t>StoryBridge   ·   案例中的方法 4 · 全篇检查与按场修复</a:t>
             </a:r>
           </a:p>
         </p:txBody>
@@ -15097,7 +12766,7 @@
               </a:defRPr>
             </a:pPr>
             <a:r>
-              <a:t>Baseline 的短板：改不全、改错、缺少依赖追踪</a:t>
+              <a:t>检查报告：问题落到场景，修复留下记录</a:t>
             </a:r>
           </a:p>
         </p:txBody>
@@ -15143,7 +12812,7 @@
               </a:defRPr>
             </a:pPr>
             <a:r>
-              <a:t>核心机制未替换：后续测试反馈；数字错误：本次输出；依赖追踪：流程对照</a:t>
+              <a:t>真实保存结果 · 内部证据排版，非访客 UI</a:t>
             </a:r>
           </a:p>
         </p:txBody>
@@ -15189,795 +12858,35 @@
               </a:defRPr>
             </a:pPr>
             <a:r>
-              <a:t>07 / 12</a:t>
-            </a:r>
-          </a:p>
-        </p:txBody>
-      </p:sp>
-      <p:sp>
-        <p:nvSpPr>
-          <p:cNvPr id="7" name="Rounded Rectangle 6"/>
-          <p:cNvSpPr/>
-          <p:nvPr/>
-        </p:nvSpPr>
-        <p:spPr>
-          <a:xfrm>
-            <a:off x="676656" y="1901952"/>
-            <a:ext cx="3447288" cy="3529584"/>
-          </a:xfrm>
-          <a:prstGeom prst="roundRect">
-            <a:avLst>
-              <a:gd name="adj" fmla="val 5000"/>
-            </a:avLst>
-          </a:prstGeom>
-          <a:solidFill>
-            <a:srgbClr val="FFFFFF"/>
-          </a:solidFill>
-          <a:ln w="8890">
-            <a:solidFill>
-              <a:srgbClr val="DEDACF"/>
-            </a:solidFill>
-          </a:ln>
-        </p:spPr>
-        <p:style>
-          <a:lnRef idx="1">
-            <a:schemeClr val="accent1"/>
-          </a:lnRef>
-          <a:fillRef idx="3">
-            <a:schemeClr val="accent1"/>
-          </a:fillRef>
-          <a:effectRef idx="2">
-            <a:schemeClr val="accent1"/>
-          </a:effectRef>
-          <a:fontRef idx="minor">
-            <a:schemeClr val="lt1"/>
-          </a:fontRef>
-        </p:style>
-        <p:txBody>
-          <a:bodyPr rtlCol="0" anchor="ctr"/>
-          <a:lstStyle/>
-          <a:p>
-            <a:pPr algn="ctr"/>
-          </a:p>
-        </p:txBody>
-      </p:sp>
-      <p:sp>
-        <p:nvSpPr>
-          <p:cNvPr id="8" name="TextBox 7"/>
-          <p:cNvSpPr txBox="1"/>
-          <p:nvPr/>
-        </p:nvSpPr>
-        <p:spPr>
-          <a:xfrm>
-            <a:off x="896112" y="2103120"/>
-            <a:ext cx="3008376" cy="310896"/>
-          </a:xfrm>
-          <a:prstGeom prst="rect">
-            <a:avLst/>
-          </a:prstGeom>
-          <a:noFill/>
-        </p:spPr>
-        <p:txBody>
-          <a:bodyPr wrap="square" lIns="0" rIns="0" tIns="0" bIns="0" anchor="t">
-            <a:spAutoFit/>
-          </a:bodyPr>
-          <a:lstStyle/>
-          <a:p>
-            <a:pPr algn="l">
-              <a:lnSpc>
-                <a:spcPct val="116000"/>
-              </a:lnSpc>
-              <a:spcBef>
-                <a:spcPts val="0"/>
-              </a:spcBef>
-              <a:spcAft>
-                <a:spcPts val="0"/>
-              </a:spcAft>
-              <a:defRPr sz="1500" b="1">
-                <a:solidFill>
-                  <a:srgbClr val="C64B3C"/>
-                </a:solidFill>
-                <a:latin typeface="Microsoft YaHei"/>
-                <a:ea typeface="Microsoft YaHei"/>
-              </a:defRPr>
-            </a:pPr>
-            <a:r>
-              <a:t>改不全 · 后续测试反馈</a:t>
-            </a:r>
-          </a:p>
-        </p:txBody>
-      </p:sp>
-      <p:sp>
-        <p:nvSpPr>
-          <p:cNvPr id="9" name="TextBox 8"/>
-          <p:cNvSpPr txBox="1"/>
-          <p:nvPr/>
-        </p:nvSpPr>
-        <p:spPr>
-          <a:xfrm>
-            <a:off x="896112" y="2679192"/>
-            <a:ext cx="3008376" cy="841248"/>
-          </a:xfrm>
-          <a:prstGeom prst="rect">
-            <a:avLst/>
-          </a:prstGeom>
-          <a:noFill/>
-        </p:spPr>
-        <p:txBody>
-          <a:bodyPr wrap="square" lIns="0" rIns="0" tIns="0" bIns="0" anchor="t">
-            <a:spAutoFit/>
-          </a:bodyPr>
-          <a:lstStyle/>
-          <a:p>
-            <a:pPr algn="l">
-              <a:lnSpc>
-                <a:spcPct val="116000"/>
-              </a:lnSpc>
-              <a:spcBef>
-                <a:spcPts val="0"/>
-              </a:spcBef>
-              <a:spcAft>
-                <a:spcPts val="0"/>
-              </a:spcAft>
-              <a:defRPr sz="2700" b="1">
-                <a:solidFill>
-                  <a:srgbClr val="182B37"/>
-                </a:solidFill>
-                <a:latin typeface="Microsoft YaHei"/>
-                <a:ea typeface="Microsoft YaHei"/>
-              </a:defRPr>
-            </a:pPr>
-            <a:r>
-              <a:t>核心系统没改掉</a:t>
-            </a:r>
-          </a:p>
-        </p:txBody>
-      </p:sp>
-      <p:sp>
-        <p:nvSpPr>
-          <p:cNvPr id="10" name="TextBox 9"/>
-          <p:cNvSpPr txBox="1"/>
-          <p:nvPr/>
-        </p:nvSpPr>
-        <p:spPr>
-          <a:xfrm>
-            <a:off x="896112" y="3685032"/>
-            <a:ext cx="3008376" cy="1655064"/>
-          </a:xfrm>
-          <a:prstGeom prst="rect">
-            <a:avLst/>
-          </a:prstGeom>
-          <a:noFill/>
-        </p:spPr>
-        <p:txBody>
-          <a:bodyPr wrap="square" lIns="0" rIns="0" tIns="0" bIns="0" anchor="t">
-            <a:spAutoFit/>
-          </a:bodyPr>
-          <a:lstStyle/>
-          <a:p>
-            <a:pPr algn="l">
-              <a:lnSpc>
-                <a:spcPct val="116000"/>
-              </a:lnSpc>
-              <a:spcBef>
-                <a:spcPts val="0"/>
-              </a:spcBef>
-              <a:spcAft>
-                <a:spcPts val="0"/>
-              </a:spcAft>
-              <a:defRPr sz="2200" b="0">
-                <a:solidFill>
-                  <a:srgbClr val="182B37"/>
-                </a:solidFill>
-                <a:latin typeface="Microsoft YaHei"/>
-                <a:ea typeface="Microsoft YaHei"/>
-              </a:defRPr>
-            </a:pPr>
-            <a:r>
-              <a:t>要求替换换分系统，</a:t>
-            </a:r>
-          </a:p>
-          <a:p>
-            <a:pPr algn="l">
-              <a:lnSpc>
-                <a:spcPct val="116000"/>
-              </a:lnSpc>
-              <a:spcBef>
-                <a:spcPts val="0"/>
-              </a:spcBef>
-              <a:spcAft>
-                <a:spcPts val="0"/>
-              </a:spcAft>
-              <a:defRPr sz="2200" b="0">
-                <a:solidFill>
-                  <a:srgbClr val="182B37"/>
-                </a:solidFill>
-                <a:latin typeface="Microsoft YaHei"/>
-                <a:ea typeface="Microsoft YaHei"/>
-              </a:defRPr>
-            </a:pPr>
-            <a:r>
-              <a:t>输出仍保留旧机制。</a:t>
-            </a:r>
-          </a:p>
-          <a:p>
-            <a:pPr algn="l">
-              <a:lnSpc>
-                <a:spcPct val="116000"/>
-              </a:lnSpc>
-              <a:spcBef>
-                <a:spcPts val="0"/>
-              </a:spcBef>
-              <a:spcAft>
-                <a:spcPts val="0"/>
-              </a:spcAft>
-              <a:defRPr sz="2200" b="0">
-                <a:solidFill>
-                  <a:srgbClr val="182B37"/>
-                </a:solidFill>
-                <a:latin typeface="Microsoft YaHei"/>
-                <a:ea typeface="Microsoft YaHei"/>
-              </a:defRPr>
-            </a:pPr>
-            <a:r>
-              <a:t>核心要求没落实。</a:t>
-            </a:r>
-          </a:p>
-        </p:txBody>
-      </p:sp>
-      <p:sp>
-        <p:nvSpPr>
-          <p:cNvPr id="11" name="Rounded Rectangle 10"/>
-          <p:cNvSpPr/>
-          <p:nvPr/>
-        </p:nvSpPr>
-        <p:spPr>
-          <a:xfrm>
-            <a:off x="4379976" y="1901952"/>
-            <a:ext cx="3447288" cy="3529584"/>
-          </a:xfrm>
-          <a:prstGeom prst="roundRect">
-            <a:avLst>
-              <a:gd name="adj" fmla="val 5000"/>
-            </a:avLst>
-          </a:prstGeom>
-          <a:solidFill>
-            <a:srgbClr val="FFFFFF"/>
-          </a:solidFill>
-          <a:ln w="8890">
-            <a:solidFill>
-              <a:srgbClr val="DEDACF"/>
-            </a:solidFill>
-          </a:ln>
-        </p:spPr>
-        <p:style>
-          <a:lnRef idx="1">
-            <a:schemeClr val="accent1"/>
-          </a:lnRef>
-          <a:fillRef idx="3">
-            <a:schemeClr val="accent1"/>
-          </a:fillRef>
-          <a:effectRef idx="2">
-            <a:schemeClr val="accent1"/>
-          </a:effectRef>
-          <a:fontRef idx="minor">
-            <a:schemeClr val="lt1"/>
-          </a:fontRef>
-        </p:style>
-        <p:txBody>
-          <a:bodyPr rtlCol="0" anchor="ctr"/>
-          <a:lstStyle/>
-          <a:p>
-            <a:pPr algn="ctr"/>
-          </a:p>
-        </p:txBody>
-      </p:sp>
-      <p:sp>
-        <p:nvSpPr>
-          <p:cNvPr id="12" name="TextBox 11"/>
-          <p:cNvSpPr txBox="1"/>
-          <p:nvPr/>
-        </p:nvSpPr>
-        <p:spPr>
-          <a:xfrm>
-            <a:off x="4599432" y="2103120"/>
-            <a:ext cx="3008376" cy="310896"/>
-          </a:xfrm>
-          <a:prstGeom prst="rect">
-            <a:avLst/>
-          </a:prstGeom>
-          <a:noFill/>
-        </p:spPr>
-        <p:txBody>
-          <a:bodyPr wrap="square" lIns="0" rIns="0" tIns="0" bIns="0" anchor="t">
-            <a:spAutoFit/>
-          </a:bodyPr>
-          <a:lstStyle/>
-          <a:p>
-            <a:pPr algn="l">
-              <a:lnSpc>
-                <a:spcPct val="116000"/>
-              </a:lnSpc>
-              <a:spcBef>
-                <a:spcPts val="0"/>
-              </a:spcBef>
-              <a:spcAft>
-                <a:spcPts val="0"/>
-              </a:spcAft>
-              <a:defRPr sz="1500" b="1">
-                <a:solidFill>
-                  <a:srgbClr val="C64B3C"/>
-                </a:solidFill>
-                <a:latin typeface="Microsoft YaHei"/>
-                <a:ea typeface="Microsoft YaHei"/>
-              </a:defRPr>
-            </a:pPr>
-            <a:r>
-              <a:t>改错 · 本次实际输出</a:t>
-            </a:r>
-          </a:p>
-        </p:txBody>
-      </p:sp>
-      <p:sp>
-        <p:nvSpPr>
-          <p:cNvPr id="13" name="TextBox 12"/>
-          <p:cNvSpPr txBox="1"/>
-          <p:nvPr/>
-        </p:nvSpPr>
-        <p:spPr>
-          <a:xfrm>
-            <a:off x="4599432" y="2679192"/>
-            <a:ext cx="3008376" cy="841248"/>
-          </a:xfrm>
-          <a:prstGeom prst="rect">
-            <a:avLst/>
-          </a:prstGeom>
-          <a:noFill/>
-        </p:spPr>
-        <p:txBody>
-          <a:bodyPr wrap="square" lIns="0" rIns="0" tIns="0" bIns="0" anchor="t">
-            <a:spAutoFit/>
-          </a:bodyPr>
-          <a:lstStyle/>
-          <a:p>
-            <a:pPr algn="l">
-              <a:lnSpc>
-                <a:spcPct val="116000"/>
-              </a:lnSpc>
-              <a:spcBef>
-                <a:spcPts val="0"/>
-              </a:spcBef>
-              <a:spcAft>
-                <a:spcPts val="0"/>
-              </a:spcAft>
-              <a:defRPr sz="2700" b="1">
-                <a:solidFill>
-                  <a:srgbClr val="182B37"/>
-                </a:solidFill>
-                <a:latin typeface="Microsoft YaHei"/>
-                <a:ea typeface="Microsoft YaHei"/>
-              </a:defRPr>
-            </a:pPr>
-            <a:r>
-              <a:t>人物结果写串了</a:t>
-            </a:r>
-          </a:p>
-        </p:txBody>
-      </p:sp>
-      <p:sp>
-        <p:nvSpPr>
-          <p:cNvPr id="14" name="TextBox 13"/>
-          <p:cNvSpPr txBox="1"/>
-          <p:nvPr/>
-        </p:nvSpPr>
-        <p:spPr>
-          <a:xfrm>
-            <a:off x="4599432" y="3685032"/>
-            <a:ext cx="3008376" cy="1655064"/>
-          </a:xfrm>
-          <a:prstGeom prst="rect">
-            <a:avLst/>
-          </a:prstGeom>
-          <a:noFill/>
-        </p:spPr>
-        <p:txBody>
-          <a:bodyPr wrap="square" lIns="0" rIns="0" tIns="0" bIns="0" anchor="t">
-            <a:spAutoFit/>
-          </a:bodyPr>
-          <a:lstStyle/>
-          <a:p>
-            <a:pPr algn="l">
-              <a:lnSpc>
-                <a:spcPct val="116000"/>
-              </a:lnSpc>
-              <a:spcBef>
-                <a:spcPts val="0"/>
-              </a:spcBef>
-              <a:spcAft>
-                <a:spcPts val="0"/>
-              </a:spcAft>
-              <a:defRPr sz="2200" b="0">
-                <a:solidFill>
-                  <a:srgbClr val="182B37"/>
-                </a:solidFill>
-                <a:latin typeface="Microsoft YaHei"/>
-                <a:ea typeface="Microsoft YaHei"/>
-              </a:defRPr>
-            </a:pPr>
-            <a:r>
-              <a:t>沈曼换后应为 330，</a:t>
-            </a:r>
-          </a:p>
-          <a:p>
-            <a:pPr algn="l">
-              <a:lnSpc>
-                <a:spcPct val="116000"/>
-              </a:lnSpc>
-              <a:spcBef>
-                <a:spcPts val="0"/>
-              </a:spcBef>
-              <a:spcAft>
-                <a:spcPts val="0"/>
-              </a:spcAft>
-              <a:defRPr sz="2200" b="0">
-                <a:solidFill>
-                  <a:srgbClr val="182B37"/>
-                </a:solidFill>
-                <a:latin typeface="Microsoft YaHei"/>
-                <a:ea typeface="Microsoft YaHei"/>
-              </a:defRPr>
-            </a:pPr>
-            <a:r>
-              <a:t>庭审却写成 487。</a:t>
-            </a:r>
-          </a:p>
-          <a:p>
-            <a:pPr algn="l">
-              <a:lnSpc>
-                <a:spcPct val="116000"/>
-              </a:lnSpc>
-              <a:spcBef>
-                <a:spcPts val="0"/>
-              </a:spcBef>
-              <a:spcAft>
-                <a:spcPts val="0"/>
-              </a:spcAft>
-              <a:defRPr sz="2200" b="0">
-                <a:solidFill>
-                  <a:srgbClr val="182B37"/>
-                </a:solidFill>
-                <a:latin typeface="Microsoft YaHei"/>
-                <a:ea typeface="Microsoft YaHei"/>
-              </a:defRPr>
-            </a:pPr>
-            <a:r>
-              <a:t>台词顺，事实对不上。</a:t>
-            </a:r>
-          </a:p>
-        </p:txBody>
-      </p:sp>
-      <p:sp>
-        <p:nvSpPr>
-          <p:cNvPr id="15" name="Rounded Rectangle 14"/>
-          <p:cNvSpPr/>
-          <p:nvPr/>
-        </p:nvSpPr>
-        <p:spPr>
-          <a:xfrm>
-            <a:off x="8083296" y="1901952"/>
-            <a:ext cx="3447288" cy="3529584"/>
-          </a:xfrm>
-          <a:prstGeom prst="roundRect">
-            <a:avLst>
-              <a:gd name="adj" fmla="val 5000"/>
-            </a:avLst>
-          </a:prstGeom>
-          <a:solidFill>
-            <a:srgbClr val="FFFFFF"/>
-          </a:solidFill>
-          <a:ln w="8890">
-            <a:solidFill>
-              <a:srgbClr val="DEDACF"/>
-            </a:solidFill>
-          </a:ln>
-        </p:spPr>
-        <p:style>
-          <a:lnRef idx="1">
-            <a:schemeClr val="accent1"/>
-          </a:lnRef>
-          <a:fillRef idx="3">
-            <a:schemeClr val="accent1"/>
-          </a:fillRef>
-          <a:effectRef idx="2">
-            <a:schemeClr val="accent1"/>
-          </a:effectRef>
-          <a:fontRef idx="minor">
-            <a:schemeClr val="lt1"/>
-          </a:fontRef>
-        </p:style>
-        <p:txBody>
-          <a:bodyPr rtlCol="0" anchor="ctr"/>
-          <a:lstStyle/>
-          <a:p>
-            <a:pPr algn="ctr"/>
-          </a:p>
-        </p:txBody>
-      </p:sp>
-      <p:sp>
-        <p:nvSpPr>
-          <p:cNvPr id="16" name="TextBox 15"/>
-          <p:cNvSpPr txBox="1"/>
-          <p:nvPr/>
-        </p:nvSpPr>
-        <p:spPr>
-          <a:xfrm>
-            <a:off x="8302752" y="2103120"/>
-            <a:ext cx="3008376" cy="310896"/>
-          </a:xfrm>
-          <a:prstGeom prst="rect">
-            <a:avLst/>
-          </a:prstGeom>
-          <a:noFill/>
-        </p:spPr>
-        <p:txBody>
-          <a:bodyPr wrap="square" lIns="0" rIns="0" tIns="0" bIns="0" anchor="t">
-            <a:spAutoFit/>
-          </a:bodyPr>
-          <a:lstStyle/>
-          <a:p>
-            <a:pPr algn="l">
-              <a:lnSpc>
-                <a:spcPct val="116000"/>
-              </a:lnSpc>
-              <a:spcBef>
-                <a:spcPts val="0"/>
-              </a:spcBef>
-              <a:spcAft>
-                <a:spcPts val="0"/>
-              </a:spcAft>
-              <a:defRPr sz="1500" b="1">
-                <a:solidFill>
-                  <a:srgbClr val="B79456"/>
-                </a:solidFill>
-                <a:latin typeface="Microsoft YaHei"/>
-                <a:ea typeface="Microsoft YaHei"/>
-              </a:defRPr>
-            </a:pPr>
-            <a:r>
-              <a:t>漏依赖风险 · 流程短板</a:t>
-            </a:r>
-          </a:p>
-        </p:txBody>
-      </p:sp>
-      <p:sp>
-        <p:nvSpPr>
-          <p:cNvPr id="17" name="TextBox 16"/>
-          <p:cNvSpPr txBox="1"/>
-          <p:nvPr/>
-        </p:nvSpPr>
-        <p:spPr>
-          <a:xfrm>
-            <a:off x="8302752" y="2679192"/>
-            <a:ext cx="3008376" cy="841248"/>
-          </a:xfrm>
-          <a:prstGeom prst="rect">
-            <a:avLst/>
-          </a:prstGeom>
-          <a:noFill/>
-        </p:spPr>
-        <p:txBody>
-          <a:bodyPr wrap="square" lIns="0" rIns="0" tIns="0" bIns="0" anchor="t">
-            <a:spAutoFit/>
-          </a:bodyPr>
-          <a:lstStyle/>
-          <a:p>
-            <a:pPr algn="l">
-              <a:lnSpc>
-                <a:spcPct val="116000"/>
-              </a:lnSpc>
-              <a:spcBef>
-                <a:spcPts val="0"/>
-              </a:spcBef>
-              <a:spcAft>
-                <a:spcPts val="0"/>
-              </a:spcAft>
-              <a:defRPr sz="2700" b="1">
-                <a:solidFill>
-                  <a:srgbClr val="182B37"/>
-                </a:solidFill>
-                <a:latin typeface="Microsoft YaHei"/>
-                <a:ea typeface="Microsoft YaHei"/>
-              </a:defRPr>
-            </a:pPr>
-            <a:r>
-              <a:t>连带改动缺少追踪</a:t>
-            </a:r>
-          </a:p>
-        </p:txBody>
-      </p:sp>
-      <p:sp>
-        <p:nvSpPr>
-          <p:cNvPr id="18" name="TextBox 17"/>
-          <p:cNvSpPr txBox="1"/>
-          <p:nvPr/>
-        </p:nvSpPr>
-        <p:spPr>
-          <a:xfrm>
-            <a:off x="8302752" y="3685032"/>
-            <a:ext cx="3008376" cy="1655064"/>
-          </a:xfrm>
-          <a:prstGeom prst="rect">
-            <a:avLst/>
-          </a:prstGeom>
-          <a:noFill/>
-        </p:spPr>
-        <p:txBody>
-          <a:bodyPr wrap="square" lIns="0" rIns="0" tIns="0" bIns="0" anchor="t">
-            <a:spAutoFit/>
-          </a:bodyPr>
-          <a:lstStyle/>
-          <a:p>
-            <a:pPr algn="l">
-              <a:lnSpc>
-                <a:spcPct val="116000"/>
-              </a:lnSpc>
-              <a:spcBef>
-                <a:spcPts val="0"/>
-              </a:spcBef>
-              <a:spcAft>
-                <a:spcPts val="0"/>
-              </a:spcAft>
-              <a:defRPr sz="2200" b="0">
-                <a:solidFill>
-                  <a:srgbClr val="182B37"/>
-                </a:solidFill>
-                <a:latin typeface="Microsoft YaHei"/>
-                <a:ea typeface="Microsoft YaHei"/>
-              </a:defRPr>
-            </a:pPr>
-            <a:r>
-              <a:t>一次生成就结束，</a:t>
-            </a:r>
-          </a:p>
-          <a:p>
-            <a:pPr algn="l">
-              <a:lnSpc>
-                <a:spcPct val="116000"/>
-              </a:lnSpc>
-              <a:spcBef>
-                <a:spcPts val="0"/>
-              </a:spcBef>
-              <a:spcAft>
-                <a:spcPts val="0"/>
-              </a:spcAft>
-              <a:defRPr sz="2200" b="0">
-                <a:solidFill>
-                  <a:srgbClr val="182B37"/>
-                </a:solidFill>
-                <a:latin typeface="Microsoft YaHei"/>
-                <a:ea typeface="Microsoft YaHei"/>
-              </a:defRPr>
-            </a:pPr>
-            <a:r>
-              <a:t>没有独立的影响清单，</a:t>
-            </a:r>
-          </a:p>
-          <a:p>
-            <a:pPr algn="l">
-              <a:lnSpc>
-                <a:spcPct val="116000"/>
-              </a:lnSpc>
-              <a:spcBef>
-                <a:spcPts val="0"/>
-              </a:spcBef>
-              <a:spcAft>
-                <a:spcPts val="0"/>
-              </a:spcAft>
-              <a:defRPr sz="2200" b="0">
-                <a:solidFill>
-                  <a:srgbClr val="182B37"/>
-                </a:solidFill>
-                <a:latin typeface="Microsoft YaHei"/>
-                <a:ea typeface="Microsoft YaHei"/>
-              </a:defRPr>
-            </a:pPr>
-            <a:r>
-              <a:t>漏改需要编剧自行排查。</a:t>
-            </a:r>
-          </a:p>
-        </p:txBody>
-      </p:sp>
-      <p:sp>
-        <p:nvSpPr>
-          <p:cNvPr id="19" name="Rounded Rectangle 18"/>
-          <p:cNvSpPr/>
-          <p:nvPr/>
-        </p:nvSpPr>
-        <p:spPr>
-          <a:xfrm>
-            <a:off x="658368" y="5687568"/>
-            <a:ext cx="10881360" cy="576072"/>
-          </a:xfrm>
-          <a:prstGeom prst="roundRect">
-            <a:avLst>
-              <a:gd name="adj" fmla="val 5000"/>
-            </a:avLst>
-          </a:prstGeom>
-          <a:solidFill>
-            <a:srgbClr val="E7F0EC"/>
-          </a:solidFill>
-          <a:ln>
-            <a:noFill/>
-          </a:ln>
-        </p:spPr>
-        <p:style>
-          <a:lnRef idx="1">
-            <a:schemeClr val="accent1"/>
-          </a:lnRef>
-          <a:fillRef idx="3">
-            <a:schemeClr val="accent1"/>
-          </a:fillRef>
-          <a:effectRef idx="2">
-            <a:schemeClr val="accent1"/>
-          </a:effectRef>
-          <a:fontRef idx="minor">
-            <a:schemeClr val="lt1"/>
-          </a:fontRef>
-        </p:style>
-        <p:txBody>
-          <a:bodyPr rtlCol="0" anchor="ctr"/>
-          <a:lstStyle/>
-          <a:p>
-            <a:pPr algn="ctr"/>
-          </a:p>
-        </p:txBody>
-      </p:sp>
-      <p:sp>
-        <p:nvSpPr>
-          <p:cNvPr id="20" name="TextBox 19"/>
-          <p:cNvSpPr txBox="1"/>
-          <p:nvPr/>
-        </p:nvSpPr>
-        <p:spPr>
-          <a:xfrm>
-            <a:off x="859536" y="5824728"/>
-            <a:ext cx="10479024" cy="347472"/>
-          </a:xfrm>
-          <a:prstGeom prst="rect">
-            <a:avLst/>
-          </a:prstGeom>
-          <a:noFill/>
-        </p:spPr>
-        <p:txBody>
-          <a:bodyPr wrap="square" lIns="0" rIns="0" tIns="0" bIns="0" anchor="t">
-            <a:spAutoFit/>
-          </a:bodyPr>
-          <a:lstStyle/>
-          <a:p>
-            <a:pPr algn="ctr">
-              <a:lnSpc>
-                <a:spcPct val="116000"/>
-              </a:lnSpc>
-              <a:spcBef>
-                <a:spcPts val="0"/>
-              </a:spcBef>
-              <a:spcAft>
-                <a:spcPts val="0"/>
-              </a:spcAft>
-              <a:defRPr sz="2000" b="1">
-                <a:solidFill>
-                  <a:srgbClr val="C64B3C"/>
-                </a:solidFill>
-                <a:latin typeface="Microsoft YaHei"/>
-                <a:ea typeface="Microsoft YaHei"/>
-              </a:defRPr>
-            </a:pPr>
-            <a:r>
-              <a:t>全文写出来了，核心有没有改、后文有没有跟上，仍然要靠人追问。</a:t>
-            </a:r>
-          </a:p>
-        </p:txBody>
-      </p:sp>
+              <a:t>07 / 13</a:t>
+            </a:r>
+          </a:p>
+        </p:txBody>
+      </p:sp>
+      <p:pic>
+        <p:nvPicPr>
+          <p:cNvPr id="7" name="Picture 6" descr="evidence_verification_repairs.png"/>
+          <p:cNvPicPr>
+            <a:picLocks noChangeAspect="1"/>
+          </p:cNvPicPr>
+          <p:nvPr/>
+        </p:nvPicPr>
+        <p:blipFill>
+          <a:blip r:embed="rId2"/>
+          <a:stretch>
+            <a:fillRect/>
+          </a:stretch>
+        </p:blipFill>
+        <p:spPr>
+          <a:xfrm>
+            <a:off x="0" y="0"/>
+            <a:ext cx="12191999" cy="6857999"/>
+          </a:xfrm>
+          <a:prstGeom prst="rect">
+            <a:avLst/>
+          </a:prstGeom>
+        </p:spPr>
+      </p:pic>
     </p:spTree>
   </p:cSld>
   <p:clrMapOvr>
@@ -16080,7 +12989,7 @@
               </a:defRPr>
             </a:pPr>
             <a:r>
-              <a:t>StoryBridge   ·   项目优势 · 方案有对象，改动有路径，问题能回修</a:t>
+              <a:t>StoryBridge   ·   历史证据 · 为什么需要可检查流程</a:t>
             </a:r>
           </a:p>
         </p:txBody>
@@ -16126,7 +13035,7 @@
               </a:defRPr>
             </a:pPr>
             <a:r>
-              <a:t>StoryBridge 把三类风险，变成可检查的交付项</a:t>
+              <a:t>早期测试暴露：改不全、改错、缺少依赖追踪</a:t>
             </a:r>
           </a:p>
         </p:txBody>
@@ -16172,7 +13081,7 @@
               </a:defRPr>
             </a:pPr>
             <a:r>
-              <a:t>StoryBridge · 短剧出海改编助手</a:t>
+              <a:t>核心机制未替换：后续测试反馈；数字错误：早期冻结输出；依赖追踪：流程对照</a:t>
             </a:r>
           </a:p>
         </p:txBody>
@@ -16218,159 +13127,21 @@
               </a:defRPr>
             </a:pPr>
             <a:r>
-              <a:t>08 / 12</a:t>
-            </a:r>
-          </a:p>
-        </p:txBody>
-      </p:sp>
-      <p:sp>
-        <p:nvSpPr>
-          <p:cNvPr id="7" name="TextBox 6"/>
-          <p:cNvSpPr txBox="1"/>
-          <p:nvPr/>
-        </p:nvSpPr>
-        <p:spPr>
-          <a:xfrm>
-            <a:off x="896112" y="1874519"/>
-            <a:ext cx="2560320" cy="347472"/>
-          </a:xfrm>
-          <a:prstGeom prst="rect">
-            <a:avLst/>
-          </a:prstGeom>
-          <a:noFill/>
-        </p:spPr>
-        <p:txBody>
-          <a:bodyPr wrap="square" lIns="0" rIns="0" tIns="0" bIns="0" anchor="t">
-            <a:spAutoFit/>
-          </a:bodyPr>
-          <a:lstStyle/>
-          <a:p>
-            <a:pPr algn="l">
-              <a:lnSpc>
-                <a:spcPct val="116000"/>
-              </a:lnSpc>
-              <a:spcBef>
-                <a:spcPts val="0"/>
-              </a:spcBef>
-              <a:spcAft>
-                <a:spcPts val="0"/>
-              </a:spcAft>
-              <a:defRPr sz="1700" b="1">
-                <a:solidFill>
-                  <a:srgbClr val="68757B"/>
-                </a:solidFill>
-                <a:latin typeface="Microsoft YaHei"/>
-                <a:ea typeface="Microsoft YaHei"/>
-              </a:defRPr>
-            </a:pPr>
-            <a:r>
-              <a:t>编剧关心什么</a:t>
-            </a:r>
-          </a:p>
-        </p:txBody>
-      </p:sp>
-      <p:sp>
-        <p:nvSpPr>
-          <p:cNvPr id="8" name="TextBox 7"/>
-          <p:cNvSpPr txBox="1"/>
-          <p:nvPr/>
-        </p:nvSpPr>
-        <p:spPr>
-          <a:xfrm>
-            <a:off x="3538728" y="1874519"/>
-            <a:ext cx="3712463" cy="347472"/>
-          </a:xfrm>
-          <a:prstGeom prst="rect">
-            <a:avLst/>
-          </a:prstGeom>
-          <a:noFill/>
-        </p:spPr>
-        <p:txBody>
-          <a:bodyPr wrap="square" lIns="0" rIns="0" tIns="0" bIns="0" anchor="t">
-            <a:spAutoFit/>
-          </a:bodyPr>
-          <a:lstStyle/>
-          <a:p>
-            <a:pPr algn="l">
-              <a:lnSpc>
-                <a:spcPct val="116000"/>
-              </a:lnSpc>
-              <a:spcBef>
-                <a:spcPts val="0"/>
-              </a:spcBef>
-              <a:spcAft>
-                <a:spcPts val="0"/>
-              </a:spcAft>
-              <a:defRPr sz="1700" b="1">
-                <a:solidFill>
-                  <a:srgbClr val="267868"/>
-                </a:solidFill>
-                <a:latin typeface="Microsoft YaHei"/>
-                <a:ea typeface="Microsoft YaHei"/>
-              </a:defRPr>
-            </a:pPr>
-            <a:r>
-              <a:t>StoryBridge 提供什么</a:t>
-            </a:r>
-          </a:p>
-        </p:txBody>
-      </p:sp>
-      <p:sp>
-        <p:nvSpPr>
-          <p:cNvPr id="9" name="TextBox 8"/>
-          <p:cNvSpPr txBox="1"/>
-          <p:nvPr/>
-        </p:nvSpPr>
-        <p:spPr>
-          <a:xfrm>
-            <a:off x="7818120" y="1874519"/>
-            <a:ext cx="3355848" cy="347472"/>
-          </a:xfrm>
-          <a:prstGeom prst="rect">
-            <a:avLst/>
-          </a:prstGeom>
-          <a:noFill/>
-        </p:spPr>
-        <p:txBody>
-          <a:bodyPr wrap="square" lIns="0" rIns="0" tIns="0" bIns="0" anchor="t">
-            <a:spAutoFit/>
-          </a:bodyPr>
-          <a:lstStyle/>
-          <a:p>
-            <a:pPr algn="l">
-              <a:lnSpc>
-                <a:spcPct val="116000"/>
-              </a:lnSpc>
-              <a:spcBef>
-                <a:spcPts val="0"/>
-              </a:spcBef>
-              <a:spcAft>
-                <a:spcPts val="0"/>
-              </a:spcAft>
-              <a:defRPr sz="1700" b="1">
-                <a:solidFill>
-                  <a:srgbClr val="68757B"/>
-                </a:solidFill>
-                <a:latin typeface="Microsoft YaHei"/>
-                <a:ea typeface="Microsoft YaHei"/>
-              </a:defRPr>
-            </a:pPr>
-            <a:r>
-              <a:t>本案例的实际产物</a:t>
-            </a:r>
-          </a:p>
-        </p:txBody>
-      </p:sp>
-      <p:sp>
-        <p:nvSpPr>
-          <p:cNvPr id="10" name="Rounded Rectangle 9"/>
+              <a:t>08 / 13</a:t>
+            </a:r>
+          </a:p>
+        </p:txBody>
+      </p:sp>
+      <p:sp>
+        <p:nvSpPr>
+          <p:cNvPr id="7" name="Rounded Rectangle 6"/>
           <p:cNvSpPr/>
           <p:nvPr/>
         </p:nvSpPr>
         <p:spPr>
           <a:xfrm>
-            <a:off x="704088" y="2496312"/>
-            <a:ext cx="10799064" cy="804672"/>
+            <a:off x="676656" y="1901952"/>
+            <a:ext cx="3447288" cy="3529584"/>
           </a:xfrm>
           <a:prstGeom prst="roundRect">
             <a:avLst>
@@ -16410,14 +13181,14 @@
       </p:sp>
       <p:sp>
         <p:nvSpPr>
-          <p:cNvPr id="11" name="TextBox 10"/>
+          <p:cNvPr id="8" name="TextBox 7"/>
           <p:cNvSpPr txBox="1"/>
           <p:nvPr/>
         </p:nvSpPr>
         <p:spPr>
           <a:xfrm>
-            <a:off x="896112" y="2715768"/>
-            <a:ext cx="2578608" cy="393192"/>
+            <a:off x="896112" y="2103120"/>
+            <a:ext cx="3008376" cy="310896"/>
           </a:xfrm>
           <a:prstGeom prst="rect">
             <a:avLst/>
@@ -16440,30 +13211,30 @@
               <a:spcAft>
                 <a:spcPts val="0"/>
               </a:spcAft>
-              <a:defRPr sz="2000" b="1">
-                <a:solidFill>
-                  <a:srgbClr val="182B37"/>
-                </a:solidFill>
-                <a:latin typeface="Microsoft YaHei"/>
-                <a:ea typeface="Microsoft YaHei"/>
-              </a:defRPr>
-            </a:pPr>
-            <a:r>
-              <a:t>核心改了什么？</a:t>
-            </a:r>
-          </a:p>
-        </p:txBody>
-      </p:sp>
-      <p:sp>
-        <p:nvSpPr>
-          <p:cNvPr id="12" name="TextBox 11"/>
+              <a:defRPr sz="1500" b="1">
+                <a:solidFill>
+                  <a:srgbClr val="C64B3C"/>
+                </a:solidFill>
+                <a:latin typeface="Microsoft YaHei"/>
+                <a:ea typeface="Microsoft YaHei"/>
+              </a:defRPr>
+            </a:pPr>
+            <a:r>
+              <a:t>改不全 · 后续测试反馈</a:t>
+            </a:r>
+          </a:p>
+        </p:txBody>
+      </p:sp>
+      <p:sp>
+        <p:nvSpPr>
+          <p:cNvPr id="9" name="TextBox 8"/>
           <p:cNvSpPr txBox="1"/>
           <p:nvPr/>
         </p:nvSpPr>
         <p:spPr>
           <a:xfrm>
-            <a:off x="3538728" y="2715768"/>
-            <a:ext cx="4050791" cy="393192"/>
+            <a:off x="896112" y="2679192"/>
+            <a:ext cx="3008376" cy="841248"/>
           </a:xfrm>
           <a:prstGeom prst="rect">
             <a:avLst/>
@@ -16486,30 +13257,30 @@
               <a:spcAft>
                 <a:spcPts val="0"/>
               </a:spcAft>
-              <a:defRPr sz="2000" b="1">
-                <a:solidFill>
-                  <a:srgbClr val="267868"/>
-                </a:solidFill>
-                <a:latin typeface="Microsoft YaHei"/>
-                <a:ea typeface="Microsoft YaHei"/>
-              </a:defRPr>
-            </a:pPr>
-            <a:r>
-              <a:t>文化节点＋选定改编方案</a:t>
-            </a:r>
-          </a:p>
-        </p:txBody>
-      </p:sp>
-      <p:sp>
-        <p:nvSpPr>
-          <p:cNvPr id="13" name="TextBox 12"/>
+              <a:defRPr sz="2700" b="1">
+                <a:solidFill>
+                  <a:srgbClr val="182B37"/>
+                </a:solidFill>
+                <a:latin typeface="Microsoft YaHei"/>
+                <a:ea typeface="Microsoft YaHei"/>
+              </a:defRPr>
+            </a:pPr>
+            <a:r>
+              <a:t>核心系统没改掉</a:t>
+            </a:r>
+          </a:p>
+        </p:txBody>
+      </p:sp>
+      <p:sp>
+        <p:nvSpPr>
+          <p:cNvPr id="10" name="TextBox 9"/>
           <p:cNvSpPr txBox="1"/>
           <p:nvPr/>
         </p:nvSpPr>
         <p:spPr>
           <a:xfrm>
-            <a:off x="7818120" y="2615184"/>
-            <a:ext cx="3429000" cy="603504"/>
+            <a:off x="896112" y="3685032"/>
+            <a:ext cx="3008376" cy="1655064"/>
           </a:xfrm>
           <a:prstGeom prst="rect">
             <a:avLst/>
@@ -16532,7 +13303,7 @@
               <a:spcAft>
                 <a:spcPts val="0"/>
               </a:spcAft>
-              <a:defRPr sz="1800" b="0">
+              <a:defRPr sz="2200" b="0">
                 <a:solidFill>
                   <a:srgbClr val="182B37"/>
                 </a:solidFill>
@@ -16541,21 +13312,21 @@
               </a:defRPr>
             </a:pPr>
             <a:r>
-              <a:t>高考 → 学术认证</a:t>
-            </a:r>
-          </a:p>
-          <a:p>
-            <a:pPr algn="l">
-              <a:lnSpc>
-                <a:spcPct val="116000"/>
-              </a:lnSpc>
-              <a:spcBef>
-                <a:spcPts val="0"/>
-              </a:spcBef>
-              <a:spcAft>
-                <a:spcPts val="0"/>
-              </a:spcAft>
-              <a:defRPr sz="1800" b="0">
+              <a:t>要求替换换分系统，</a:t>
+            </a:r>
+          </a:p>
+          <a:p>
+            <a:pPr algn="l">
+              <a:lnSpc>
+                <a:spcPct val="116000"/>
+              </a:lnSpc>
+              <a:spcBef>
+                <a:spcPts val="0"/>
+              </a:spcBef>
+              <a:spcAft>
+                <a:spcPts val="0"/>
+              </a:spcAft>
+              <a:defRPr sz="2200" b="0">
                 <a:solidFill>
                   <a:srgbClr val="182B37"/>
                 </a:solidFill>
@@ -16564,21 +13335,44 @@
               </a:defRPr>
             </a:pPr>
             <a:r>
-              <a:t>换分 → 数据模块</a:t>
-            </a:r>
-          </a:p>
-        </p:txBody>
-      </p:sp>
-      <p:sp>
-        <p:nvSpPr>
-          <p:cNvPr id="14" name="Rounded Rectangle 13"/>
+              <a:t>输出仍保留旧机制。</a:t>
+            </a:r>
+          </a:p>
+          <a:p>
+            <a:pPr algn="l">
+              <a:lnSpc>
+                <a:spcPct val="116000"/>
+              </a:lnSpc>
+              <a:spcBef>
+                <a:spcPts val="0"/>
+              </a:spcBef>
+              <a:spcAft>
+                <a:spcPts val="0"/>
+              </a:spcAft>
+              <a:defRPr sz="2200" b="0">
+                <a:solidFill>
+                  <a:srgbClr val="182B37"/>
+                </a:solidFill>
+                <a:latin typeface="Microsoft YaHei"/>
+                <a:ea typeface="Microsoft YaHei"/>
+              </a:defRPr>
+            </a:pPr>
+            <a:r>
+              <a:t>核心要求没落实。</a:t>
+            </a:r>
+          </a:p>
+        </p:txBody>
+      </p:sp>
+      <p:sp>
+        <p:nvSpPr>
+          <p:cNvPr id="11" name="Rounded Rectangle 10"/>
           <p:cNvSpPr/>
           <p:nvPr/>
         </p:nvSpPr>
         <p:spPr>
           <a:xfrm>
-            <a:off x="704088" y="3447288"/>
-            <a:ext cx="10799064" cy="804672"/>
+            <a:off x="4379976" y="1901952"/>
+            <a:ext cx="3447288" cy="3529584"/>
           </a:xfrm>
           <a:prstGeom prst="roundRect">
             <a:avLst>
@@ -16618,14 +13412,14 @@
       </p:sp>
       <p:sp>
         <p:nvSpPr>
-          <p:cNvPr id="15" name="TextBox 14"/>
+          <p:cNvPr id="12" name="TextBox 11"/>
           <p:cNvSpPr txBox="1"/>
           <p:nvPr/>
         </p:nvSpPr>
         <p:spPr>
           <a:xfrm>
-            <a:off x="896112" y="3666744"/>
-            <a:ext cx="2578608" cy="393192"/>
+            <a:off x="4599432" y="2103120"/>
+            <a:ext cx="3008376" cy="310896"/>
           </a:xfrm>
           <a:prstGeom prst="rect">
             <a:avLst/>
@@ -16648,30 +13442,30 @@
               <a:spcAft>
                 <a:spcPts val="0"/>
               </a:spcAft>
-              <a:defRPr sz="2000" b="1">
-                <a:solidFill>
-                  <a:srgbClr val="182B37"/>
-                </a:solidFill>
-                <a:latin typeface="Microsoft YaHei"/>
-                <a:ea typeface="Microsoft YaHei"/>
-              </a:defRPr>
-            </a:pPr>
-            <a:r>
-              <a:t>哪些后文要跟着改？</a:t>
-            </a:r>
-          </a:p>
-        </p:txBody>
-      </p:sp>
-      <p:sp>
-        <p:nvSpPr>
-          <p:cNvPr id="16" name="TextBox 15"/>
+              <a:defRPr sz="1500" b="1">
+                <a:solidFill>
+                  <a:srgbClr val="C64B3C"/>
+                </a:solidFill>
+                <a:latin typeface="Microsoft YaHei"/>
+                <a:ea typeface="Microsoft YaHei"/>
+              </a:defRPr>
+            </a:pPr>
+            <a:r>
+              <a:t>改错 · 早期冻结输出</a:t>
+            </a:r>
+          </a:p>
+        </p:txBody>
+      </p:sp>
+      <p:sp>
+        <p:nvSpPr>
+          <p:cNvPr id="13" name="TextBox 12"/>
           <p:cNvSpPr txBox="1"/>
           <p:nvPr/>
         </p:nvSpPr>
         <p:spPr>
           <a:xfrm>
-            <a:off x="3538728" y="3666744"/>
-            <a:ext cx="4050791" cy="393192"/>
+            <a:off x="4599432" y="2679192"/>
+            <a:ext cx="3008376" cy="841248"/>
           </a:xfrm>
           <a:prstGeom prst="rect">
             <a:avLst/>
@@ -16694,30 +13488,30 @@
               <a:spcAft>
                 <a:spcPts val="0"/>
               </a:spcAft>
-              <a:defRPr sz="2000" b="1">
-                <a:solidFill>
-                  <a:srgbClr val="267868"/>
-                </a:solidFill>
-                <a:latin typeface="Microsoft YaHei"/>
-                <a:ea typeface="Microsoft YaHei"/>
-              </a:defRPr>
-            </a:pPr>
-            <a:r>
-              <a:t>依赖图＋场景清单＋原因路径</a:t>
-            </a:r>
-          </a:p>
-        </p:txBody>
-      </p:sp>
-      <p:sp>
-        <p:nvSpPr>
-          <p:cNvPr id="17" name="TextBox 16"/>
+              <a:defRPr sz="2700" b="1">
+                <a:solidFill>
+                  <a:srgbClr val="182B37"/>
+                </a:solidFill>
+                <a:latin typeface="Microsoft YaHei"/>
+                <a:ea typeface="Microsoft YaHei"/>
+              </a:defRPr>
+            </a:pPr>
+            <a:r>
+              <a:t>人物结果写串了</a:t>
+            </a:r>
+          </a:p>
+        </p:txBody>
+      </p:sp>
+      <p:sp>
+        <p:nvSpPr>
+          <p:cNvPr id="14" name="TextBox 13"/>
           <p:cNvSpPr txBox="1"/>
           <p:nvPr/>
         </p:nvSpPr>
         <p:spPr>
           <a:xfrm>
-            <a:off x="7818120" y="3566160"/>
-            <a:ext cx="3429000" cy="603504"/>
+            <a:off x="4599432" y="3685032"/>
+            <a:ext cx="3008376" cy="1655064"/>
           </a:xfrm>
           <a:prstGeom prst="rect">
             <a:avLst/>
@@ -16740,7 +13534,7 @@
               <a:spcAft>
                 <a:spcPts val="0"/>
               </a:spcAft>
-              <a:defRPr sz="1800" b="0">
+              <a:defRPr sz="2200" b="0">
                 <a:solidFill>
                   <a:srgbClr val="182B37"/>
                 </a:solidFill>
@@ -16749,21 +13543,21 @@
               </a:defRPr>
             </a:pPr>
             <a:r>
-              <a:t>高考节点 → 第 1—6 场</a:t>
-            </a:r>
-          </a:p>
-          <a:p>
-            <a:pPr algn="l">
-              <a:lnSpc>
-                <a:spcPct val="116000"/>
-              </a:lnSpc>
-              <a:spcBef>
-                <a:spcPts val="0"/>
-              </a:spcBef>
-              <a:spcAft>
-                <a:spcPts val="0"/>
-              </a:spcAft>
-              <a:defRPr sz="1800" b="0">
+              <a:t>沈曼换后应为 330，</a:t>
+            </a:r>
+          </a:p>
+          <a:p>
+            <a:pPr algn="l">
+              <a:lnSpc>
+                <a:spcPct val="116000"/>
+              </a:lnSpc>
+              <a:spcBef>
+                <a:spcPts val="0"/>
+              </a:spcBef>
+              <a:spcAft>
+                <a:spcPts val="0"/>
+              </a:spcAft>
+              <a:defRPr sz="2200" b="0">
                 <a:solidFill>
                   <a:srgbClr val="182B37"/>
                 </a:solidFill>
@@ -16772,21 +13566,44 @@
               </a:defRPr>
             </a:pPr>
             <a:r>
-              <a:t>每场附原文依据</a:t>
-            </a:r>
-          </a:p>
-        </p:txBody>
-      </p:sp>
-      <p:sp>
-        <p:nvSpPr>
-          <p:cNvPr id="18" name="Rounded Rectangle 17"/>
+              <a:t>庭审却写成 487。</a:t>
+            </a:r>
+          </a:p>
+          <a:p>
+            <a:pPr algn="l">
+              <a:lnSpc>
+                <a:spcPct val="116000"/>
+              </a:lnSpc>
+              <a:spcBef>
+                <a:spcPts val="0"/>
+              </a:spcBef>
+              <a:spcAft>
+                <a:spcPts val="0"/>
+              </a:spcAft>
+              <a:defRPr sz="2200" b="0">
+                <a:solidFill>
+                  <a:srgbClr val="182B37"/>
+                </a:solidFill>
+                <a:latin typeface="Microsoft YaHei"/>
+                <a:ea typeface="Microsoft YaHei"/>
+              </a:defRPr>
+            </a:pPr>
+            <a:r>
+              <a:t>台词顺，事实对不上。</a:t>
+            </a:r>
+          </a:p>
+        </p:txBody>
+      </p:sp>
+      <p:sp>
+        <p:nvSpPr>
+          <p:cNvPr id="15" name="Rounded Rectangle 14"/>
           <p:cNvSpPr/>
           <p:nvPr/>
         </p:nvSpPr>
         <p:spPr>
           <a:xfrm>
-            <a:off x="704088" y="4398264"/>
-            <a:ext cx="10799064" cy="804672"/>
+            <a:off x="8083296" y="1901952"/>
+            <a:ext cx="3447288" cy="3529584"/>
           </a:xfrm>
           <a:prstGeom prst="roundRect">
             <a:avLst>
@@ -16826,14 +13643,14 @@
       </p:sp>
       <p:sp>
         <p:nvSpPr>
-          <p:cNvPr id="19" name="TextBox 18"/>
+          <p:cNvPr id="16" name="TextBox 15"/>
           <p:cNvSpPr txBox="1"/>
           <p:nvPr/>
         </p:nvSpPr>
         <p:spPr>
           <a:xfrm>
-            <a:off x="896112" y="4617720"/>
-            <a:ext cx="2578608" cy="393192"/>
+            <a:off x="8302752" y="2103120"/>
+            <a:ext cx="3008376" cy="310896"/>
           </a:xfrm>
           <a:prstGeom prst="rect">
             <a:avLst/>
@@ -16856,30 +13673,30 @@
               <a:spcAft>
                 <a:spcPts val="0"/>
               </a:spcAft>
-              <a:defRPr sz="2000" b="1">
-                <a:solidFill>
-                  <a:srgbClr val="182B37"/>
-                </a:solidFill>
-                <a:latin typeface="Microsoft YaHei"/>
-                <a:ea typeface="Microsoft YaHei"/>
-              </a:defRPr>
-            </a:pPr>
-            <a:r>
-              <a:t>发现问题怎么继续？</a:t>
-            </a:r>
-          </a:p>
-        </p:txBody>
-      </p:sp>
-      <p:sp>
-        <p:nvSpPr>
-          <p:cNvPr id="20" name="TextBox 19"/>
+              <a:defRPr sz="1500" b="1">
+                <a:solidFill>
+                  <a:srgbClr val="B79456"/>
+                </a:solidFill>
+                <a:latin typeface="Microsoft YaHei"/>
+                <a:ea typeface="Microsoft YaHei"/>
+              </a:defRPr>
+            </a:pPr>
+            <a:r>
+              <a:t>漏依赖风险 · 流程短板</a:t>
+            </a:r>
+          </a:p>
+        </p:txBody>
+      </p:sp>
+      <p:sp>
+        <p:nvSpPr>
+          <p:cNvPr id="17" name="TextBox 16"/>
           <p:cNvSpPr txBox="1"/>
           <p:nvPr/>
         </p:nvSpPr>
         <p:spPr>
           <a:xfrm>
-            <a:off x="3538728" y="4617720"/>
-            <a:ext cx="4050791" cy="393192"/>
+            <a:off x="8302752" y="2679192"/>
+            <a:ext cx="3008376" cy="841248"/>
           </a:xfrm>
           <a:prstGeom prst="rect">
             <a:avLst/>
@@ -16902,30 +13719,30 @@
               <a:spcAft>
                 <a:spcPts val="0"/>
               </a:spcAft>
-              <a:defRPr sz="2000" b="1">
-                <a:solidFill>
-                  <a:srgbClr val="267868"/>
-                </a:solidFill>
-                <a:latin typeface="Microsoft YaHei"/>
-                <a:ea typeface="Microsoft YaHei"/>
-              </a:defRPr>
-            </a:pPr>
-            <a:r>
-              <a:t>检查报告＋按场修复记录</a:t>
-            </a:r>
-          </a:p>
-        </p:txBody>
-      </p:sp>
-      <p:sp>
-        <p:nvSpPr>
-          <p:cNvPr id="21" name="TextBox 20"/>
+              <a:defRPr sz="2700" b="1">
+                <a:solidFill>
+                  <a:srgbClr val="182B37"/>
+                </a:solidFill>
+                <a:latin typeface="Microsoft YaHei"/>
+                <a:ea typeface="Microsoft YaHei"/>
+              </a:defRPr>
+            </a:pPr>
+            <a:r>
+              <a:t>连带改动缺少追踪</a:t>
+            </a:r>
+          </a:p>
+        </p:txBody>
+      </p:sp>
+      <p:sp>
+        <p:nvSpPr>
+          <p:cNvPr id="18" name="TextBox 17"/>
           <p:cNvSpPr txBox="1"/>
           <p:nvPr/>
         </p:nvSpPr>
         <p:spPr>
           <a:xfrm>
-            <a:off x="7818120" y="4517136"/>
-            <a:ext cx="3429000" cy="603504"/>
+            <a:off x="8302752" y="3685032"/>
+            <a:ext cx="3008376" cy="1655064"/>
           </a:xfrm>
           <a:prstGeom prst="rect">
             <a:avLst/>
@@ -16948,7 +13765,7 @@
               <a:spcAft>
                 <a:spcPts val="0"/>
               </a:spcAft>
-              <a:defRPr sz="1800" b="0">
+              <a:defRPr sz="2200" b="0">
                 <a:solidFill>
                   <a:srgbClr val="182B37"/>
                 </a:solidFill>
@@ -16957,21 +13774,21 @@
               </a:defRPr>
             </a:pPr>
             <a:r>
-              <a:t>本例有 2 轮修复记录</a:t>
-            </a:r>
-          </a:p>
-          <a:p>
-            <a:pPr algn="l">
-              <a:lnSpc>
-                <a:spcPct val="116000"/>
-              </a:lnSpc>
-              <a:spcBef>
-                <a:spcPts val="0"/>
-              </a:spcBef>
-              <a:spcAft>
-                <a:spcPts val="0"/>
-              </a:spcAft>
-              <a:defRPr sz="1800" b="0">
+              <a:t>一次生成就结束，</a:t>
+            </a:r>
+          </a:p>
+          <a:p>
+            <a:pPr algn="l">
+              <a:lnSpc>
+                <a:spcPct val="116000"/>
+              </a:lnSpc>
+              <a:spcBef>
+                <a:spcPts val="0"/>
+              </a:spcBef>
+              <a:spcAft>
+                <a:spcPts val="0"/>
+              </a:spcAft>
+              <a:defRPr sz="2200" b="0">
                 <a:solidFill>
                   <a:srgbClr val="182B37"/>
                 </a:solidFill>
@@ -16980,14 +13797,37 @@
               </a:defRPr>
             </a:pPr>
             <a:r>
-              <a:t>包含庭审场景</a:t>
-            </a:r>
-          </a:p>
-        </p:txBody>
-      </p:sp>
-      <p:sp>
-        <p:nvSpPr>
-          <p:cNvPr id="22" name="Rounded Rectangle 21"/>
+              <a:t>没有独立的影响清单，</a:t>
+            </a:r>
+          </a:p>
+          <a:p>
+            <a:pPr algn="l">
+              <a:lnSpc>
+                <a:spcPct val="116000"/>
+              </a:lnSpc>
+              <a:spcBef>
+                <a:spcPts val="0"/>
+              </a:spcBef>
+              <a:spcAft>
+                <a:spcPts val="0"/>
+              </a:spcAft>
+              <a:defRPr sz="2200" b="0">
+                <a:solidFill>
+                  <a:srgbClr val="182B37"/>
+                </a:solidFill>
+                <a:latin typeface="Microsoft YaHei"/>
+                <a:ea typeface="Microsoft YaHei"/>
+              </a:defRPr>
+            </a:pPr>
+            <a:r>
+              <a:t>漏改需要编剧自行排查。</a:t>
+            </a:r>
+          </a:p>
+        </p:txBody>
+      </p:sp>
+      <p:sp>
+        <p:nvSpPr>
+          <p:cNvPr id="19" name="Rounded Rectangle 18"/>
           <p:cNvSpPr/>
           <p:nvPr/>
         </p:nvSpPr>
@@ -17032,7 +13872,7 @@
       </p:sp>
       <p:sp>
         <p:nvSpPr>
-          <p:cNvPr id="23" name="TextBox 22"/>
+          <p:cNvPr id="20" name="TextBox 19"/>
           <p:cNvSpPr txBox="1"/>
           <p:nvPr/>
         </p:nvSpPr>
@@ -17064,14 +13904,14 @@
               </a:spcAft>
               <a:defRPr sz="2000" b="1">
                 <a:solidFill>
-                  <a:srgbClr val="267868"/>
-                </a:solidFill>
-                <a:latin typeface="Microsoft YaHei"/>
-                <a:ea typeface="Microsoft YaHei"/>
-              </a:defRPr>
-            </a:pPr>
-            <a:r>
-              <a:t>Baseline 交出成稿；StoryBridge 还交出改编依据、影响路径和修复记录。</a:t>
+                  <a:srgbClr val="C64B3C"/>
+                </a:solidFill>
+                <a:latin typeface="Microsoft YaHei"/>
+                <a:ea typeface="Microsoft YaHei"/>
+              </a:defRPr>
+            </a:pPr>
+            <a:r>
+              <a:t>全文写出来了，核心有没有改、后文有没有跟上，仍然要靠人追问。</a:t>
             </a:r>
           </a:p>
         </p:txBody>
@@ -17178,7 +14018,7 @@
               </a:defRPr>
             </a:pPr>
             <a:r>
-              <a:t>StoryBridge   ·   方法差异 · 本次对照采用同一模型</a:t>
+              <a:t>StoryBridge   ·   项目优势 · 方案有对象，改动有路径，问题能回修</a:t>
             </a:r>
           </a:p>
         </p:txBody>
@@ -17224,7 +14064,7 @@
               </a:defRPr>
             </a:pPr>
             <a:r>
-              <a:t>Baseline 写完就交；我们把审稿接进流程</a:t>
+              <a:t>StoryBridge 把三类风险，变成可检查的交付项</a:t>
             </a:r>
           </a:p>
         </p:txBody>
@@ -17316,7 +14156,7 @@
               </a:defRPr>
             </a:pPr>
             <a:r>
-              <a:t>09 / 12</a:t>
+              <a:t>09 / 13</a:t>
             </a:r>
           </a:p>
         </p:txBody>
@@ -17329,8 +14169,8 @@
         </p:nvSpPr>
         <p:spPr>
           <a:xfrm>
-            <a:off x="740664" y="1773936"/>
-            <a:ext cx="10698480" cy="502920"/>
+            <a:off x="896112" y="1874519"/>
+            <a:ext cx="2560320" cy="347472"/>
           </a:xfrm>
           <a:prstGeom prst="rect">
             <a:avLst/>
@@ -17353,30 +14193,122 @@
               <a:spcAft>
                 <a:spcPts val="0"/>
               </a:spcAft>
-              <a:defRPr sz="2300" b="0">
-                <a:solidFill>
-                  <a:srgbClr val="182B37"/>
-                </a:solidFill>
-                <a:latin typeface="Microsoft YaHei"/>
-                <a:ea typeface="Microsoft YaHei"/>
-              </a:defRPr>
-            </a:pPr>
-            <a:r>
-              <a:t>Baseline = 同一模型拿完整材料，一次生成全文。</a:t>
-            </a:r>
-          </a:p>
-        </p:txBody>
-      </p:sp>
-      <p:sp>
-        <p:nvSpPr>
-          <p:cNvPr id="8" name="Rounded Rectangle 7"/>
+              <a:defRPr sz="1700" b="1">
+                <a:solidFill>
+                  <a:srgbClr val="68757B"/>
+                </a:solidFill>
+                <a:latin typeface="Microsoft YaHei"/>
+                <a:ea typeface="Microsoft YaHei"/>
+              </a:defRPr>
+            </a:pPr>
+            <a:r>
+              <a:t>编剧关心什么</a:t>
+            </a:r>
+          </a:p>
+        </p:txBody>
+      </p:sp>
+      <p:sp>
+        <p:nvSpPr>
+          <p:cNvPr id="8" name="TextBox 7"/>
+          <p:cNvSpPr txBox="1"/>
+          <p:nvPr/>
+        </p:nvSpPr>
+        <p:spPr>
+          <a:xfrm>
+            <a:off x="3538728" y="1874519"/>
+            <a:ext cx="3712463" cy="347472"/>
+          </a:xfrm>
+          <a:prstGeom prst="rect">
+            <a:avLst/>
+          </a:prstGeom>
+          <a:noFill/>
+        </p:spPr>
+        <p:txBody>
+          <a:bodyPr wrap="square" lIns="0" rIns="0" tIns="0" bIns="0" anchor="t">
+            <a:spAutoFit/>
+          </a:bodyPr>
+          <a:lstStyle/>
+          <a:p>
+            <a:pPr algn="l">
+              <a:lnSpc>
+                <a:spcPct val="116000"/>
+              </a:lnSpc>
+              <a:spcBef>
+                <a:spcPts val="0"/>
+              </a:spcBef>
+              <a:spcAft>
+                <a:spcPts val="0"/>
+              </a:spcAft>
+              <a:defRPr sz="1700" b="1">
+                <a:solidFill>
+                  <a:srgbClr val="267868"/>
+                </a:solidFill>
+                <a:latin typeface="Microsoft YaHei"/>
+                <a:ea typeface="Microsoft YaHei"/>
+              </a:defRPr>
+            </a:pPr>
+            <a:r>
+              <a:t>StoryBridge 提供什么</a:t>
+            </a:r>
+          </a:p>
+        </p:txBody>
+      </p:sp>
+      <p:sp>
+        <p:nvSpPr>
+          <p:cNvPr id="9" name="TextBox 8"/>
+          <p:cNvSpPr txBox="1"/>
+          <p:nvPr/>
+        </p:nvSpPr>
+        <p:spPr>
+          <a:xfrm>
+            <a:off x="7818120" y="1874519"/>
+            <a:ext cx="3355848" cy="347472"/>
+          </a:xfrm>
+          <a:prstGeom prst="rect">
+            <a:avLst/>
+          </a:prstGeom>
+          <a:noFill/>
+        </p:spPr>
+        <p:txBody>
+          <a:bodyPr wrap="square" lIns="0" rIns="0" tIns="0" bIns="0" anchor="t">
+            <a:spAutoFit/>
+          </a:bodyPr>
+          <a:lstStyle/>
+          <a:p>
+            <a:pPr algn="l">
+              <a:lnSpc>
+                <a:spcPct val="116000"/>
+              </a:lnSpc>
+              <a:spcBef>
+                <a:spcPts val="0"/>
+              </a:spcBef>
+              <a:spcAft>
+                <a:spcPts val="0"/>
+              </a:spcAft>
+              <a:defRPr sz="1700" b="1">
+                <a:solidFill>
+                  <a:srgbClr val="68757B"/>
+                </a:solidFill>
+                <a:latin typeface="Microsoft YaHei"/>
+                <a:ea typeface="Microsoft YaHei"/>
+              </a:defRPr>
+            </a:pPr>
+            <a:r>
+              <a:t>本案例的实际产物</a:t>
+            </a:r>
+          </a:p>
+        </p:txBody>
+      </p:sp>
+      <p:sp>
+        <p:nvSpPr>
+          <p:cNvPr id="10" name="Rounded Rectangle 9"/>
           <p:cNvSpPr/>
           <p:nvPr/>
         </p:nvSpPr>
         <p:spPr>
           <a:xfrm>
-            <a:off x="722376" y="2523744"/>
-            <a:ext cx="10744200" cy="1005840"/>
+            <a:off x="704088" y="2496312"/>
+            <a:ext cx="10799064" cy="804672"/>
           </a:xfrm>
           <a:prstGeom prst="roundRect">
             <a:avLst>
@@ -17384,10 +14316,12 @@
             </a:avLst>
           </a:prstGeom>
           <a:solidFill>
-            <a:srgbClr val="F6E7E3"/>
+            <a:srgbClr val="FFFFFF"/>
           </a:solidFill>
-          <a:ln>
-            <a:noFill/>
+          <a:ln w="8890">
+            <a:solidFill>
+              <a:srgbClr val="DEDACF"/>
+            </a:solidFill>
           </a:ln>
         </p:spPr>
         <p:style>
@@ -17414,14 +14348,14 @@
       </p:sp>
       <p:sp>
         <p:nvSpPr>
-          <p:cNvPr id="9" name="TextBox 8"/>
+          <p:cNvPr id="11" name="TextBox 10"/>
           <p:cNvSpPr txBox="1"/>
           <p:nvPr/>
         </p:nvSpPr>
         <p:spPr>
           <a:xfrm>
-            <a:off x="941832" y="2816352"/>
-            <a:ext cx="1901952" cy="393192"/>
+            <a:off x="896112" y="2715768"/>
+            <a:ext cx="2578608" cy="393192"/>
           </a:xfrm>
           <a:prstGeom prst="rect">
             <a:avLst/>
@@ -17444,30 +14378,30 @@
               <a:spcAft>
                 <a:spcPts val="0"/>
               </a:spcAft>
-              <a:defRPr sz="2400" b="1">
-                <a:solidFill>
-                  <a:srgbClr val="C64B3C"/>
-                </a:solidFill>
-                <a:latin typeface="Microsoft YaHei"/>
-                <a:ea typeface="Microsoft YaHei"/>
-              </a:defRPr>
-            </a:pPr>
-            <a:r>
-              <a:t>Baseline</a:t>
-            </a:r>
-          </a:p>
-        </p:txBody>
-      </p:sp>
-      <p:sp>
-        <p:nvSpPr>
-          <p:cNvPr id="10" name="TextBox 9"/>
+              <a:defRPr sz="2000" b="1">
+                <a:solidFill>
+                  <a:srgbClr val="182B37"/>
+                </a:solidFill>
+                <a:latin typeface="Microsoft YaHei"/>
+                <a:ea typeface="Microsoft YaHei"/>
+              </a:defRPr>
+            </a:pPr>
+            <a:r>
+              <a:t>核心改了什么？</a:t>
+            </a:r>
+          </a:p>
+        </p:txBody>
+      </p:sp>
+      <p:sp>
+        <p:nvSpPr>
+          <p:cNvPr id="12" name="TextBox 11"/>
           <p:cNvSpPr txBox="1"/>
           <p:nvPr/>
         </p:nvSpPr>
         <p:spPr>
           <a:xfrm>
-            <a:off x="3044952" y="2816352"/>
-            <a:ext cx="8101583" cy="420624"/>
+            <a:off x="3538728" y="2715768"/>
+            <a:ext cx="4050791" cy="393192"/>
           </a:xfrm>
           <a:prstGeom prst="rect">
             <a:avLst/>
@@ -17490,30 +14424,30 @@
               <a:spcAft>
                 <a:spcPts val="0"/>
               </a:spcAft>
-              <a:defRPr sz="2600" b="1">
-                <a:solidFill>
-                  <a:srgbClr val="182B37"/>
-                </a:solidFill>
-                <a:latin typeface="Microsoft YaHei"/>
-                <a:ea typeface="Microsoft YaHei"/>
-              </a:defRPr>
-            </a:pPr>
-            <a:r>
-              <a:t>完整输入  →  一次写全文  →  直接交付</a:t>
-            </a:r>
-          </a:p>
-        </p:txBody>
-      </p:sp>
-      <p:sp>
-        <p:nvSpPr>
-          <p:cNvPr id="11" name="TextBox 10"/>
+              <a:defRPr sz="2000" b="1">
+                <a:solidFill>
+                  <a:srgbClr val="267868"/>
+                </a:solidFill>
+                <a:latin typeface="Microsoft YaHei"/>
+                <a:ea typeface="Microsoft YaHei"/>
+              </a:defRPr>
+            </a:pPr>
+            <a:r>
+              <a:t>文化节点＋选定改编方案</a:t>
+            </a:r>
+          </a:p>
+        </p:txBody>
+      </p:sp>
+      <p:sp>
+        <p:nvSpPr>
+          <p:cNvPr id="13" name="TextBox 12"/>
           <p:cNvSpPr txBox="1"/>
           <p:nvPr/>
         </p:nvSpPr>
         <p:spPr>
           <a:xfrm>
-            <a:off x="3063240" y="3675887"/>
-            <a:ext cx="8119872" cy="420624"/>
+            <a:off x="7818120" y="2615184"/>
+            <a:ext cx="3429000" cy="603504"/>
           </a:xfrm>
           <a:prstGeom prst="rect">
             <a:avLst/>
@@ -17536,30 +14470,53 @@
               <a:spcAft>
                 <a:spcPts val="0"/>
               </a:spcAft>
-              <a:defRPr sz="2300" b="1">
-                <a:solidFill>
-                  <a:srgbClr val="C64B3C"/>
-                </a:solidFill>
-                <a:latin typeface="Microsoft YaHei"/>
-                <a:ea typeface="Microsoft YaHei"/>
-              </a:defRPr>
-            </a:pPr>
-            <a:r>
-              <a:t>没有后续检查，写错的内容也会一起交出去。</a:t>
-            </a:r>
-          </a:p>
-        </p:txBody>
-      </p:sp>
-      <p:sp>
-        <p:nvSpPr>
-          <p:cNvPr id="12" name="Rounded Rectangle 11"/>
+              <a:defRPr sz="1800" b="0">
+                <a:solidFill>
+                  <a:srgbClr val="182B37"/>
+                </a:solidFill>
+                <a:latin typeface="Microsoft YaHei"/>
+                <a:ea typeface="Microsoft YaHei"/>
+              </a:defRPr>
+            </a:pPr>
+            <a:r>
+              <a:t>高考 → SAT/ACT</a:t>
+            </a:r>
+          </a:p>
+          <a:p>
+            <a:pPr algn="l">
+              <a:lnSpc>
+                <a:spcPct val="116000"/>
+              </a:lnSpc>
+              <a:spcBef>
+                <a:spcPts val="0"/>
+              </a:spcBef>
+              <a:spcAft>
+                <a:spcPts val="0"/>
+              </a:spcAft>
+              <a:defRPr sz="1800" b="0">
+                <a:solidFill>
+                  <a:srgbClr val="182B37"/>
+                </a:solidFill>
+                <a:latin typeface="Microsoft YaHei"/>
+                <a:ea typeface="Microsoft YaHei"/>
+              </a:defRPr>
+            </a:pPr>
+            <a:r>
+              <a:t>与大学申请体系</a:t>
+            </a:r>
+          </a:p>
+        </p:txBody>
+      </p:sp>
+      <p:sp>
+        <p:nvSpPr>
+          <p:cNvPr id="14" name="Rounded Rectangle 13"/>
           <p:cNvSpPr/>
           <p:nvPr/>
         </p:nvSpPr>
         <p:spPr>
           <a:xfrm>
-            <a:off x="722376" y="4526280"/>
-            <a:ext cx="10744200" cy="877824"/>
+            <a:off x="704088" y="3447288"/>
+            <a:ext cx="10799064" cy="804672"/>
           </a:xfrm>
           <a:prstGeom prst="roundRect">
             <a:avLst>
@@ -17567,10 +14524,12 @@
             </a:avLst>
           </a:prstGeom>
           <a:solidFill>
-            <a:srgbClr val="E7F0EC"/>
+            <a:srgbClr val="FFFFFF"/>
           </a:solidFill>
-          <a:ln>
-            <a:noFill/>
+          <a:ln w="8890">
+            <a:solidFill>
+              <a:srgbClr val="DEDACF"/>
+            </a:solidFill>
           </a:ln>
         </p:spPr>
         <p:style>
@@ -17597,14 +14556,14 @@
       </p:sp>
       <p:sp>
         <p:nvSpPr>
-          <p:cNvPr id="13" name="TextBox 12"/>
+          <p:cNvPr id="15" name="TextBox 14"/>
           <p:cNvSpPr txBox="1"/>
           <p:nvPr/>
         </p:nvSpPr>
         <p:spPr>
           <a:xfrm>
-            <a:off x="941832" y="4782312"/>
-            <a:ext cx="2075688" cy="384048"/>
+            <a:off x="896112" y="3666744"/>
+            <a:ext cx="2578608" cy="393192"/>
           </a:xfrm>
           <a:prstGeom prst="rect">
             <a:avLst/>
@@ -17627,30 +14586,30 @@
               <a:spcAft>
                 <a:spcPts val="0"/>
               </a:spcAft>
-              <a:defRPr sz="2200" b="1">
-                <a:solidFill>
-                  <a:srgbClr val="267868"/>
-                </a:solidFill>
-                <a:latin typeface="Microsoft YaHei"/>
-                <a:ea typeface="Microsoft YaHei"/>
-              </a:defRPr>
-            </a:pPr>
-            <a:r>
-              <a:t>StoryBridge</a:t>
-            </a:r>
-          </a:p>
-        </p:txBody>
-      </p:sp>
-      <p:sp>
-        <p:nvSpPr>
-          <p:cNvPr id="14" name="TextBox 13"/>
+              <a:defRPr sz="2000" b="1">
+                <a:solidFill>
+                  <a:srgbClr val="182B37"/>
+                </a:solidFill>
+                <a:latin typeface="Microsoft YaHei"/>
+                <a:ea typeface="Microsoft YaHei"/>
+              </a:defRPr>
+            </a:pPr>
+            <a:r>
+              <a:t>哪些后文要跟着改？</a:t>
+            </a:r>
+          </a:p>
+        </p:txBody>
+      </p:sp>
+      <p:sp>
+        <p:nvSpPr>
+          <p:cNvPr id="16" name="TextBox 15"/>
           <p:cNvSpPr txBox="1"/>
           <p:nvPr/>
         </p:nvSpPr>
         <p:spPr>
           <a:xfrm>
-            <a:off x="3044952" y="4782312"/>
-            <a:ext cx="8101583" cy="393192"/>
+            <a:off x="3538728" y="3666744"/>
+            <a:ext cx="4050791" cy="393192"/>
           </a:xfrm>
           <a:prstGeom prst="rect">
             <a:avLst/>
@@ -17673,7 +14632,7 @@
               <a:spcAft>
                 <a:spcPts val="0"/>
               </a:spcAft>
-              <a:defRPr sz="2300" b="1">
+              <a:defRPr sz="2000" b="1">
                 <a:solidFill>
                   <a:srgbClr val="267868"/>
                 </a:solidFill>
@@ -17682,21 +14641,90 @@
               </a:defRPr>
             </a:pPr>
             <a:r>
-              <a:t>故事状态 → 依赖图 → 逐场改写 → 检查修复</a:t>
-            </a:r>
-          </a:p>
-        </p:txBody>
-      </p:sp>
-      <p:sp>
-        <p:nvSpPr>
-          <p:cNvPr id="15" name="Rounded Rectangle 14"/>
+              <a:t>依赖图＋场景清单＋原因路径</a:t>
+            </a:r>
+          </a:p>
+        </p:txBody>
+      </p:sp>
+      <p:sp>
+        <p:nvSpPr>
+          <p:cNvPr id="17" name="TextBox 16"/>
+          <p:cNvSpPr txBox="1"/>
+          <p:nvPr/>
+        </p:nvSpPr>
+        <p:spPr>
+          <a:xfrm>
+            <a:off x="7818120" y="3566160"/>
+            <a:ext cx="3429000" cy="603504"/>
+          </a:xfrm>
+          <a:prstGeom prst="rect">
+            <a:avLst/>
+          </a:prstGeom>
+          <a:noFill/>
+        </p:spPr>
+        <p:txBody>
+          <a:bodyPr wrap="square" lIns="0" rIns="0" tIns="0" bIns="0" anchor="t">
+            <a:spAutoFit/>
+          </a:bodyPr>
+          <a:lstStyle/>
+          <a:p>
+            <a:pPr algn="l">
+              <a:lnSpc>
+                <a:spcPct val="116000"/>
+              </a:lnSpc>
+              <a:spcBef>
+                <a:spcPts val="0"/>
+              </a:spcBef>
+              <a:spcAft>
+                <a:spcPts val="0"/>
+              </a:spcAft>
+              <a:defRPr sz="1800" b="0">
+                <a:solidFill>
+                  <a:srgbClr val="182B37"/>
+                </a:solidFill>
+                <a:latin typeface="Microsoft YaHei"/>
+                <a:ea typeface="Microsoft YaHei"/>
+              </a:defRPr>
+            </a:pPr>
+            <a:r>
+              <a:t>CM01 → 7 个场景</a:t>
+            </a:r>
+          </a:p>
+          <a:p>
+            <a:pPr algn="l">
+              <a:lnSpc>
+                <a:spcPct val="116000"/>
+              </a:lnSpc>
+              <a:spcBef>
+                <a:spcPts val="0"/>
+              </a:spcBef>
+              <a:spcAft>
+                <a:spcPts val="0"/>
+              </a:spcAft>
+              <a:defRPr sz="1800" b="0">
+                <a:solidFill>
+                  <a:srgbClr val="182B37"/>
+                </a:solidFill>
+                <a:latin typeface="Microsoft YaHei"/>
+                <a:ea typeface="Microsoft YaHei"/>
+              </a:defRPr>
+            </a:pPr>
+            <a:r>
+              <a:t>每场附原文依据</a:t>
+            </a:r>
+          </a:p>
+        </p:txBody>
+      </p:sp>
+      <p:sp>
+        <p:nvSpPr>
+          <p:cNvPr id="18" name="Rounded Rectangle 17"/>
           <p:cNvSpPr/>
           <p:nvPr/>
         </p:nvSpPr>
         <p:spPr>
           <a:xfrm>
-            <a:off x="658368" y="5687568"/>
-            <a:ext cx="10881360" cy="576072"/>
+            <a:off x="704088" y="4398264"/>
+            <a:ext cx="10799064" cy="804672"/>
           </a:xfrm>
           <a:prstGeom prst="roundRect">
             <a:avLst>
@@ -17704,10 +14732,12 @@
             </a:avLst>
           </a:prstGeom>
           <a:solidFill>
-            <a:srgbClr val="E7F0EC"/>
+            <a:srgbClr val="FFFFFF"/>
           </a:solidFill>
-          <a:ln>
-            <a:noFill/>
+          <a:ln w="8890">
+            <a:solidFill>
+              <a:srgbClr val="DEDACF"/>
+            </a:solidFill>
           </a:ln>
         </p:spPr>
         <p:style>
@@ -17734,14 +14764,14 @@
       </p:sp>
       <p:sp>
         <p:nvSpPr>
-          <p:cNvPr id="16" name="TextBox 15"/>
+          <p:cNvPr id="19" name="TextBox 18"/>
           <p:cNvSpPr txBox="1"/>
           <p:nvPr/>
         </p:nvSpPr>
         <p:spPr>
           <a:xfrm>
-            <a:off x="859536" y="5824728"/>
-            <a:ext cx="10479024" cy="347472"/>
+            <a:off x="896112" y="4617720"/>
+            <a:ext cx="2578608" cy="393192"/>
           </a:xfrm>
           <a:prstGeom prst="rect">
             <a:avLst/>
@@ -17754,6 +14784,212 @@
           </a:bodyPr>
           <a:lstStyle/>
           <a:p>
+            <a:pPr algn="l">
+              <a:lnSpc>
+                <a:spcPct val="116000"/>
+              </a:lnSpc>
+              <a:spcBef>
+                <a:spcPts val="0"/>
+              </a:spcBef>
+              <a:spcAft>
+                <a:spcPts val="0"/>
+              </a:spcAft>
+              <a:defRPr sz="2000" b="1">
+                <a:solidFill>
+                  <a:srgbClr val="182B37"/>
+                </a:solidFill>
+                <a:latin typeface="Microsoft YaHei"/>
+                <a:ea typeface="Microsoft YaHei"/>
+              </a:defRPr>
+            </a:pPr>
+            <a:r>
+              <a:t>发现问题怎么继续？</a:t>
+            </a:r>
+          </a:p>
+        </p:txBody>
+      </p:sp>
+      <p:sp>
+        <p:nvSpPr>
+          <p:cNvPr id="20" name="TextBox 19"/>
+          <p:cNvSpPr txBox="1"/>
+          <p:nvPr/>
+        </p:nvSpPr>
+        <p:spPr>
+          <a:xfrm>
+            <a:off x="3538728" y="4617720"/>
+            <a:ext cx="4050791" cy="393192"/>
+          </a:xfrm>
+          <a:prstGeom prst="rect">
+            <a:avLst/>
+          </a:prstGeom>
+          <a:noFill/>
+        </p:spPr>
+        <p:txBody>
+          <a:bodyPr wrap="square" lIns="0" rIns="0" tIns="0" bIns="0" anchor="t">
+            <a:spAutoFit/>
+          </a:bodyPr>
+          <a:lstStyle/>
+          <a:p>
+            <a:pPr algn="l">
+              <a:lnSpc>
+                <a:spcPct val="116000"/>
+              </a:lnSpc>
+              <a:spcBef>
+                <a:spcPts val="0"/>
+              </a:spcBef>
+              <a:spcAft>
+                <a:spcPts val="0"/>
+              </a:spcAft>
+              <a:defRPr sz="2000" b="1">
+                <a:solidFill>
+                  <a:srgbClr val="267868"/>
+                </a:solidFill>
+                <a:latin typeface="Microsoft YaHei"/>
+                <a:ea typeface="Microsoft YaHei"/>
+              </a:defRPr>
+            </a:pPr>
+            <a:r>
+              <a:t>检查报告＋按场修复记录</a:t>
+            </a:r>
+          </a:p>
+        </p:txBody>
+      </p:sp>
+      <p:sp>
+        <p:nvSpPr>
+          <p:cNvPr id="21" name="TextBox 20"/>
+          <p:cNvSpPr txBox="1"/>
+          <p:nvPr/>
+        </p:nvSpPr>
+        <p:spPr>
+          <a:xfrm>
+            <a:off x="7818120" y="4517136"/>
+            <a:ext cx="3429000" cy="603504"/>
+          </a:xfrm>
+          <a:prstGeom prst="rect">
+            <a:avLst/>
+          </a:prstGeom>
+          <a:noFill/>
+        </p:spPr>
+        <p:txBody>
+          <a:bodyPr wrap="square" lIns="0" rIns="0" tIns="0" bIns="0" anchor="t">
+            <a:spAutoFit/>
+          </a:bodyPr>
+          <a:lstStyle/>
+          <a:p>
+            <a:pPr algn="l">
+              <a:lnSpc>
+                <a:spcPct val="116000"/>
+              </a:lnSpc>
+              <a:spcBef>
+                <a:spcPts val="0"/>
+              </a:spcBef>
+              <a:spcAft>
+                <a:spcPts val="0"/>
+              </a:spcAft>
+              <a:defRPr sz="1800" b="0">
+                <a:solidFill>
+                  <a:srgbClr val="182B37"/>
+                </a:solidFill>
+                <a:latin typeface="Microsoft YaHei"/>
+                <a:ea typeface="Microsoft YaHei"/>
+              </a:defRPr>
+            </a:pPr>
+            <a:r>
+              <a:t>12/12 场景、7/7 承诺</a:t>
+            </a:r>
+          </a:p>
+          <a:p>
+            <a:pPr algn="l">
+              <a:lnSpc>
+                <a:spcPct val="116000"/>
+              </a:lnSpc>
+              <a:spcBef>
+                <a:spcPts val="0"/>
+              </a:spcBef>
+              <a:spcAft>
+                <a:spcPts val="0"/>
+              </a:spcAft>
+              <a:defRPr sz="1800" b="0">
+                <a:solidFill>
+                  <a:srgbClr val="182B37"/>
+                </a:solidFill>
+                <a:latin typeface="Microsoft YaHei"/>
+                <a:ea typeface="Microsoft YaHei"/>
+              </a:defRPr>
+            </a:pPr>
+            <a:r>
+              <a:t>错误 0，待确认 1</a:t>
+            </a:r>
+          </a:p>
+        </p:txBody>
+      </p:sp>
+      <p:sp>
+        <p:nvSpPr>
+          <p:cNvPr id="22" name="Rounded Rectangle 21"/>
+          <p:cNvSpPr/>
+          <p:nvPr/>
+        </p:nvSpPr>
+        <p:spPr>
+          <a:xfrm>
+            <a:off x="658368" y="5687568"/>
+            <a:ext cx="10881360" cy="576072"/>
+          </a:xfrm>
+          <a:prstGeom prst="roundRect">
+            <a:avLst>
+              <a:gd name="adj" fmla="val 5000"/>
+            </a:avLst>
+          </a:prstGeom>
+          <a:solidFill>
+            <a:srgbClr val="E7F0EC"/>
+          </a:solidFill>
+          <a:ln>
+            <a:noFill/>
+          </a:ln>
+        </p:spPr>
+        <p:style>
+          <a:lnRef idx="1">
+            <a:schemeClr val="accent1"/>
+          </a:lnRef>
+          <a:fillRef idx="3">
+            <a:schemeClr val="accent1"/>
+          </a:fillRef>
+          <a:effectRef idx="2">
+            <a:schemeClr val="accent1"/>
+          </a:effectRef>
+          <a:fontRef idx="minor">
+            <a:schemeClr val="lt1"/>
+          </a:fontRef>
+        </p:style>
+        <p:txBody>
+          <a:bodyPr rtlCol="0" anchor="ctr"/>
+          <a:lstStyle/>
+          <a:p>
+            <a:pPr algn="ctr"/>
+          </a:p>
+        </p:txBody>
+      </p:sp>
+      <p:sp>
+        <p:nvSpPr>
+          <p:cNvPr id="23" name="TextBox 22"/>
+          <p:cNvSpPr txBox="1"/>
+          <p:nvPr/>
+        </p:nvSpPr>
+        <p:spPr>
+          <a:xfrm>
+            <a:off x="859536" y="5824728"/>
+            <a:ext cx="10479024" cy="347472"/>
+          </a:xfrm>
+          <a:prstGeom prst="rect">
+            <a:avLst/>
+          </a:prstGeom>
+          <a:noFill/>
+        </p:spPr>
+        <p:txBody>
+          <a:bodyPr wrap="square" lIns="0" rIns="0" tIns="0" bIns="0" anchor="t">
+            <a:spAutoFit/>
+          </a:bodyPr>
+          <a:lstStyle/>
+          <a:p>
             <a:pPr algn="ctr">
               <a:lnSpc>
                 <a:spcPct val="116000"/>
@@ -17773,7 +15009,7 @@
               </a:defRPr>
             </a:pPr>
             <a:r>
-              <a:t>“生成结束”不能当成“改编完成”。</a:t>
+              <a:t>Baseline 交出成稿；StoryBridge 还交出改编依据、影响路径和修复记录。</a:t>
             </a:r>
           </a:p>
         </p:txBody>
